--- a/RSA_26_Jiarun_Liu_poster.pptx
+++ b/RSA_26_Jiarun_Liu_poster.pptx
@@ -1,22 +1,22 @@
 
 <file path=ppt/presentation.xml><?xml version="1.0" encoding="utf-8"?>
-<p:presentation xmlns:p="http://schemas.openxmlformats.org/presentationml/2006/main">
+<p:presentation xmlns:a="http://schemas.openxmlformats.org/drawingml/2006/main" xmlns:r="http://schemas.openxmlformats.org/officeDocument/2006/relationships" xmlns:p="http://schemas.openxmlformats.org/presentationml/2006/main">
   <p:sldMasterIdLst>
-    <p:sldMasterId xmlns:r="http://schemas.openxmlformats.org/officeDocument/2006/relationships" id="2147483648" r:id="Rff494264959f463b"/>
+    <p:sldMasterId id="2147483648" r:id="rId1"/>
   </p:sldMasterIdLst>
   <p:notesMasterIdLst>
-    <p:notesMasterId xmlns:r="http://schemas.openxmlformats.org/officeDocument/2006/relationships" r:id="Ra8d140cf692a434d"/>
+    <p:notesMasterId r:id="rId3"/>
   </p:notesMasterIdLst>
   <p:sldIdLst>
-    <p:sldId xmlns:r="http://schemas.openxmlformats.org/officeDocument/2006/relationships" id="256" r:id="R8b8a3c4611bb4d12"/>
+    <p:sldId id="256" r:id="rId2"/>
   </p:sldIdLst>
   <p:sldSz cx="41148000" cy="32918400"/>
   <p:notesSz cx="6858000" cy="9144000"/>
   <p:defaultTextStyle>
-    <a:defPPr xmlns:a="http://schemas.openxmlformats.org/drawingml/2006/main">
+    <a:defPPr>
       <a:defRPr lang="en-US"/>
     </a:defPPr>
-    <a:lvl1pPr xmlns:a="http://schemas.openxmlformats.org/drawingml/2006/main" marL="0" indent="0" algn="l" defTabSz="914400">
+    <a:lvl1pPr marL="0" indent="0" algn="l" defTabSz="914400">
       <a:defRPr sz="1800" kern="1200">
         <a:solidFill>
           <a:schemeClr val="tx1"/>
@@ -26,7 +26,7 @@
         <a:cs typeface="+mn-cs"/>
       </a:defRPr>
     </a:lvl1pPr>
-    <a:lvl2pPr xmlns:a="http://schemas.openxmlformats.org/drawingml/2006/main" marL="457200" indent="0" algn="l" defTabSz="914400">
+    <a:lvl2pPr marL="457200" indent="0" algn="l" defTabSz="914400">
       <a:defRPr sz="1800" kern="1200">
         <a:solidFill>
           <a:schemeClr val="tx1"/>
@@ -36,7 +36,7 @@
         <a:cs typeface="+mn-cs"/>
       </a:defRPr>
     </a:lvl2pPr>
-    <a:lvl3pPr xmlns:a="http://schemas.openxmlformats.org/drawingml/2006/main" marL="914400" indent="0" algn="l" defTabSz="914400">
+    <a:lvl3pPr marL="914400" indent="0" algn="l" defTabSz="914400">
       <a:defRPr sz="1800" kern="1200">
         <a:solidFill>
           <a:schemeClr val="tx1"/>
@@ -46,7 +46,7 @@
         <a:cs typeface="+mn-cs"/>
       </a:defRPr>
     </a:lvl3pPr>
-    <a:lvl4pPr xmlns:a="http://schemas.openxmlformats.org/drawingml/2006/main" marL="1371600" indent="0" algn="l" defTabSz="914400">
+    <a:lvl4pPr marL="1371600" indent="0" algn="l" defTabSz="914400">
       <a:defRPr sz="1800" kern="1200">
         <a:solidFill>
           <a:schemeClr val="tx1"/>
@@ -56,7 +56,7 @@
         <a:cs typeface="+mn-cs"/>
       </a:defRPr>
     </a:lvl4pPr>
-    <a:lvl5pPr xmlns:a="http://schemas.openxmlformats.org/drawingml/2006/main" marL="1828800" indent="0" algn="l" defTabSz="914400">
+    <a:lvl5pPr marL="1828800" indent="0" algn="l" defTabSz="914400">
       <a:defRPr sz="1800" kern="1200">
         <a:solidFill>
           <a:schemeClr val="tx1"/>
@@ -66,7 +66,7 @@
         <a:cs typeface="+mn-cs"/>
       </a:defRPr>
     </a:lvl5pPr>
-    <a:lvl6pPr xmlns:a="http://schemas.openxmlformats.org/drawingml/2006/main" marL="2286000" indent="0" algn="l" defTabSz="914400">
+    <a:lvl6pPr marL="2286000" indent="0" algn="l" defTabSz="914400">
       <a:defRPr sz="1800" kern="1200">
         <a:solidFill>
           <a:schemeClr val="tx1"/>
@@ -76,7 +76,7 @@
         <a:cs typeface="+mn-cs"/>
       </a:defRPr>
     </a:lvl6pPr>
-    <a:lvl7pPr xmlns:a="http://schemas.openxmlformats.org/drawingml/2006/main" marL="2743200" indent="0" algn="l" defTabSz="914400">
+    <a:lvl7pPr marL="2743200" indent="0" algn="l" defTabSz="914400">
       <a:defRPr sz="1800" kern="1200">
         <a:solidFill>
           <a:schemeClr val="tx1"/>
@@ -86,7 +86,7 @@
         <a:cs typeface="+mn-cs"/>
       </a:defRPr>
     </a:lvl7pPr>
-    <a:lvl8pPr xmlns:a="http://schemas.openxmlformats.org/drawingml/2006/main" marL="3200400" indent="0" algn="l" defTabSz="914400">
+    <a:lvl8pPr marL="3200400" indent="0" algn="l" defTabSz="914400">
       <a:defRPr sz="1800" kern="1200">
         <a:solidFill>
           <a:schemeClr val="tx1"/>
@@ -96,7 +96,7 @@
         <a:cs typeface="+mn-cs"/>
       </a:defRPr>
     </a:lvl8pPr>
-    <a:lvl9pPr xmlns:a="http://schemas.openxmlformats.org/drawingml/2006/main" marL="3657600" indent="0" algn="l" defTabSz="914400">
+    <a:lvl9pPr marL="3657600" indent="0" algn="l" defTabSz="914400">
       <a:defRPr sz="1800" kern="1200">
         <a:solidFill>
           <a:schemeClr val="tx1"/>
@@ -107,15 +107,20 @@
       </a:defRPr>
     </a:lvl9pPr>
   </p:defaultTextStyle>
+  <p:extLst>
+    <p:ext uri="{EFAFB233-063F-42B5-8137-9DF3F51BA10A}">
+      <p15:sldGuideLst xmlns:p15="http://schemas.microsoft.com/office/powerpoint/2012/main"/>
+    </p:ext>
+  </p:extLst>
 </p:presentation>
 </file>
 
 <file path=ppt/notesMasters/notesMaster1.xml><?xml version="1.0" encoding="utf-8"?>
-<p:notesMaster xmlns:p="http://schemas.openxmlformats.org/presentationml/2006/main">
+<p:notesMaster xmlns:a="http://schemas.openxmlformats.org/drawingml/2006/main" xmlns:r="http://schemas.openxmlformats.org/officeDocument/2006/relationships" xmlns:p="http://schemas.openxmlformats.org/presentationml/2006/main">
   <p:cSld>
     <p:bg>
       <p:bgRef idx="1001">
-        <a:schemeClr xmlns:a="http://schemas.openxmlformats.org/drawingml/2006/main" val="bg1"/>
+        <a:schemeClr val="bg1"/>
       </p:bgRef>
     </p:bg>
     <p:spTree>
@@ -125,420 +130,164 @@
         <p:nvPr/>
       </p:nvGrpSpPr>
       <p:grpSpPr>
-        <a:xfrm xmlns:a="http://schemas.openxmlformats.org/drawingml/2006/main"/>
+        <a:xfrm>
+          <a:off x="0" y="0"/>
+          <a:ext cx="0" cy="0"/>
+          <a:chOff x="0" y="0"/>
+          <a:chExt cx="0" cy="0"/>
+        </a:xfrm>
       </p:grpSpPr>
       <p:sp>
         <p:nvSpPr>
           <p:cNvPr id="2" name="Header Placeholder"/>
-          <p:cNvSpPr/>
+          <p:cNvSpPr>
+            <a:spLocks noGrp="1"/>
+          </p:cNvSpPr>
           <p:nvPr>
             <p:ph type="hdr" sz="quarter"/>
           </p:nvPr>
         </p:nvSpPr>
         <p:spPr>
-          <a:prstGeom xmlns:a="http://schemas.openxmlformats.org/drawingml/2006/main" prst="rect">
-            <a:avLst/>
-          </a:prstGeom>
-        </p:spPr>
-        <p:txBody>
-          <a:bodyPr xmlns:a="http://schemas.openxmlformats.org/drawingml/2006/main"/>
-          <a:lstStyle xmlns:a="http://schemas.openxmlformats.org/drawingml/2006/main"/>
-          <a:p xmlns:a="http://schemas.openxmlformats.org/drawingml/2006/main"/>
+          <a:prstGeom prst="rect">
+            <a:avLst/>
+          </a:prstGeom>
+        </p:spPr>
+        <p:txBody>
+          <a:bodyPr/>
+          <a:lstStyle/>
+          <a:p>
+            <a:endParaRPr/>
+          </a:p>
         </p:txBody>
       </p:sp>
       <p:sp>
         <p:nvSpPr>
           <p:cNvPr id="3" name="Date Placeholder"/>
-          <p:cNvSpPr/>
+          <p:cNvSpPr>
+            <a:spLocks noGrp="1"/>
+          </p:cNvSpPr>
           <p:nvPr>
             <p:ph type="dt" sz="quarter" idx="1"/>
           </p:nvPr>
         </p:nvSpPr>
         <p:spPr>
-          <a:prstGeom xmlns:a="http://schemas.openxmlformats.org/drawingml/2006/main" prst="rect">
-            <a:avLst/>
-          </a:prstGeom>
-        </p:spPr>
-        <p:txBody>
-          <a:bodyPr xmlns:a="http://schemas.openxmlformats.org/drawingml/2006/main"/>
-          <a:lstStyle xmlns:a="http://schemas.openxmlformats.org/drawingml/2006/main"/>
-          <a:p xmlns:a="http://schemas.openxmlformats.org/drawingml/2006/main"/>
+          <a:prstGeom prst="rect">
+            <a:avLst/>
+          </a:prstGeom>
+        </p:spPr>
+        <p:txBody>
+          <a:bodyPr/>
+          <a:lstStyle/>
+          <a:p>
+            <a:endParaRPr/>
+          </a:p>
         </p:txBody>
       </p:sp>
       <p:sp>
         <p:nvSpPr>
           <p:cNvPr id="4" name="Slide Image Placeholder"/>
-          <p:cNvSpPr/>
+          <p:cNvSpPr>
+            <a:spLocks noGrp="1" noRot="1" noChangeAspect="1"/>
+          </p:cNvSpPr>
           <p:nvPr>
             <p:ph type="sldImg" idx="2"/>
           </p:nvPr>
         </p:nvSpPr>
         <p:spPr>
-          <a:prstGeom xmlns:a="http://schemas.openxmlformats.org/drawingml/2006/main" prst="rect">
-            <a:avLst/>
-          </a:prstGeom>
-        </p:spPr>
-        <p:txBody>
-          <a:bodyPr xmlns:a="http://schemas.openxmlformats.org/drawingml/2006/main"/>
-          <a:lstStyle xmlns:a="http://schemas.openxmlformats.org/drawingml/2006/main"/>
-          <a:p xmlns:a="http://schemas.openxmlformats.org/drawingml/2006/main"/>
+          <a:prstGeom prst="rect">
+            <a:avLst/>
+          </a:prstGeom>
+        </p:spPr>
+        <p:txBody>
+          <a:bodyPr/>
+          <a:lstStyle/>
+          <a:p>
+            <a:endParaRPr/>
+          </a:p>
         </p:txBody>
       </p:sp>
       <p:sp>
         <p:nvSpPr>
           <p:cNvPr id="5" name="Notes Placeholder"/>
-          <p:cNvSpPr/>
+          <p:cNvSpPr>
+            <a:spLocks noGrp="1"/>
+          </p:cNvSpPr>
           <p:nvPr>
             <p:ph type="body" sz="quarter" idx="3"/>
           </p:nvPr>
         </p:nvSpPr>
         <p:spPr>
-          <a:prstGeom xmlns:a="http://schemas.openxmlformats.org/drawingml/2006/main" prst="rect">
-            <a:avLst/>
-          </a:prstGeom>
-        </p:spPr>
-        <p:txBody>
-          <a:bodyPr xmlns:a="http://schemas.openxmlformats.org/drawingml/2006/main"/>
-          <a:lstStyle xmlns:a="http://schemas.openxmlformats.org/drawingml/2006/main"/>
-          <a:p xmlns:a="http://schemas.openxmlformats.org/drawingml/2006/main"/>
+          <a:prstGeom prst="rect">
+            <a:avLst/>
+          </a:prstGeom>
+        </p:spPr>
+        <p:txBody>
+          <a:bodyPr/>
+          <a:lstStyle/>
+          <a:p>
+            <a:endParaRPr/>
+          </a:p>
         </p:txBody>
       </p:sp>
       <p:sp>
         <p:nvSpPr>
           <p:cNvPr id="6" name="Footer Placeholder"/>
-          <p:cNvSpPr/>
+          <p:cNvSpPr>
+            <a:spLocks noGrp="1"/>
+          </p:cNvSpPr>
           <p:nvPr>
             <p:ph type="ftr" sz="quarter" idx="4"/>
           </p:nvPr>
         </p:nvSpPr>
         <p:spPr>
-          <a:prstGeom xmlns:a="http://schemas.openxmlformats.org/drawingml/2006/main" prst="rect">
-            <a:avLst/>
-          </a:prstGeom>
-        </p:spPr>
-        <p:txBody>
-          <a:bodyPr xmlns:a="http://schemas.openxmlformats.org/drawingml/2006/main"/>
-          <a:lstStyle xmlns:a="http://schemas.openxmlformats.org/drawingml/2006/main"/>
-          <a:p xmlns:a="http://schemas.openxmlformats.org/drawingml/2006/main"/>
+          <a:prstGeom prst="rect">
+            <a:avLst/>
+          </a:prstGeom>
+        </p:spPr>
+        <p:txBody>
+          <a:bodyPr/>
+          <a:lstStyle/>
+          <a:p>
+            <a:endParaRPr/>
+          </a:p>
         </p:txBody>
       </p:sp>
       <p:sp>
         <p:nvSpPr>
           <p:cNvPr id="7" name="Slide Number Placeholder"/>
-          <p:cNvSpPr/>
+          <p:cNvSpPr>
+            <a:spLocks noGrp="1"/>
+          </p:cNvSpPr>
           <p:nvPr>
             <p:ph type="sldNum" sz="quarter" idx="5"/>
           </p:nvPr>
         </p:nvSpPr>
         <p:spPr>
-          <a:prstGeom xmlns:a="http://schemas.openxmlformats.org/drawingml/2006/main" prst="rect">
-            <a:avLst/>
-          </a:prstGeom>
-        </p:spPr>
-        <p:txBody>
-          <a:bodyPr xmlns:a="http://schemas.openxmlformats.org/drawingml/2006/main"/>
-          <a:lstStyle xmlns:a="http://schemas.openxmlformats.org/drawingml/2006/main"/>
-          <a:p xmlns:a="http://schemas.openxmlformats.org/drawingml/2006/main"/>
+          <a:prstGeom prst="rect">
+            <a:avLst/>
+          </a:prstGeom>
+        </p:spPr>
+        <p:txBody>
+          <a:bodyPr/>
+          <a:lstStyle/>
+          <a:p>
+            <a:endParaRPr/>
+          </a:p>
         </p:txBody>
       </p:sp>
     </p:spTree>
   </p:cSld>
   <p:clrMap bg1="lt1" tx1="dk1" bg2="lt2" tx2="dk2" accent1="accent1" accent2="accent2" accent3="accent3" accent4="accent4" accent5="accent5" accent6="accent6" hlink="hlink" folHlink="folHlink"/>
   <p:notesStyle>
-    <a:lvl1pPr xmlns:a="http://schemas.openxmlformats.org/drawingml/2006/main" marL="0" algn="l" defTabSz="914400" rtl="0" eaLnBrk="1" latinLnBrk="0" hangingPunct="1">
+    <a:lvl1pPr marL="0" algn="l" defTabSz="914400" rtl="0" eaLnBrk="1" latinLnBrk="0" hangingPunct="1">
       <a:defRPr sz="1200" kern="1200"/>
     </a:lvl1pPr>
   </p:notesStyle>
 </p:notesMaster>
 </file>
 
-<file path=ppt/notesMasters/theme/theme3.xml><?xml version="1.0" encoding="utf-8"?>
-<a:theme xmlns:a="http://schemas.openxmlformats.org/drawingml/2006/main" name="Office Theme">
-  <a:themeElements>
-    <a:clrScheme name="Office">
-      <a:dk1>
-        <a:sysClr val="windowText" lastClr="000000"/>
-      </a:dk1>
-      <a:lt1>
-        <a:sysClr val="window" lastClr="FFFFFF"/>
-      </a:lt1>
-      <a:dk2>
-        <a:srgbClr val="44546A"/>
-      </a:dk2>
-      <a:lt2>
-        <a:srgbClr val="E7E6E6"/>
-      </a:lt2>
-      <a:accent1>
-        <a:srgbClr val="4472C4"/>
-      </a:accent1>
-      <a:accent2>
-        <a:srgbClr val="ED7D31"/>
-      </a:accent2>
-      <a:accent3>
-        <a:srgbClr val="A5A5A5"/>
-      </a:accent3>
-      <a:accent4>
-        <a:srgbClr val="FFC000"/>
-      </a:accent4>
-      <a:accent5>
-        <a:srgbClr val="5B9BD5"/>
-      </a:accent5>
-      <a:accent6>
-        <a:srgbClr val="70AD47"/>
-      </a:accent6>
-      <a:hlink>
-        <a:srgbClr val="0563C1"/>
-      </a:hlink>
-      <a:folHlink>
-        <a:srgbClr val="954F72"/>
-      </a:folHlink>
-    </a:clrScheme>
-    <a:fontScheme name="Office">
-      <a:majorFont>
-        <a:latin typeface="Aptos Display"/>
-        <a:ea typeface=""/>
-        <a:cs typeface=""/>
-        <a:font script="Jpan" typeface="游ゴシック Light"/>
-        <a:font script="Hang" typeface="맑은 고딕"/>
-        <a:font script="Hans" typeface="等线 Light"/>
-        <a:font script="Hant" typeface="新細明體"/>
-        <a:font script="Arab" typeface="Times New Roman"/>
-        <a:font script="Hebr" typeface="Times New Roman"/>
-        <a:font script="Thai" typeface="Angsana New"/>
-        <a:font script="Ethi" typeface="Nyala"/>
-        <a:font script="Beng" typeface="Vrinda"/>
-        <a:font script="Gujr" typeface="Shruti"/>
-        <a:font script="Khmr" typeface="MoolBoran"/>
-        <a:font script="Knda" typeface="Tunga"/>
-        <a:font script="Guru" typeface="Raavi"/>
-        <a:font script="Cans" typeface="Euphemia"/>
-        <a:font script="Cher" typeface="Plantagenet Cherokee"/>
-        <a:font script="Yiii" typeface="Microsoft Yi Baiti"/>
-        <a:font script="Tibt" typeface="Microsoft Himalaya"/>
-        <a:font script="Thaa" typeface="MV Boli"/>
-        <a:font script="Deva" typeface="Mangal"/>
-        <a:font script="Telu" typeface="Gautami"/>
-        <a:font script="Taml" typeface="Latha"/>
-        <a:font script="Syrc" typeface="Estrangelo Edessa"/>
-        <a:font script="Orya" typeface="Kalinga"/>
-        <a:font script="Mlym" typeface="Kartika"/>
-        <a:font script="Laoo" typeface="DokChampa"/>
-        <a:font script="Sinh" typeface="Iskoola Pota"/>
-        <a:font script="Mong" typeface="Mongolian Baiti"/>
-        <a:font script="Viet" typeface="Times New Roman"/>
-        <a:font script="Uigh" typeface="Microsoft Uighur"/>
-        <a:font script="Geor" typeface="Sylfaen"/>
-        <a:font script="Armn" typeface="Arial"/>
-        <a:font script="Bugi" typeface="Leelawadee UI"/>
-        <a:font script="Bopo" typeface="Microsoft JhengHei"/>
-        <a:font script="Java" typeface="Javanese Text"/>
-        <a:font script="Lisu" typeface="Segoe UI"/>
-        <a:font script="Mymr" typeface="Myanmar Text"/>
-        <a:font script="Nkoo" typeface="Ebrima"/>
-        <a:font script="Olck" typeface="Nirmala UI"/>
-        <a:font script="Osma" typeface="Ebrima"/>
-        <a:font script="Phag" typeface="Phagspa"/>
-        <a:font script="Syrn" typeface="Estrangelo Edessa"/>
-        <a:font script="Syrj" typeface="Estrangelo Edessa"/>
-        <a:font script="Syre" typeface="Estrangelo Edessa"/>
-        <a:font script="Sora" typeface="Nirmala UI"/>
-        <a:font script="Tale" typeface="Microsoft Tai Le"/>
-        <a:font script="Talu" typeface="Microsoft New Tai Lue"/>
-        <a:font script="Tfng" typeface="Ebrima"/>
-      </a:majorFont>
-      <a:minorFont>
-        <a:latin typeface="Aptos"/>
-        <a:ea typeface=""/>
-        <a:cs typeface=""/>
-        <a:font script="Jpan" typeface="游ゴシック"/>
-        <a:font script="Hang" typeface="맑은 고딕"/>
-        <a:font script="Hans" typeface="等线"/>
-        <a:font script="Hant" typeface="新細明體"/>
-        <a:font script="Arab" typeface="Arial"/>
-        <a:font script="Hebr" typeface="Arial"/>
-        <a:font script="Thai" typeface="Cordia New"/>
-        <a:font script="Ethi" typeface="Nyala"/>
-        <a:font script="Beng" typeface="Vrinda"/>
-        <a:font script="Gujr" typeface="Shruti"/>
-        <a:font script="Khmr" typeface="DaunPenh"/>
-        <a:font script="Knda" typeface="Tunga"/>
-        <a:font script="Guru" typeface="Raavi"/>
-        <a:font script="Cans" typeface="Euphemia"/>
-        <a:font script="Cher" typeface="Plantagenet Cherokee"/>
-        <a:font script="Yiii" typeface="Microsoft Yi Baiti"/>
-        <a:font script="Tibt" typeface="Microsoft Himalaya"/>
-        <a:font script="Thaa" typeface="MV Boli"/>
-        <a:font script="Deva" typeface="Mangal"/>
-        <a:font script="Telu" typeface="Gautami"/>
-        <a:font script="Taml" typeface="Latha"/>
-        <a:font script="Syrc" typeface="Estrangelo Edessa"/>
-        <a:font script="Orya" typeface="Kalinga"/>
-        <a:font script="Mlym" typeface="Kartika"/>
-        <a:font script="Laoo" typeface="DokChampa"/>
-        <a:font script="Sinh" typeface="Iskoola Pota"/>
-        <a:font script="Mong" typeface="Mongolian Baiti"/>
-        <a:font script="Viet" typeface="Arial"/>
-        <a:font script="Uigh" typeface="Microsoft Uighur"/>
-        <a:font script="Geor" typeface="Sylfaen"/>
-        <a:font script="Armn" typeface="Arial"/>
-        <a:font script="Bugi" typeface="Leelawadee UI"/>
-        <a:font script="Bopo" typeface="Microsoft JhengHei"/>
-        <a:font script="Java" typeface="Javanese Text"/>
-        <a:font script="Lisu" typeface="Segoe UI"/>
-        <a:font script="Mymr" typeface="Myanmar Text"/>
-        <a:font script="Nkoo" typeface="Ebrima"/>
-        <a:font script="Olck" typeface="Nirmala UI"/>
-        <a:font script="Osma" typeface="Ebrima"/>
-        <a:font script="Phag" typeface="Phagspa"/>
-        <a:font script="Syrn" typeface="Estrangelo Edessa"/>
-        <a:font script="Syrj" typeface="Estrangelo Edessa"/>
-        <a:font script="Syre" typeface="Estrangelo Edessa"/>
-        <a:font script="Sora" typeface="Nirmala UI"/>
-        <a:font script="Tale" typeface="Microsoft Tai Le"/>
-        <a:font script="Talu" typeface="Microsoft New Tai Lue"/>
-        <a:font script="Tfng" typeface="Ebrima"/>
-      </a:minorFont>
-    </a:fontScheme>
-    <a:fmtScheme name="Office">
-      <a:fillStyleLst>
-        <a:solidFill>
-          <a:schemeClr val="phClr"/>
-        </a:solidFill>
-        <a:gradFill rotWithShape="1">
-          <a:gsLst>
-            <a:gs pos="0">
-              <a:schemeClr val="phClr">
-                <a:tint val="67000"/>
-                <a:lumMod val="110000"/>
-                <a:satMod val="105000"/>
-              </a:schemeClr>
-            </a:gs>
-            <a:gs pos="50000">
-              <a:schemeClr val="phClr">
-                <a:tint val="73000"/>
-                <a:lumMod val="105000"/>
-                <a:satMod val="103000"/>
-              </a:schemeClr>
-            </a:gs>
-            <a:gs pos="100000">
-              <a:schemeClr val="phClr">
-                <a:tint val="81000"/>
-                <a:lumMod val="105000"/>
-                <a:satMod val="109000"/>
-              </a:schemeClr>
-            </a:gs>
-          </a:gsLst>
-          <a:lin ang="5400000" scaled="0"/>
-        </a:gradFill>
-        <a:gradFill rotWithShape="1">
-          <a:gsLst>
-            <a:gs pos="0">
-              <a:schemeClr val="phClr">
-                <a:tint val="94000"/>
-                <a:lumMod val="102000"/>
-                <a:satMod val="103000"/>
-              </a:schemeClr>
-            </a:gs>
-            <a:gs pos="50000">
-              <a:schemeClr val="phClr">
-                <a:shade val="100000"/>
-                <a:lumMod val="100000"/>
-                <a:satMod val="110000"/>
-              </a:schemeClr>
-            </a:gs>
-            <a:gs pos="100000">
-              <a:schemeClr val="phClr">
-                <a:shade val="78000"/>
-                <a:lumMod val="99000"/>
-                <a:satMod val="120000"/>
-              </a:schemeClr>
-            </a:gs>
-          </a:gsLst>
-          <a:lin ang="5400000" scaled="0"/>
-        </a:gradFill>
-      </a:fillStyleLst>
-      <a:lnStyleLst>
-        <a:ln w="6350">
-          <a:solidFill>
-            <a:schemeClr val="phClr"/>
-          </a:solidFill>
-          <a:prstDash val="solid"/>
-        </a:ln>
-        <a:ln w="12700">
-          <a:solidFill>
-            <a:schemeClr val="phClr"/>
-          </a:solidFill>
-          <a:prstDash val="solid"/>
-        </a:ln>
-        <a:ln w="19050">
-          <a:solidFill>
-            <a:schemeClr val="phClr"/>
-          </a:solidFill>
-          <a:prstDash val="solid"/>
-        </a:ln>
-      </a:lnStyleLst>
-      <a:effectStyleLst>
-        <a:effectStyle>
-          <a:effectLst/>
-        </a:effectStyle>
-        <a:effectStyle>
-          <a:effectLst/>
-        </a:effectStyle>
-        <a:effectStyle>
-          <a:effectLst>
-            <a:outerShdw blurRad="57150" dist="19050" dir="5400000" algn="ctr" rotWithShape="0">
-              <a:srgbClr val="000000">
-                <a:alpha val="63000"/>
-              </a:srgbClr>
-            </a:outerShdw>
-          </a:effectLst>
-        </a:effectStyle>
-      </a:effectStyleLst>
-      <a:bgFillStyleLst>
-        <a:solidFill>
-          <a:schemeClr val="phClr"/>
-        </a:solidFill>
-        <a:solidFill>
-          <a:schemeClr val="phClr">
-            <a:tint val="95000"/>
-            <a:satMod val="170000"/>
-          </a:schemeClr>
-        </a:solidFill>
-        <a:gradFill rotWithShape="1">
-          <a:gsLst>
-            <a:gs pos="0">
-              <a:schemeClr val="phClr">
-                <a:tint val="93000"/>
-                <a:shade val="98000"/>
-                <a:lumMod val="102000"/>
-                <a:satMod val="150000"/>
-              </a:schemeClr>
-            </a:gs>
-            <a:gs pos="50000">
-              <a:schemeClr val="phClr">
-                <a:tint val="98000"/>
-                <a:shade val="90000"/>
-                <a:lumMod val="103000"/>
-                <a:satMod val="130000"/>
-              </a:schemeClr>
-            </a:gs>
-            <a:gs pos="100000">
-              <a:schemeClr val="phClr">
-                <a:shade val="63000"/>
-                <a:satMod val="120000"/>
-              </a:schemeClr>
-            </a:gs>
-          </a:gsLst>
-          <a:lin ang="5400000" scaled="0"/>
-        </a:gradFill>
-      </a:bgFillStyleLst>
-    </a:fmtScheme>
-  </a:themeElements>
-</a:theme>
-</file>
-
 <file path=ppt/notesSlides/notesSlide1.xml><?xml version="1.0" encoding="utf-8"?>
-<p:notes xmlns:p="http://schemas.openxmlformats.org/presentationml/2006/main">
+<p:notes xmlns:a="http://schemas.openxmlformats.org/drawingml/2006/main" xmlns:r="http://schemas.openxmlformats.org/officeDocument/2006/relationships" xmlns:p="http://schemas.openxmlformats.org/presentationml/2006/main">
   <p:cSld>
     <p:spTree>
       <p:nvGrpSpPr>
@@ -547,16 +296,21 @@
         <p:nvPr/>
       </p:nvGrpSpPr>
       <p:grpSpPr>
-        <a:xfrm xmlns:a="http://schemas.openxmlformats.org/drawingml/2006/main"/>
+        <a:xfrm>
+          <a:off x="0" y="0"/>
+          <a:ext cx="0" cy="0"/>
+          <a:chOff x="0" y="0"/>
+          <a:chExt cx="0" cy="0"/>
+        </a:xfrm>
       </p:grpSpPr>
       <p:sp>
         <p:nvSpPr>
           <p:cNvPr id="2" name="Slide Image Placeholder 1"/>
           <p:cNvSpPr>
-            <a:spLocks xmlns:a="http://schemas.openxmlformats.org/drawingml/2006/main" noGrp="1"/>
+            <a:spLocks noGrp="1" noRot="1" noChangeAspect="1"/>
           </p:cNvSpPr>
           <p:nvPr>
-            <p:ph type="sldImg" idx="0"/>
+            <p:ph type="sldImg"/>
           </p:nvPr>
         </p:nvSpPr>
         <p:spPr/>
@@ -565,7 +319,7 @@
         <p:nvSpPr>
           <p:cNvPr id="3" name="Notes Placeholder 2"/>
           <p:cNvSpPr>
-            <a:spLocks xmlns:a="http://schemas.openxmlformats.org/drawingml/2006/main" noGrp="1"/>
+            <a:spLocks noGrp="1"/>
           </p:cNvSpPr>
           <p:nvPr>
             <p:ph type="body" idx="1"/>
@@ -573,20 +327,11 @@
         </p:nvSpPr>
         <p:spPr/>
         <p:txBody>
-          <a:bodyPr xmlns:a="http://schemas.openxmlformats.org/drawingml/2006/main"/>
-          <a:lstStyle xmlns:a="http://schemas.openxmlformats.org/drawingml/2006/main"/>
-          <a:p xmlns:a="http://schemas.openxmlformats.org/drawingml/2006/main">
-            <a:r>
-              <a:t>M</a:t>
-            </a:r>
-            <a:r>
-              <a:t>ethod</a:t>
-            </a:r>
-            <a:r>
-              <a:t>， </a:t>
-            </a:r>
-            <a:r>
-              <a:t>cohort build </a:t>
+          <a:bodyPr/>
+          <a:lstStyle/>
+          <a:p>
+            <a:r>
+              <a:t>Method， cohort build </a:t>
             </a:r>
           </a:p>
         </p:txBody>
@@ -595,7 +340,7 @@
         <p:nvSpPr>
           <p:cNvPr id="4" name="Slide Number Placeholder 3"/>
           <p:cNvSpPr>
-            <a:spLocks xmlns:a="http://schemas.openxmlformats.org/drawingml/2006/main" noGrp="1"/>
+            <a:spLocks noGrp="1"/>
           </p:cNvSpPr>
           <p:nvPr>
             <p:ph type="sldNum" idx="5"/>
@@ -603,25 +348,27 @@
         </p:nvSpPr>
         <p:spPr/>
         <p:txBody>
-          <a:bodyPr xmlns:a="http://schemas.openxmlformats.org/drawingml/2006/main"/>
-          <a:lstStyle xmlns:a="http://schemas.openxmlformats.org/drawingml/2006/main"/>
-          <a:p xmlns:a="http://schemas.openxmlformats.org/drawingml/2006/main"/>
+          <a:bodyPr/>
+          <a:lstStyle/>
+          <a:p>
+            <a:endParaRPr/>
+          </a:p>
         </p:txBody>
       </p:sp>
     </p:spTree>
   </p:cSld>
   <p:clrMapOvr>
-    <a:masterClrMapping xmlns:a="http://schemas.openxmlformats.org/drawingml/2006/main"/>
+    <a:masterClrMapping/>
   </p:clrMapOvr>
 </p:notes>
 </file>
 
 <file path=ppt/slideLayouts/slideLayout1.xml><?xml version="1.0" encoding="utf-8"?>
-<p:sldLayout xmlns:p="http://schemas.openxmlformats.org/presentationml/2006/main" preserve="1">
+<p:sldLayout xmlns:a="http://schemas.openxmlformats.org/drawingml/2006/main" xmlns:r="http://schemas.openxmlformats.org/officeDocument/2006/relationships" xmlns:p="http://schemas.openxmlformats.org/presentationml/2006/main" preserve="1">
   <p:cSld name="DEFAULT">
     <p:bg>
       <p:bgRef idx="1001">
-        <a:schemeClr xmlns:a="http://schemas.openxmlformats.org/drawingml/2006/main" val="bg1"/>
+        <a:schemeClr val="bg1"/>
       </p:bgRef>
     </p:bg>
     <p:spTree>
@@ -631,19 +378,27 @@
         <p:nvPr/>
       </p:nvGrpSpPr>
       <p:grpSpPr>
-        <a:xfrm xmlns:a="http://schemas.openxmlformats.org/drawingml/2006/main"/>
+        <a:xfrm>
+          <a:off x="0" y="0"/>
+          <a:ext cx="0" cy="0"/>
+          <a:chOff x="0" y="0"/>
+          <a:chExt cx="0" cy="0"/>
+        </a:xfrm>
       </p:grpSpPr>
     </p:spTree>
   </p:cSld>
+  <p:clrMapOvr>
+    <a:masterClrMapping/>
+  </p:clrMapOvr>
 </p:sldLayout>
 </file>
 
 <file path=ppt/slideMasters/slideMaster1.xml><?xml version="1.0" encoding="utf-8"?>
-<p:sldMaster xmlns:p="http://schemas.openxmlformats.org/presentationml/2006/main">
+<p:sldMaster xmlns:a="http://schemas.openxmlformats.org/drawingml/2006/main" xmlns:r="http://schemas.openxmlformats.org/officeDocument/2006/relationships" xmlns:p="http://schemas.openxmlformats.org/presentationml/2006/main">
   <p:cSld>
     <p:bg>
       <p:bgRef idx="1001">
-        <a:schemeClr xmlns:a="http://schemas.openxmlformats.org/drawingml/2006/main" val="bg1"/>
+        <a:schemeClr val="bg1"/>
       </p:bgRef>
     </p:bg>
     <p:spTree>
@@ -653,18 +408,23 @@
         <p:nvPr/>
       </p:nvGrpSpPr>
       <p:grpSpPr>
-        <a:xfrm xmlns:a="http://schemas.openxmlformats.org/drawingml/2006/main"/>
+        <a:xfrm>
+          <a:off x="0" y="0"/>
+          <a:ext cx="0" cy="0"/>
+          <a:chOff x="0" y="0"/>
+          <a:chExt cx="0" cy="0"/>
+        </a:xfrm>
       </p:grpSpPr>
     </p:spTree>
   </p:cSld>
   <p:clrMap bg1="lt1" tx1="dk1" bg2="lt2" tx2="dk2" accent1="accent1" accent2="accent2" accent3="accent3" accent4="accent4" accent5="accent5" accent6="accent6" hlink="hlink" folHlink="folHlink"/>
   <p:sldLayoutIdLst>
-    <p:sldLayoutId xmlns:r="http://schemas.openxmlformats.org/officeDocument/2006/relationships" id="2147483649" r:id="R8b7ae8c44e30486c"/>
+    <p:sldLayoutId id="2147483649" r:id="rId1"/>
   </p:sldLayoutIdLst>
   <p:hf sldNum="0" hdr="0" ftr="0" dt="0"/>
   <p:txStyles>
     <p:titleStyle>
-      <a:lvl1pPr xmlns:a="http://schemas.openxmlformats.org/drawingml/2006/main" algn="ctr">
+      <a:lvl1pPr algn="ctr">
         <a:spcBef>
           <a:spcPts val="0"/>
         </a:spcBef>
@@ -680,7 +440,7 @@
       </a:lvl1pPr>
     </p:titleStyle>
     <p:bodyStyle>
-      <a:lvl1pPr xmlns:a="http://schemas.openxmlformats.org/drawingml/2006/main" marL="342900" indent="-342900" algn="l">
+      <a:lvl1pPr marL="342900" indent="-342900" algn="l">
         <a:spcBef>
           <a:spcPts val="0"/>
         </a:spcBef>
@@ -694,7 +454,7 @@
           <a:cs typeface="+mn-lt"/>
         </a:defRPr>
       </a:lvl1pPr>
-      <a:lvl2pPr xmlns:a="http://schemas.openxmlformats.org/drawingml/2006/main" marL="742950" indent="-285750" algn="l">
+      <a:lvl2pPr marL="742950" indent="-285750" algn="l">
         <a:spcBef>
           <a:spcPts val="0"/>
         </a:spcBef>
@@ -708,7 +468,7 @@
           <a:cs typeface="+mn-lt"/>
         </a:defRPr>
       </a:lvl2pPr>
-      <a:lvl3pPr xmlns:a="http://schemas.openxmlformats.org/drawingml/2006/main" marL="1143000" indent="-228600" algn="l">
+      <a:lvl3pPr marL="1143000" indent="-228600" algn="l">
         <a:spcBef>
           <a:spcPts val="0"/>
         </a:spcBef>
@@ -722,7 +482,7 @@
           <a:cs typeface="+mn-lt"/>
         </a:defRPr>
       </a:lvl3pPr>
-      <a:lvl4pPr xmlns:a="http://schemas.openxmlformats.org/drawingml/2006/main" marL="1600200" indent="-228600" algn="l">
+      <a:lvl4pPr marL="1600200" indent="-228600" algn="l">
         <a:spcBef>
           <a:spcPts val="0"/>
         </a:spcBef>
@@ -736,7 +496,7 @@
           <a:cs typeface="+mn-lt"/>
         </a:defRPr>
       </a:lvl4pPr>
-      <a:lvl5pPr xmlns:a="http://schemas.openxmlformats.org/drawingml/2006/main" marL="2057400" indent="-228600" algn="l">
+      <a:lvl5pPr marL="2057400" indent="-228600" algn="l">
         <a:spcBef>
           <a:spcPts val="0"/>
         </a:spcBef>
@@ -750,7 +510,7 @@
           <a:cs typeface="+mn-lt"/>
         </a:defRPr>
       </a:lvl5pPr>
-      <a:lvl6pPr xmlns:a="http://schemas.openxmlformats.org/drawingml/2006/main" marL="2514600" indent="-228600" algn="l">
+      <a:lvl6pPr marL="2514600" indent="-228600" algn="l">
         <a:spcBef>
           <a:spcPts val="0"/>
         </a:spcBef>
@@ -764,7 +524,7 @@
           <a:cs typeface="+mn-lt"/>
         </a:defRPr>
       </a:lvl6pPr>
-      <a:lvl7pPr xmlns:a="http://schemas.openxmlformats.org/drawingml/2006/main" marL="2971800" indent="-228600" algn="l">
+      <a:lvl7pPr marL="2971800" indent="-228600" algn="l">
         <a:spcBef>
           <a:spcPts val="0"/>
         </a:spcBef>
@@ -778,7 +538,7 @@
           <a:cs typeface="+mn-lt"/>
         </a:defRPr>
       </a:lvl7pPr>
-      <a:lvl8pPr xmlns:a="http://schemas.openxmlformats.org/drawingml/2006/main" marL="3429000" indent="-228600" algn="l">
+      <a:lvl8pPr marL="3429000" indent="-228600" algn="l">
         <a:spcBef>
           <a:spcPts val="0"/>
         </a:spcBef>
@@ -792,7 +552,7 @@
           <a:cs typeface="+mn-lt"/>
         </a:defRPr>
       </a:lvl8pPr>
-      <a:lvl9pPr xmlns:a="http://schemas.openxmlformats.org/drawingml/2006/main" marL="3886200" indent="-228600" algn="l">
+      <a:lvl9pPr marL="3886200" indent="-228600" algn="l">
         <a:spcBef>
           <a:spcPts val="0"/>
         </a:spcBef>
@@ -808,7 +568,7 @@
       </a:lvl9pPr>
     </p:bodyStyle>
     <p:otherStyle>
-      <a:lvl1pPr xmlns:a="http://schemas.openxmlformats.org/drawingml/2006/main" marL="0" algn="l">
+      <a:lvl1pPr marL="0" algn="l">
         <a:buNone/>
         <a:defRPr sz="1800">
           <a:solidFill>
@@ -819,7 +579,7 @@
           <a:cs typeface="+mn-lt"/>
         </a:defRPr>
       </a:lvl1pPr>
-      <a:lvl2pPr xmlns:a="http://schemas.openxmlformats.org/drawingml/2006/main" marL="457200" algn="l">
+      <a:lvl2pPr marL="457200" algn="l">
         <a:buNone/>
         <a:defRPr sz="1800">
           <a:solidFill>
@@ -830,7 +590,7 @@
           <a:cs typeface="+mn-lt"/>
         </a:defRPr>
       </a:lvl2pPr>
-      <a:lvl3pPr xmlns:a="http://schemas.openxmlformats.org/drawingml/2006/main" marL="914400" algn="l">
+      <a:lvl3pPr marL="914400" algn="l">
         <a:buNone/>
         <a:defRPr sz="1800">
           <a:solidFill>
@@ -841,7 +601,7 @@
           <a:cs typeface="+mn-lt"/>
         </a:defRPr>
       </a:lvl3pPr>
-      <a:lvl4pPr xmlns:a="http://schemas.openxmlformats.org/drawingml/2006/main" marL="1371600" algn="l">
+      <a:lvl4pPr marL="1371600" algn="l">
         <a:buNone/>
         <a:defRPr sz="1800">
           <a:solidFill>
@@ -852,7 +612,7 @@
           <a:cs typeface="+mn-lt"/>
         </a:defRPr>
       </a:lvl4pPr>
-      <a:lvl5pPr xmlns:a="http://schemas.openxmlformats.org/drawingml/2006/main" marL="1828800" algn="l">
+      <a:lvl5pPr marL="1828800" algn="l">
         <a:buNone/>
         <a:defRPr sz="1800">
           <a:solidFill>
@@ -863,7 +623,7 @@
           <a:cs typeface="+mn-lt"/>
         </a:defRPr>
       </a:lvl5pPr>
-      <a:lvl6pPr xmlns:a="http://schemas.openxmlformats.org/drawingml/2006/main" marL="2286000" algn="l">
+      <a:lvl6pPr marL="2286000" algn="l">
         <a:buNone/>
         <a:defRPr sz="1800">
           <a:solidFill>
@@ -874,7 +634,7 @@
           <a:cs typeface="+mn-lt"/>
         </a:defRPr>
       </a:lvl6pPr>
-      <a:lvl7pPr xmlns:a="http://schemas.openxmlformats.org/drawingml/2006/main" marL="2743200" algn="l">
+      <a:lvl7pPr marL="2743200" algn="l">
         <a:buNone/>
         <a:defRPr sz="1800">
           <a:solidFill>
@@ -885,7 +645,7 @@
           <a:cs typeface="+mn-lt"/>
         </a:defRPr>
       </a:lvl7pPr>
-      <a:lvl8pPr xmlns:a="http://schemas.openxmlformats.org/drawingml/2006/main" marL="3200400" algn="l">
+      <a:lvl8pPr marL="3200400" algn="l">
         <a:buNone/>
         <a:defRPr sz="1800">
           <a:solidFill>
@@ -896,7 +656,7 @@
           <a:cs typeface="+mn-lt"/>
         </a:defRPr>
       </a:lvl8pPr>
-      <a:lvl9pPr xmlns:a="http://schemas.openxmlformats.org/drawingml/2006/main" marL="3657600" algn="l">
+      <a:lvl9pPr marL="3657600" algn="l">
         <a:buNone/>
         <a:defRPr sz="1800">
           <a:solidFill>
@@ -912,299 +672,15 @@
 </p:sldMaster>
 </file>
 
-<file path=ppt/slideMasters/theme/theme2.xml><?xml version="1.0" encoding="utf-8"?>
-<a:theme xmlns:a="http://schemas.openxmlformats.org/drawingml/2006/main" name="Office Theme">
-  <a:themeElements>
-    <a:clrScheme name="Office">
-      <a:dk1>
-        <a:sysClr val="windowText" lastClr="000000"/>
-      </a:dk1>
-      <a:lt1>
-        <a:sysClr val="window" lastClr="FFFFFF"/>
-      </a:lt1>
-      <a:dk2>
-        <a:srgbClr val="44546A"/>
-      </a:dk2>
-      <a:lt2>
-        <a:srgbClr val="E7E6E6"/>
-      </a:lt2>
-      <a:accent1>
-        <a:srgbClr val="4472C4"/>
-      </a:accent1>
-      <a:accent2>
-        <a:srgbClr val="ED7D31"/>
-      </a:accent2>
-      <a:accent3>
-        <a:srgbClr val="A5A5A5"/>
-      </a:accent3>
-      <a:accent4>
-        <a:srgbClr val="FFC000"/>
-      </a:accent4>
-      <a:accent5>
-        <a:srgbClr val="5B9BD5"/>
-      </a:accent5>
-      <a:accent6>
-        <a:srgbClr val="70AD47"/>
-      </a:accent6>
-      <a:hlink>
-        <a:srgbClr val="0563C1"/>
-      </a:hlink>
-      <a:folHlink>
-        <a:srgbClr val="954F72"/>
-      </a:folHlink>
-    </a:clrScheme>
-    <a:fontScheme name="Office">
-      <a:majorFont>
-        <a:latin typeface="Aptos Display"/>
-        <a:ea typeface=""/>
-        <a:cs typeface=""/>
-        <a:font script="Jpan" typeface="游ゴシック Light"/>
-        <a:font script="Hang" typeface="맑은 고딕"/>
-        <a:font script="Hans" typeface="等线 Light"/>
-        <a:font script="Hant" typeface="新細明體"/>
-        <a:font script="Arab" typeface="Times New Roman"/>
-        <a:font script="Hebr" typeface="Times New Roman"/>
-        <a:font script="Thai" typeface="Angsana New"/>
-        <a:font script="Ethi" typeface="Nyala"/>
-        <a:font script="Beng" typeface="Vrinda"/>
-        <a:font script="Gujr" typeface="Shruti"/>
-        <a:font script="Khmr" typeface="MoolBoran"/>
-        <a:font script="Knda" typeface="Tunga"/>
-        <a:font script="Guru" typeface="Raavi"/>
-        <a:font script="Cans" typeface="Euphemia"/>
-        <a:font script="Cher" typeface="Plantagenet Cherokee"/>
-        <a:font script="Yiii" typeface="Microsoft Yi Baiti"/>
-        <a:font script="Tibt" typeface="Microsoft Himalaya"/>
-        <a:font script="Thaa" typeface="MV Boli"/>
-        <a:font script="Deva" typeface="Mangal"/>
-        <a:font script="Telu" typeface="Gautami"/>
-        <a:font script="Taml" typeface="Latha"/>
-        <a:font script="Syrc" typeface="Estrangelo Edessa"/>
-        <a:font script="Orya" typeface="Kalinga"/>
-        <a:font script="Mlym" typeface="Kartika"/>
-        <a:font script="Laoo" typeface="DokChampa"/>
-        <a:font script="Sinh" typeface="Iskoola Pota"/>
-        <a:font script="Mong" typeface="Mongolian Baiti"/>
-        <a:font script="Viet" typeface="Times New Roman"/>
-        <a:font script="Uigh" typeface="Microsoft Uighur"/>
-        <a:font script="Geor" typeface="Sylfaen"/>
-        <a:font script="Armn" typeface="Arial"/>
-        <a:font script="Bugi" typeface="Leelawadee UI"/>
-        <a:font script="Bopo" typeface="Microsoft JhengHei"/>
-        <a:font script="Java" typeface="Javanese Text"/>
-        <a:font script="Lisu" typeface="Segoe UI"/>
-        <a:font script="Mymr" typeface="Myanmar Text"/>
-        <a:font script="Nkoo" typeface="Ebrima"/>
-        <a:font script="Olck" typeface="Nirmala UI"/>
-        <a:font script="Osma" typeface="Ebrima"/>
-        <a:font script="Phag" typeface="Phagspa"/>
-        <a:font script="Syrn" typeface="Estrangelo Edessa"/>
-        <a:font script="Syrj" typeface="Estrangelo Edessa"/>
-        <a:font script="Syre" typeface="Estrangelo Edessa"/>
-        <a:font script="Sora" typeface="Nirmala UI"/>
-        <a:font script="Tale" typeface="Microsoft Tai Le"/>
-        <a:font script="Talu" typeface="Microsoft New Tai Lue"/>
-        <a:font script="Tfng" typeface="Ebrima"/>
-      </a:majorFont>
-      <a:minorFont>
-        <a:latin typeface="Aptos"/>
-        <a:ea typeface=""/>
-        <a:cs typeface=""/>
-        <a:font script="Jpan" typeface="游ゴシック"/>
-        <a:font script="Hang" typeface="맑은 고딕"/>
-        <a:font script="Hans" typeface="等线"/>
-        <a:font script="Hant" typeface="新細明體"/>
-        <a:font script="Arab" typeface="Arial"/>
-        <a:font script="Hebr" typeface="Arial"/>
-        <a:font script="Thai" typeface="Cordia New"/>
-        <a:font script="Ethi" typeface="Nyala"/>
-        <a:font script="Beng" typeface="Vrinda"/>
-        <a:font script="Gujr" typeface="Shruti"/>
-        <a:font script="Khmr" typeface="DaunPenh"/>
-        <a:font script="Knda" typeface="Tunga"/>
-        <a:font script="Guru" typeface="Raavi"/>
-        <a:font script="Cans" typeface="Euphemia"/>
-        <a:font script="Cher" typeface="Plantagenet Cherokee"/>
-        <a:font script="Yiii" typeface="Microsoft Yi Baiti"/>
-        <a:font script="Tibt" typeface="Microsoft Himalaya"/>
-        <a:font script="Thaa" typeface="MV Boli"/>
-        <a:font script="Deva" typeface="Mangal"/>
-        <a:font script="Telu" typeface="Gautami"/>
-        <a:font script="Taml" typeface="Latha"/>
-        <a:font script="Syrc" typeface="Estrangelo Edessa"/>
-        <a:font script="Orya" typeface="Kalinga"/>
-        <a:font script="Mlym" typeface="Kartika"/>
-        <a:font script="Laoo" typeface="DokChampa"/>
-        <a:font script="Sinh" typeface="Iskoola Pota"/>
-        <a:font script="Mong" typeface="Mongolian Baiti"/>
-        <a:font script="Viet" typeface="Arial"/>
-        <a:font script="Uigh" typeface="Microsoft Uighur"/>
-        <a:font script="Geor" typeface="Sylfaen"/>
-        <a:font script="Armn" typeface="Arial"/>
-        <a:font script="Bugi" typeface="Leelawadee UI"/>
-        <a:font script="Bopo" typeface="Microsoft JhengHei"/>
-        <a:font script="Java" typeface="Javanese Text"/>
-        <a:font script="Lisu" typeface="Segoe UI"/>
-        <a:font script="Mymr" typeface="Myanmar Text"/>
-        <a:font script="Nkoo" typeface="Ebrima"/>
-        <a:font script="Olck" typeface="Nirmala UI"/>
-        <a:font script="Osma" typeface="Ebrima"/>
-        <a:font script="Phag" typeface="Phagspa"/>
-        <a:font script="Syrn" typeface="Estrangelo Edessa"/>
-        <a:font script="Syrj" typeface="Estrangelo Edessa"/>
-        <a:font script="Syre" typeface="Estrangelo Edessa"/>
-        <a:font script="Sora" typeface="Nirmala UI"/>
-        <a:font script="Tale" typeface="Microsoft Tai Le"/>
-        <a:font script="Talu" typeface="Microsoft New Tai Lue"/>
-        <a:font script="Tfng" typeface="Ebrima"/>
-      </a:minorFont>
-    </a:fontScheme>
-    <a:fmtScheme name="Office">
-      <a:fillStyleLst>
-        <a:solidFill>
-          <a:schemeClr val="phClr"/>
-        </a:solidFill>
-        <a:gradFill rotWithShape="1">
-          <a:gsLst>
-            <a:gs pos="0">
-              <a:schemeClr val="phClr">
-                <a:tint val="67000"/>
-                <a:lumMod val="110000"/>
-                <a:satMod val="105000"/>
-              </a:schemeClr>
-            </a:gs>
-            <a:gs pos="50000">
-              <a:schemeClr val="phClr">
-                <a:tint val="73000"/>
-                <a:lumMod val="105000"/>
-                <a:satMod val="103000"/>
-              </a:schemeClr>
-            </a:gs>
-            <a:gs pos="100000">
-              <a:schemeClr val="phClr">
-                <a:tint val="81000"/>
-                <a:lumMod val="105000"/>
-                <a:satMod val="109000"/>
-              </a:schemeClr>
-            </a:gs>
-          </a:gsLst>
-          <a:lin ang="5400000" scaled="0"/>
-        </a:gradFill>
-        <a:gradFill rotWithShape="1">
-          <a:gsLst>
-            <a:gs pos="0">
-              <a:schemeClr val="phClr">
-                <a:tint val="94000"/>
-                <a:lumMod val="102000"/>
-                <a:satMod val="103000"/>
-              </a:schemeClr>
-            </a:gs>
-            <a:gs pos="50000">
-              <a:schemeClr val="phClr">
-                <a:shade val="100000"/>
-                <a:lumMod val="100000"/>
-                <a:satMod val="110000"/>
-              </a:schemeClr>
-            </a:gs>
-            <a:gs pos="100000">
-              <a:schemeClr val="phClr">
-                <a:shade val="78000"/>
-                <a:lumMod val="99000"/>
-                <a:satMod val="120000"/>
-              </a:schemeClr>
-            </a:gs>
-          </a:gsLst>
-          <a:lin ang="5400000" scaled="0"/>
-        </a:gradFill>
-      </a:fillStyleLst>
-      <a:lnStyleLst>
-        <a:ln w="6350">
-          <a:solidFill>
-            <a:schemeClr val="phClr"/>
-          </a:solidFill>
-          <a:prstDash val="solid"/>
-        </a:ln>
-        <a:ln w="12700">
-          <a:solidFill>
-            <a:schemeClr val="phClr"/>
-          </a:solidFill>
-          <a:prstDash val="solid"/>
-        </a:ln>
-        <a:ln w="19050">
-          <a:solidFill>
-            <a:schemeClr val="phClr"/>
-          </a:solidFill>
-          <a:prstDash val="solid"/>
-        </a:ln>
-      </a:lnStyleLst>
-      <a:effectStyleLst>
-        <a:effectStyle>
-          <a:effectLst/>
-        </a:effectStyle>
-        <a:effectStyle>
-          <a:effectLst/>
-        </a:effectStyle>
-        <a:effectStyle>
-          <a:effectLst>
-            <a:outerShdw blurRad="57150" dist="19050" dir="5400000" algn="ctr" rotWithShape="0">
-              <a:srgbClr val="000000">
-                <a:alpha val="63000"/>
-              </a:srgbClr>
-            </a:outerShdw>
-          </a:effectLst>
-        </a:effectStyle>
-      </a:effectStyleLst>
-      <a:bgFillStyleLst>
-        <a:solidFill>
-          <a:schemeClr val="phClr"/>
-        </a:solidFill>
-        <a:solidFill>
-          <a:schemeClr val="phClr">
-            <a:tint val="95000"/>
-            <a:satMod val="170000"/>
-          </a:schemeClr>
-        </a:solidFill>
-        <a:gradFill rotWithShape="1">
-          <a:gsLst>
-            <a:gs pos="0">
-              <a:schemeClr val="phClr">
-                <a:tint val="93000"/>
-                <a:shade val="98000"/>
-                <a:lumMod val="102000"/>
-                <a:satMod val="150000"/>
-              </a:schemeClr>
-            </a:gs>
-            <a:gs pos="50000">
-              <a:schemeClr val="phClr">
-                <a:tint val="98000"/>
-                <a:shade val="90000"/>
-                <a:lumMod val="103000"/>
-                <a:satMod val="130000"/>
-              </a:schemeClr>
-            </a:gs>
-            <a:gs pos="100000">
-              <a:schemeClr val="phClr">
-                <a:shade val="63000"/>
-                <a:satMod val="120000"/>
-              </a:schemeClr>
-            </a:gs>
-          </a:gsLst>
-          <a:lin ang="5400000" scaled="0"/>
-        </a:gradFill>
-      </a:bgFillStyleLst>
-    </a:fmtScheme>
-  </a:themeElements>
-</a:theme>
-</file>
-
 <file path=ppt/slides/slide1.xml><?xml version="1.0" encoding="utf-8"?>
-<p:sld xmlns:p="http://schemas.openxmlformats.org/presentationml/2006/main">
+<p:sld xmlns:a="http://schemas.openxmlformats.org/drawingml/2006/main" xmlns:r="http://schemas.openxmlformats.org/officeDocument/2006/relationships" xmlns:p="http://schemas.openxmlformats.org/presentationml/2006/main">
   <p:cSld>
     <p:bg>
       <p:bgPr>
-        <a:solidFill xmlns:a="http://schemas.openxmlformats.org/drawingml/2006/main">
+        <a:solidFill>
           <a:srgbClr val="F7F8FA"/>
         </a:solidFill>
+        <a:effectLst/>
       </p:bgPr>
     </p:bg>
     <p:spTree>
@@ -1214,34 +690,39 @@
         <p:nvPr/>
       </p:nvGrpSpPr>
       <p:grpSpPr>
-        <a:xfrm xmlns:a="http://schemas.openxmlformats.org/drawingml/2006/main"/>
+        <a:xfrm>
+          <a:off x="0" y="0"/>
+          <a:ext cx="0" cy="0"/>
+          <a:chOff x="0" y="0"/>
+          <a:chExt cx="0" cy="0"/>
+        </a:xfrm>
       </p:grpSpPr>
       <p:sp>
         <p:nvSpPr>
           <p:cNvPr id="2" name="Shape 0">
-            <a:extLst xmlns:a="http://schemas.openxmlformats.org/drawingml/2006/main">
+            <a:extLst>
               <a:ext uri="{FF2B5EF4-FFF2-40B4-BE49-F238E27FC236}">
                 <a16:creationId xmlns:a16="http://schemas.microsoft.com/office/drawing/2014/main" id="{6BE03D32-448D-48D6-9F74-CBD4FE1889A8}"/>
               </a:ext>
             </a:extLst>
           </p:cNvPr>
           <p:cNvSpPr>
-            <a:spLocks xmlns:a="http://schemas.openxmlformats.org/drawingml/2006/main" noGrp="1"/>
-          </p:cNvSpPr>
-          <p:nvPr/>
-        </p:nvSpPr>
-        <p:spPr>
-          <a:xfrm xmlns:a="http://schemas.openxmlformats.org/drawingml/2006/main">
+            <a:spLocks noGrp="1"/>
+          </p:cNvSpPr>
+          <p:nvPr/>
+        </p:nvSpPr>
+        <p:spPr>
+          <a:xfrm>
             <a:off x="0" y="0"/>
             <a:ext cx="41148000" cy="4251960"/>
           </a:xfrm>
-          <a:prstGeom xmlns:a="http://schemas.openxmlformats.org/drawingml/2006/main" prst="rect">
-            <a:avLst/>
-          </a:prstGeom>
-          <a:solidFill xmlns:a="http://schemas.openxmlformats.org/drawingml/2006/main">
+          <a:prstGeom prst="rect">
+            <a:avLst/>
+          </a:prstGeom>
+          <a:solidFill>
             <a:srgbClr val="102A43"/>
           </a:solidFill>
-          <a:ln xmlns:a="http://schemas.openxmlformats.org/drawingml/2006/main" w="12700">
+          <a:ln w="12700">
             <a:solidFill>
               <a:srgbClr val="102A43"/>
             </a:solidFill>
@@ -1249,37 +730,39 @@
           </a:ln>
         </p:spPr>
         <p:txBody>
-          <a:bodyPr xmlns:a="http://schemas.openxmlformats.org/drawingml/2006/main"/>
-          <a:lstStyle xmlns:a="http://schemas.openxmlformats.org/drawingml/2006/main"/>
-          <a:p xmlns:a="http://schemas.openxmlformats.org/drawingml/2006/main"/>
+          <a:bodyPr/>
+          <a:lstStyle/>
+          <a:p>
+            <a:endParaRPr/>
+          </a:p>
         </p:txBody>
       </p:sp>
       <p:sp>
         <p:nvSpPr>
           <p:cNvPr id="3" name="Shape 1">
-            <a:extLst xmlns:a="http://schemas.openxmlformats.org/drawingml/2006/main">
+            <a:extLst>
               <a:ext uri="{FF2B5EF4-FFF2-40B4-BE49-F238E27FC236}">
                 <a16:creationId xmlns:a16="http://schemas.microsoft.com/office/drawing/2014/main" id="{311199EE-851D-480A-82EE-30FE3F8398CF}"/>
               </a:ext>
             </a:extLst>
           </p:cNvPr>
           <p:cNvSpPr>
-            <a:spLocks xmlns:a="http://schemas.openxmlformats.org/drawingml/2006/main" noGrp="1"/>
-          </p:cNvSpPr>
-          <p:nvPr/>
-        </p:nvSpPr>
-        <p:spPr>
-          <a:xfrm xmlns:a="http://schemas.openxmlformats.org/drawingml/2006/main">
+            <a:spLocks noGrp="1"/>
+          </p:cNvSpPr>
+          <p:nvPr/>
+        </p:nvSpPr>
+        <p:spPr>
+          <a:xfrm>
             <a:off x="0" y="4069080"/>
             <a:ext cx="41148000" cy="182880"/>
           </a:xfrm>
-          <a:prstGeom xmlns:a="http://schemas.openxmlformats.org/drawingml/2006/main" prst="rect">
-            <a:avLst/>
-          </a:prstGeom>
-          <a:solidFill xmlns:a="http://schemas.openxmlformats.org/drawingml/2006/main">
+          <a:prstGeom prst="rect">
+            <a:avLst/>
+          </a:prstGeom>
+          <a:solidFill>
             <a:srgbClr val="D39C2D"/>
           </a:solidFill>
-          <a:ln xmlns:a="http://schemas.openxmlformats.org/drawingml/2006/main" w="12700">
+          <a:ln w="12700">
             <a:solidFill>
               <a:srgbClr val="D39C2D"/>
             </a:solidFill>
@@ -1287,41 +770,43 @@
           </a:ln>
         </p:spPr>
         <p:txBody>
-          <a:bodyPr xmlns:a="http://schemas.openxmlformats.org/drawingml/2006/main"/>
-          <a:lstStyle xmlns:a="http://schemas.openxmlformats.org/drawingml/2006/main"/>
-          <a:p xmlns:a="http://schemas.openxmlformats.org/drawingml/2006/main"/>
+          <a:bodyPr/>
+          <a:lstStyle/>
+          <a:p>
+            <a:endParaRPr/>
+          </a:p>
         </p:txBody>
       </p:sp>
       <p:sp>
         <p:nvSpPr>
           <p:cNvPr id="4" name="Text 2">
-            <a:extLst xmlns:a="http://schemas.openxmlformats.org/drawingml/2006/main">
+            <a:extLst>
               <a:ext uri="{FF2B5EF4-FFF2-40B4-BE49-F238E27FC236}">
                 <a16:creationId xmlns:a16="http://schemas.microsoft.com/office/drawing/2014/main" id="{0A05EC09-12B5-43B7-A3F6-E89A469EC71B}"/>
               </a:ext>
             </a:extLst>
           </p:cNvPr>
           <p:cNvSpPr>
-            <a:spLocks xmlns:a="http://schemas.openxmlformats.org/drawingml/2006/main" noGrp="1"/>
-          </p:cNvSpPr>
-          <p:nvPr/>
-        </p:nvSpPr>
-        <p:spPr>
-          <a:xfrm xmlns:a="http://schemas.openxmlformats.org/drawingml/2006/main">
+            <a:spLocks noGrp="1"/>
+          </p:cNvSpPr>
+          <p:nvPr/>
+        </p:nvSpPr>
+        <p:spPr>
+          <a:xfrm>
             <a:off x="914400" y="530352"/>
             <a:ext cx="25181169" cy="1234440"/>
           </a:xfrm>
-          <a:prstGeom xmlns:a="http://schemas.openxmlformats.org/drawingml/2006/main" prst="rect">
-            <a:avLst/>
-          </a:prstGeom>
-          <a:noFill xmlns:a="http://schemas.openxmlformats.org/drawingml/2006/main"/>
-        </p:spPr>
-        <p:txBody>
-          <a:bodyPr xmlns:a="http://schemas.openxmlformats.org/drawingml/2006/main" wrap="square" lIns="0" tIns="0" rIns="0" bIns="0" anchor="t">
+          <a:prstGeom prst="rect">
+            <a:avLst/>
+          </a:prstGeom>
+          <a:noFill/>
+        </p:spPr>
+        <p:txBody>
+          <a:bodyPr wrap="square" lIns="0" tIns="0" rIns="0" bIns="0" anchor="t">
             <a:noAutofit/>
           </a:bodyPr>
-          <a:lstStyle xmlns:a="http://schemas.openxmlformats.org/drawingml/2006/main"/>
-          <a:p xmlns:a="http://schemas.openxmlformats.org/drawingml/2006/main">
+          <a:lstStyle/>
+          <a:p>
             <a:pPr marL="0" indent="0" algn="l">
               <a:buNone/>
             </a:pPr>
@@ -1357,33 +842,33 @@
       <p:sp>
         <p:nvSpPr>
           <p:cNvPr id="5" name="Text 3">
-            <a:extLst xmlns:a="http://schemas.openxmlformats.org/drawingml/2006/main">
+            <a:extLst>
               <a:ext uri="{FF2B5EF4-FFF2-40B4-BE49-F238E27FC236}">
                 <a16:creationId xmlns:a16="http://schemas.microsoft.com/office/drawing/2014/main" id="{F5BBBA4F-2B93-42F7-8A22-7A3953C8CA14}"/>
               </a:ext>
             </a:extLst>
           </p:cNvPr>
           <p:cNvSpPr>
-            <a:spLocks xmlns:a="http://schemas.openxmlformats.org/drawingml/2006/main" noGrp="1"/>
-          </p:cNvSpPr>
-          <p:nvPr/>
-        </p:nvSpPr>
-        <p:spPr>
-          <a:xfrm xmlns:a="http://schemas.openxmlformats.org/drawingml/2006/main">
+            <a:spLocks noGrp="1"/>
+          </p:cNvSpPr>
+          <p:nvPr/>
+        </p:nvSpPr>
+        <p:spPr>
+          <a:xfrm>
             <a:off x="914400" y="2500470"/>
             <a:ext cx="32004000" cy="438912"/>
           </a:xfrm>
-          <a:prstGeom xmlns:a="http://schemas.openxmlformats.org/drawingml/2006/main" prst="rect">
-            <a:avLst/>
-          </a:prstGeom>
-          <a:noFill xmlns:a="http://schemas.openxmlformats.org/drawingml/2006/main"/>
-        </p:spPr>
-        <p:txBody>
-          <a:bodyPr xmlns:a="http://schemas.openxmlformats.org/drawingml/2006/main" wrap="square" lIns="0" tIns="0" rIns="0" bIns="0" anchor="t">
+          <a:prstGeom prst="rect">
+            <a:avLst/>
+          </a:prstGeom>
+          <a:noFill/>
+        </p:spPr>
+        <p:txBody>
+          <a:bodyPr wrap="square" lIns="0" tIns="0" rIns="0" bIns="0" anchor="t">
             <a:normAutofit/>
           </a:bodyPr>
-          <a:lstStyle xmlns:a="http://schemas.openxmlformats.org/drawingml/2006/main"/>
-          <a:p xmlns:a="http://schemas.openxmlformats.org/drawingml/2006/main">
+          <a:lstStyle/>
+          <a:p>
             <a:pPr marL="0" indent="0" algn="l">
               <a:buNone/>
             </a:pPr>
@@ -1415,33 +900,33 @@
       <p:sp>
         <p:nvSpPr>
           <p:cNvPr id="6" name="Text 4">
-            <a:extLst xmlns:a="http://schemas.openxmlformats.org/drawingml/2006/main">
+            <a:extLst>
               <a:ext uri="{FF2B5EF4-FFF2-40B4-BE49-F238E27FC236}">
                 <a16:creationId xmlns:a16="http://schemas.microsoft.com/office/drawing/2014/main" id="{EBEE8B62-79FB-4A91-AB7F-694B0E549E0E}"/>
               </a:ext>
             </a:extLst>
           </p:cNvPr>
           <p:cNvSpPr>
-            <a:spLocks xmlns:a="http://schemas.openxmlformats.org/drawingml/2006/main" noGrp="1"/>
-          </p:cNvSpPr>
-          <p:nvPr/>
-        </p:nvSpPr>
-        <p:spPr>
-          <a:xfrm xmlns:a="http://schemas.openxmlformats.org/drawingml/2006/main">
+            <a:spLocks noGrp="1"/>
+          </p:cNvSpPr>
+          <p:nvPr/>
+        </p:nvSpPr>
+        <p:spPr>
+          <a:xfrm>
             <a:off x="914400" y="3094647"/>
             <a:ext cx="32735520" cy="676656"/>
           </a:xfrm>
-          <a:prstGeom xmlns:a="http://schemas.openxmlformats.org/drawingml/2006/main" prst="rect">
-            <a:avLst/>
-          </a:prstGeom>
-          <a:noFill xmlns:a="http://schemas.openxmlformats.org/drawingml/2006/main"/>
-        </p:spPr>
-        <p:txBody>
-          <a:bodyPr xmlns:a="http://schemas.openxmlformats.org/drawingml/2006/main" wrap="square" lIns="0" tIns="0" rIns="0" bIns="0" anchor="t">
+          <a:prstGeom prst="rect">
+            <a:avLst/>
+          </a:prstGeom>
+          <a:noFill/>
+        </p:spPr>
+        <p:txBody>
+          <a:bodyPr wrap="square" lIns="0" tIns="0" rIns="0" bIns="0" anchor="t">
             <a:normAutofit/>
           </a:bodyPr>
-          <a:lstStyle xmlns:a="http://schemas.openxmlformats.org/drawingml/2006/main"/>
-          <a:p xmlns:a="http://schemas.openxmlformats.org/drawingml/2006/main">
+          <a:lstStyle/>
+          <a:p>
             <a:pPr marL="0" indent="0" algn="l">
               <a:buNone/>
             </a:pPr>
@@ -1462,29 +947,29 @@
       <p:sp>
         <p:nvSpPr>
           <p:cNvPr id="16" name="Shape 14">
-            <a:extLst xmlns:a="http://schemas.openxmlformats.org/drawingml/2006/main">
+            <a:extLst>
               <a:ext uri="{FF2B5EF4-FFF2-40B4-BE49-F238E27FC236}">
                 <a16:creationId xmlns:a16="http://schemas.microsoft.com/office/drawing/2014/main" id="{03997F32-4728-4796-8EEF-B67C2A47A239}"/>
               </a:ext>
             </a:extLst>
           </p:cNvPr>
           <p:cNvSpPr>
-            <a:spLocks xmlns:a="http://schemas.openxmlformats.org/drawingml/2006/main" noGrp="1"/>
-          </p:cNvSpPr>
-          <p:nvPr/>
-        </p:nvSpPr>
-        <p:spPr>
-          <a:xfrm xmlns:a="http://schemas.openxmlformats.org/drawingml/2006/main">
+            <a:spLocks noGrp="1"/>
+          </p:cNvSpPr>
+          <p:nvPr/>
+        </p:nvSpPr>
+        <p:spPr>
+          <a:xfrm>
             <a:off x="777240" y="4709160"/>
             <a:ext cx="12862560" cy="502920"/>
           </a:xfrm>
-          <a:prstGeom xmlns:a="http://schemas.openxmlformats.org/drawingml/2006/main" prst="rect">
-            <a:avLst/>
-          </a:prstGeom>
-          <a:solidFill xmlns:a="http://schemas.openxmlformats.org/drawingml/2006/main">
+          <a:prstGeom prst="rect">
+            <a:avLst/>
+          </a:prstGeom>
+          <a:solidFill>
             <a:srgbClr val="0F766E"/>
           </a:solidFill>
-          <a:ln xmlns:a="http://schemas.openxmlformats.org/drawingml/2006/main" w="12700">
+          <a:ln w="12700">
             <a:solidFill>
               <a:srgbClr val="0F766E">
                 <a:alpha val="0"/>
@@ -1494,41 +979,43 @@
           </a:ln>
         </p:spPr>
         <p:txBody>
-          <a:bodyPr xmlns:a="http://schemas.openxmlformats.org/drawingml/2006/main"/>
-          <a:lstStyle xmlns:a="http://schemas.openxmlformats.org/drawingml/2006/main"/>
-          <a:p xmlns:a="http://schemas.openxmlformats.org/drawingml/2006/main"/>
+          <a:bodyPr/>
+          <a:lstStyle/>
+          <a:p>
+            <a:endParaRPr/>
+          </a:p>
         </p:txBody>
       </p:sp>
       <p:sp>
         <p:nvSpPr>
           <p:cNvPr id="17" name="Text 15">
-            <a:extLst xmlns:a="http://schemas.openxmlformats.org/drawingml/2006/main">
+            <a:extLst>
               <a:ext uri="{FF2B5EF4-FFF2-40B4-BE49-F238E27FC236}">
                 <a16:creationId xmlns:a16="http://schemas.microsoft.com/office/drawing/2014/main" id="{D6756EF6-58F4-40B9-9183-F01084EA0528}"/>
               </a:ext>
             </a:extLst>
           </p:cNvPr>
           <p:cNvSpPr>
-            <a:spLocks xmlns:a="http://schemas.openxmlformats.org/drawingml/2006/main" noGrp="1"/>
-          </p:cNvSpPr>
-          <p:nvPr/>
-        </p:nvSpPr>
-        <p:spPr>
-          <a:xfrm xmlns:a="http://schemas.openxmlformats.org/drawingml/2006/main">
+            <a:spLocks noGrp="1"/>
+          </p:cNvSpPr>
+          <p:nvPr/>
+        </p:nvSpPr>
+        <p:spPr>
+          <a:xfrm>
             <a:off x="978408" y="4773168"/>
             <a:ext cx="12460224" cy="384048"/>
           </a:xfrm>
-          <a:prstGeom xmlns:a="http://schemas.openxmlformats.org/drawingml/2006/main" prst="rect">
-            <a:avLst/>
-          </a:prstGeom>
-          <a:noFill xmlns:a="http://schemas.openxmlformats.org/drawingml/2006/main"/>
-        </p:spPr>
-        <p:txBody>
-          <a:bodyPr xmlns:a="http://schemas.openxmlformats.org/drawingml/2006/main" wrap="square" lIns="0" tIns="0" rIns="0" bIns="0" anchor="t">
+          <a:prstGeom prst="rect">
+            <a:avLst/>
+          </a:prstGeom>
+          <a:noFill/>
+        </p:spPr>
+        <p:txBody>
+          <a:bodyPr wrap="square" lIns="0" tIns="0" rIns="0" bIns="0" anchor="t">
             <a:normAutofit/>
           </a:bodyPr>
-          <a:lstStyle xmlns:a="http://schemas.openxmlformats.org/drawingml/2006/main"/>
-          <a:p xmlns:a="http://schemas.openxmlformats.org/drawingml/2006/main">
+          <a:lstStyle/>
+          <a:p>
             <a:pPr marL="0" indent="0" algn="l">
               <a:buNone/>
             </a:pPr>
@@ -1549,37 +1036,37 @@
       <p:sp>
         <p:nvSpPr>
           <p:cNvPr id="18" name="Shape 16">
-            <a:extLst xmlns:a="http://schemas.openxmlformats.org/drawingml/2006/main">
+            <a:extLst>
               <a:ext uri="{FF2B5EF4-FFF2-40B4-BE49-F238E27FC236}">
                 <a16:creationId xmlns:a16="http://schemas.microsoft.com/office/drawing/2014/main" id="{A9807597-EFF3-4924-8017-201525FCE507}"/>
               </a:ext>
             </a:extLst>
           </p:cNvPr>
           <p:cNvSpPr>
-            <a:spLocks xmlns:a="http://schemas.openxmlformats.org/drawingml/2006/main" noGrp="1"/>
-          </p:cNvSpPr>
-          <p:nvPr/>
-        </p:nvSpPr>
-        <p:spPr>
-          <a:xfrm xmlns:a="http://schemas.openxmlformats.org/drawingml/2006/main">
+            <a:spLocks noGrp="1"/>
+          </p:cNvSpPr>
+          <p:nvPr/>
+        </p:nvSpPr>
+        <p:spPr>
+          <a:xfrm>
             <a:off x="777240" y="5394960"/>
             <a:ext cx="12862560" cy="1645920"/>
           </a:xfrm>
-          <a:prstGeom xmlns:a="http://schemas.openxmlformats.org/drawingml/2006/main" prst="roundRect">
+          <a:prstGeom prst="roundRect">
             <a:avLst>
               <a:gd name="adj" fmla="val 4762"/>
             </a:avLst>
           </a:prstGeom>
-          <a:solidFill xmlns:a="http://schemas.openxmlformats.org/drawingml/2006/main">
+          <a:solidFill>
             <a:srgbClr val="FFFFFF"/>
           </a:solidFill>
-          <a:ln xmlns:a="http://schemas.openxmlformats.org/drawingml/2006/main" w="12700">
+          <a:ln w="12700">
             <a:solidFill>
               <a:srgbClr val="CAD2D9"/>
             </a:solidFill>
             <a:prstDash val="solid"/>
           </a:ln>
-          <a:effectLst xmlns:a="http://schemas.openxmlformats.org/drawingml/2006/main">
+          <a:effectLst>
             <a:outerShdw blurRad="12700" dist="50800" dir="2700000" algn="bl" rotWithShape="0">
               <a:srgbClr val="B9C1CA">
                 <a:alpha val="12000"/>
@@ -1588,41 +1075,43 @@
           </a:effectLst>
         </p:spPr>
         <p:txBody>
-          <a:bodyPr xmlns:a="http://schemas.openxmlformats.org/drawingml/2006/main"/>
-          <a:lstStyle xmlns:a="http://schemas.openxmlformats.org/drawingml/2006/main"/>
-          <a:p xmlns:a="http://schemas.openxmlformats.org/drawingml/2006/main"/>
+          <a:bodyPr/>
+          <a:lstStyle/>
+          <a:p>
+            <a:endParaRPr/>
+          </a:p>
         </p:txBody>
       </p:sp>
       <p:sp>
         <p:nvSpPr>
           <p:cNvPr id="19" name="Text 17">
-            <a:extLst xmlns:a="http://schemas.openxmlformats.org/drawingml/2006/main">
+            <a:extLst>
               <a:ext uri="{FF2B5EF4-FFF2-40B4-BE49-F238E27FC236}">
                 <a16:creationId xmlns:a16="http://schemas.microsoft.com/office/drawing/2014/main" id="{6B763FC3-D9C1-4DFD-8474-C4FB46CF6D5B}"/>
               </a:ext>
             </a:extLst>
           </p:cNvPr>
           <p:cNvSpPr>
-            <a:spLocks xmlns:a="http://schemas.openxmlformats.org/drawingml/2006/main" noGrp="1"/>
-          </p:cNvSpPr>
-          <p:nvPr/>
-        </p:nvSpPr>
-        <p:spPr>
-          <a:xfrm xmlns:a="http://schemas.openxmlformats.org/drawingml/2006/main">
+            <a:spLocks noGrp="1"/>
+          </p:cNvSpPr>
+          <p:nvPr/>
+        </p:nvSpPr>
+        <p:spPr>
+          <a:xfrm>
             <a:off x="1033272" y="5559552"/>
             <a:ext cx="12350496" cy="320040"/>
           </a:xfrm>
-          <a:prstGeom xmlns:a="http://schemas.openxmlformats.org/drawingml/2006/main" prst="rect">
-            <a:avLst/>
-          </a:prstGeom>
-          <a:noFill xmlns:a="http://schemas.openxmlformats.org/drawingml/2006/main"/>
-        </p:spPr>
-        <p:txBody>
-          <a:bodyPr xmlns:a="http://schemas.openxmlformats.org/drawingml/2006/main" wrap="square" lIns="0" tIns="0" rIns="0" bIns="0" anchor="t">
+          <a:prstGeom prst="rect">
+            <a:avLst/>
+          </a:prstGeom>
+          <a:noFill/>
+        </p:spPr>
+        <p:txBody>
+          <a:bodyPr wrap="square" lIns="0" tIns="0" rIns="0" bIns="0" anchor="t">
             <a:normAutofit lnSpcReduction="10000"/>
           </a:bodyPr>
-          <a:lstStyle xmlns:a="http://schemas.openxmlformats.org/drawingml/2006/main"/>
-          <a:p xmlns:a="http://schemas.openxmlformats.org/drawingml/2006/main">
+          <a:lstStyle/>
+          <a:p>
             <a:pPr marL="0" indent="0" algn="l">
               <a:buNone/>
             </a:pPr>
@@ -1643,33 +1132,33 @@
       <p:sp>
         <p:nvSpPr>
           <p:cNvPr id="20" name="Text 18">
-            <a:extLst xmlns:a="http://schemas.openxmlformats.org/drawingml/2006/main">
+            <a:extLst>
               <a:ext uri="{FF2B5EF4-FFF2-40B4-BE49-F238E27FC236}">
                 <a16:creationId xmlns:a16="http://schemas.microsoft.com/office/drawing/2014/main" id="{506B0043-433A-4984-9631-61414C443B2B}"/>
               </a:ext>
             </a:extLst>
           </p:cNvPr>
           <p:cNvSpPr>
-            <a:spLocks xmlns:a="http://schemas.openxmlformats.org/drawingml/2006/main" noGrp="1"/>
-          </p:cNvSpPr>
-          <p:nvPr/>
-        </p:nvSpPr>
-        <p:spPr>
-          <a:xfrm xmlns:a="http://schemas.openxmlformats.org/drawingml/2006/main">
+            <a:spLocks noGrp="1"/>
+          </p:cNvSpPr>
+          <p:nvPr/>
+        </p:nvSpPr>
+        <p:spPr>
+          <a:xfrm>
             <a:off x="1097280" y="5934456"/>
             <a:ext cx="12222480" cy="932688"/>
           </a:xfrm>
-          <a:prstGeom xmlns:a="http://schemas.openxmlformats.org/drawingml/2006/main" prst="rect">
-            <a:avLst/>
-          </a:prstGeom>
-          <a:noFill xmlns:a="http://schemas.openxmlformats.org/drawingml/2006/main"/>
-        </p:spPr>
-        <p:txBody>
-          <a:bodyPr xmlns:a="http://schemas.openxmlformats.org/drawingml/2006/main" wrap="square" lIns="762" tIns="762" rIns="762" bIns="762" anchor="t">
+          <a:prstGeom prst="rect">
+            <a:avLst/>
+          </a:prstGeom>
+          <a:noFill/>
+        </p:spPr>
+        <p:txBody>
+          <a:bodyPr wrap="square" lIns="762" tIns="762" rIns="762" bIns="762" anchor="t">
             <a:normAutofit/>
           </a:bodyPr>
-          <a:lstStyle xmlns:a="http://schemas.openxmlformats.org/drawingml/2006/main"/>
-          <a:p xmlns:a="http://schemas.openxmlformats.org/drawingml/2006/main">
+          <a:lstStyle/>
+          <a:p>
             <a:pPr marL="0" indent="0" algn="l">
               <a:buNone/>
             </a:pPr>
@@ -1690,37 +1179,37 @@
       <p:sp>
         <p:nvSpPr>
           <p:cNvPr id="22" name="Shape 20">
-            <a:extLst xmlns:a="http://schemas.openxmlformats.org/drawingml/2006/main">
+            <a:extLst>
               <a:ext uri="{FF2B5EF4-FFF2-40B4-BE49-F238E27FC236}">
                 <a16:creationId xmlns:a16="http://schemas.microsoft.com/office/drawing/2014/main" id="{C18B3100-4A97-4FB4-806A-A4BA09933488}"/>
               </a:ext>
             </a:extLst>
           </p:cNvPr>
           <p:cNvSpPr>
-            <a:spLocks xmlns:a="http://schemas.openxmlformats.org/drawingml/2006/main" noGrp="1"/>
-          </p:cNvSpPr>
-          <p:nvPr/>
-        </p:nvSpPr>
-        <p:spPr>
-          <a:xfrm xmlns:a="http://schemas.openxmlformats.org/drawingml/2006/main">
+            <a:spLocks noGrp="1"/>
+          </p:cNvSpPr>
+          <p:nvPr/>
+        </p:nvSpPr>
+        <p:spPr>
+          <a:xfrm>
             <a:off x="777240" y="7315200"/>
             <a:ext cx="12862560" cy="6766560"/>
           </a:xfrm>
-          <a:prstGeom xmlns:a="http://schemas.openxmlformats.org/drawingml/2006/main" prst="roundRect">
+          <a:prstGeom prst="roundRect">
             <a:avLst>
               <a:gd name="adj" fmla="val 2041"/>
             </a:avLst>
           </a:prstGeom>
-          <a:solidFill xmlns:a="http://schemas.openxmlformats.org/drawingml/2006/main">
+          <a:solidFill>
             <a:srgbClr val="FFFFFF"/>
           </a:solidFill>
-          <a:ln xmlns:a="http://schemas.openxmlformats.org/drawingml/2006/main" w="12700">
+          <a:ln w="12700">
             <a:solidFill>
               <a:srgbClr val="CAD2D9"/>
             </a:solidFill>
             <a:prstDash val="solid"/>
           </a:ln>
-          <a:effectLst xmlns:a="http://schemas.openxmlformats.org/drawingml/2006/main">
+          <a:effectLst>
             <a:outerShdw blurRad="12700" dist="50800" dir="2700000" algn="bl" rotWithShape="0">
               <a:srgbClr val="B9C1CA">
                 <a:alpha val="12000"/>
@@ -1729,41 +1218,43 @@
           </a:effectLst>
         </p:spPr>
         <p:txBody>
-          <a:bodyPr xmlns:a="http://schemas.openxmlformats.org/drawingml/2006/main"/>
-          <a:lstStyle xmlns:a="http://schemas.openxmlformats.org/drawingml/2006/main"/>
-          <a:p xmlns:a="http://schemas.openxmlformats.org/drawingml/2006/main"/>
+          <a:bodyPr/>
+          <a:lstStyle/>
+          <a:p>
+            <a:endParaRPr/>
+          </a:p>
         </p:txBody>
       </p:sp>
       <p:sp>
         <p:nvSpPr>
           <p:cNvPr id="23" name="Text 21">
-            <a:extLst xmlns:a="http://schemas.openxmlformats.org/drawingml/2006/main">
+            <a:extLst>
               <a:ext uri="{FF2B5EF4-FFF2-40B4-BE49-F238E27FC236}">
                 <a16:creationId xmlns:a16="http://schemas.microsoft.com/office/drawing/2014/main" id="{B9CDAEA8-058C-4E41-9504-083051C984B4}"/>
               </a:ext>
             </a:extLst>
           </p:cNvPr>
           <p:cNvSpPr>
-            <a:spLocks xmlns:a="http://schemas.openxmlformats.org/drawingml/2006/main" noGrp="1"/>
-          </p:cNvSpPr>
-          <p:nvPr/>
-        </p:nvSpPr>
-        <p:spPr>
-          <a:xfrm xmlns:a="http://schemas.openxmlformats.org/drawingml/2006/main">
+            <a:spLocks noGrp="1"/>
+          </p:cNvSpPr>
+          <p:nvPr/>
+        </p:nvSpPr>
+        <p:spPr>
+          <a:xfrm>
             <a:off x="1033272" y="7483901"/>
             <a:ext cx="12350496" cy="320040"/>
           </a:xfrm>
-          <a:prstGeom xmlns:a="http://schemas.openxmlformats.org/drawingml/2006/main" prst="rect">
-            <a:avLst/>
-          </a:prstGeom>
-          <a:noFill xmlns:a="http://schemas.openxmlformats.org/drawingml/2006/main"/>
-        </p:spPr>
-        <p:txBody>
-          <a:bodyPr xmlns:a="http://schemas.openxmlformats.org/drawingml/2006/main" wrap="square" lIns="0" tIns="0" rIns="0" bIns="0" anchor="t">
+          <a:prstGeom prst="rect">
+            <a:avLst/>
+          </a:prstGeom>
+          <a:noFill/>
+        </p:spPr>
+        <p:txBody>
+          <a:bodyPr wrap="square" lIns="0" tIns="0" rIns="0" bIns="0" anchor="t">
             <a:normAutofit lnSpcReduction="10000"/>
           </a:bodyPr>
-          <a:lstStyle xmlns:a="http://schemas.openxmlformats.org/drawingml/2006/main"/>
-          <a:p xmlns:a="http://schemas.openxmlformats.org/drawingml/2006/main">
+          <a:lstStyle/>
+          <a:p>
             <a:pPr marL="0" indent="0" algn="l">
               <a:buNone/>
             </a:pPr>
@@ -1784,33 +1275,33 @@
       <p:sp>
         <p:nvSpPr>
           <p:cNvPr id="25" name="Text 23">
-            <a:extLst xmlns:a="http://schemas.openxmlformats.org/drawingml/2006/main">
+            <a:extLst>
               <a:ext uri="{FF2B5EF4-FFF2-40B4-BE49-F238E27FC236}">
                 <a16:creationId xmlns:a16="http://schemas.microsoft.com/office/drawing/2014/main" id="{A0AE3220-DA14-4250-BDEC-3C6017BE620D}"/>
               </a:ext>
             </a:extLst>
           </p:cNvPr>
           <p:cNvSpPr>
-            <a:spLocks xmlns:a="http://schemas.openxmlformats.org/drawingml/2006/main" noGrp="1"/>
-          </p:cNvSpPr>
-          <p:nvPr/>
-        </p:nvSpPr>
-        <p:spPr>
-          <a:xfrm xmlns:a="http://schemas.openxmlformats.org/drawingml/2006/main">
+            <a:spLocks noGrp="1"/>
+          </p:cNvSpPr>
+          <p:nvPr/>
+        </p:nvSpPr>
+        <p:spPr>
+          <a:xfrm>
             <a:off x="1325880" y="9185148"/>
             <a:ext cx="2880360" cy="201168"/>
           </a:xfrm>
-          <a:prstGeom xmlns:a="http://schemas.openxmlformats.org/drawingml/2006/main" prst="rect">
-            <a:avLst/>
-          </a:prstGeom>
-          <a:noFill xmlns:a="http://schemas.openxmlformats.org/drawingml/2006/main"/>
-        </p:spPr>
-        <p:txBody>
-          <a:bodyPr xmlns:a="http://schemas.openxmlformats.org/drawingml/2006/main" wrap="square" lIns="0" tIns="0" rIns="0" bIns="0" anchor="t">
+          <a:prstGeom prst="rect">
+            <a:avLst/>
+          </a:prstGeom>
+          <a:noFill/>
+        </p:spPr>
+        <p:txBody>
+          <a:bodyPr wrap="square" lIns="0" tIns="0" rIns="0" bIns="0" anchor="t">
             <a:normAutofit/>
           </a:bodyPr>
-          <a:lstStyle xmlns:a="http://schemas.openxmlformats.org/drawingml/2006/main"/>
-          <a:p xmlns:a="http://schemas.openxmlformats.org/drawingml/2006/main">
+          <a:lstStyle/>
+          <a:p>
             <a:pPr marL="0" indent="0" algn="ctr">
               <a:buNone/>
             </a:pPr>
@@ -1831,33 +1322,33 @@
       <p:sp>
         <p:nvSpPr>
           <p:cNvPr id="28" name="Text 26">
-            <a:extLst xmlns:a="http://schemas.openxmlformats.org/drawingml/2006/main">
+            <a:extLst>
               <a:ext uri="{FF2B5EF4-FFF2-40B4-BE49-F238E27FC236}">
                 <a16:creationId xmlns:a16="http://schemas.microsoft.com/office/drawing/2014/main" id="{C9D9EC90-28BA-43C1-B64D-D4514263053F}"/>
               </a:ext>
             </a:extLst>
           </p:cNvPr>
           <p:cNvSpPr>
-            <a:spLocks xmlns:a="http://schemas.openxmlformats.org/drawingml/2006/main" noGrp="1"/>
-          </p:cNvSpPr>
-          <p:nvPr/>
-        </p:nvSpPr>
-        <p:spPr>
-          <a:xfrm xmlns:a="http://schemas.openxmlformats.org/drawingml/2006/main">
+            <a:spLocks noGrp="1"/>
+          </p:cNvSpPr>
+          <p:nvPr/>
+        </p:nvSpPr>
+        <p:spPr>
+          <a:xfrm>
             <a:off x="1325880" y="11215116"/>
             <a:ext cx="2880360" cy="201168"/>
           </a:xfrm>
-          <a:prstGeom xmlns:a="http://schemas.openxmlformats.org/drawingml/2006/main" prst="rect">
-            <a:avLst/>
-          </a:prstGeom>
-          <a:noFill xmlns:a="http://schemas.openxmlformats.org/drawingml/2006/main"/>
-        </p:spPr>
-        <p:txBody>
-          <a:bodyPr xmlns:a="http://schemas.openxmlformats.org/drawingml/2006/main" wrap="square" lIns="0" tIns="0" rIns="0" bIns="0" anchor="t">
+          <a:prstGeom prst="rect">
+            <a:avLst/>
+          </a:prstGeom>
+          <a:noFill/>
+        </p:spPr>
+        <p:txBody>
+          <a:bodyPr wrap="square" lIns="0" tIns="0" rIns="0" bIns="0" anchor="t">
             <a:normAutofit/>
           </a:bodyPr>
-          <a:lstStyle xmlns:a="http://schemas.openxmlformats.org/drawingml/2006/main"/>
-          <a:p xmlns:a="http://schemas.openxmlformats.org/drawingml/2006/main">
+          <a:lstStyle/>
+          <a:p>
             <a:pPr marL="0" indent="0" algn="ctr">
               <a:buNone/>
             </a:pPr>
@@ -1878,33 +1369,33 @@
       <p:sp>
         <p:nvSpPr>
           <p:cNvPr id="29" name="Text 27">
-            <a:extLst xmlns:a="http://schemas.openxmlformats.org/drawingml/2006/main">
+            <a:extLst>
               <a:ext uri="{FF2B5EF4-FFF2-40B4-BE49-F238E27FC236}">
                 <a16:creationId xmlns:a16="http://schemas.microsoft.com/office/drawing/2014/main" id="{432395F6-982A-4AC3-A6D0-669D51311D48}"/>
               </a:ext>
             </a:extLst>
           </p:cNvPr>
           <p:cNvSpPr>
-            <a:spLocks xmlns:a="http://schemas.openxmlformats.org/drawingml/2006/main" noGrp="1"/>
-          </p:cNvSpPr>
-          <p:nvPr/>
-        </p:nvSpPr>
-        <p:spPr>
-          <a:xfrm xmlns:a="http://schemas.openxmlformats.org/drawingml/2006/main">
+            <a:spLocks noGrp="1"/>
+          </p:cNvSpPr>
+          <p:nvPr/>
+        </p:nvSpPr>
+        <p:spPr>
+          <a:xfrm>
             <a:off x="1097280" y="7987284"/>
             <a:ext cx="11856720" cy="5765292"/>
           </a:xfrm>
-          <a:prstGeom xmlns:a="http://schemas.openxmlformats.org/drawingml/2006/main" prst="rect">
-            <a:avLst/>
-          </a:prstGeom>
-          <a:noFill xmlns:a="http://schemas.openxmlformats.org/drawingml/2006/main"/>
-        </p:spPr>
-        <p:txBody>
-          <a:bodyPr xmlns:a="http://schemas.openxmlformats.org/drawingml/2006/main" wrap="square" lIns="762" tIns="762" rIns="762" bIns="762" anchor="t">
+          <a:prstGeom prst="rect">
+            <a:avLst/>
+          </a:prstGeom>
+          <a:noFill/>
+        </p:spPr>
+        <p:txBody>
+          <a:bodyPr wrap="square" lIns="762" tIns="762" rIns="762" bIns="762" anchor="t">
             <a:normAutofit/>
           </a:bodyPr>
-          <a:lstStyle xmlns:a="http://schemas.openxmlformats.org/drawingml/2006/main"/>
-          <a:p xmlns:a="http://schemas.openxmlformats.org/drawingml/2006/main">
+          <a:lstStyle/>
+          <a:p>
             <a:pPr marL="0" indent="0" algn="l">
               <a:lnSpc>
                 <a:spcPct val="150000"/>
@@ -1923,15 +1414,23 @@
               <a:t>Alcohol use disorder (AUD) is clinically complex and often co-occurs with psychiatric, substance-use, liver-related, behavioral, socioeconomic, and family-history factors. This study used the All of Us Research Program to characterize conditions associated with AUD across two complementary data sources: participant-reported survey data and electronic health record (EHR) diagnosis data.</a:t>
             </a:r>
           </a:p>
-          <a:p xmlns:a="http://schemas.openxmlformats.org/drawingml/2006/main">
+          <a:p>
             <a:pPr marL="0" indent="0" algn="l">
               <a:lnSpc>
                 <a:spcPct val="150000"/>
               </a:lnSpc>
               <a:buNone/>
             </a:pPr>
-          </a:p>
-          <a:p xmlns:a="http://schemas.openxmlformats.org/drawingml/2006/main">
+            <a:endParaRPr>
+              <a:solidFill>
+                <a:srgbClr val="17212B"/>
+              </a:solidFill>
+              <a:latin typeface="Aptos"/>
+              <a:ea typeface="Aptos"/>
+              <a:cs typeface="Aptos"/>
+            </a:endParaRPr>
+          </a:p>
+          <a:p>
             <a:pPr marL="0" indent="0" algn="l">
               <a:lnSpc>
                 <a:spcPct val="150000"/>
@@ -1950,15 +1449,23 @@
               <a:t>Survey-based AUD was defined from the Personal and Family Health History survey, while EHR-based AUD was defined from clinical diagnosis records. Candidate predictors included approximately 150 survey-reported conditions and the top 1,000 most prevalent non-AUD EHR conditions. Each condition was tested one at a time using logistic regression with covariate adjustment. Models included a basic demographic adjustment set and an expanded set incorporating behavioral, socioeconomic, and family-history variables.</a:t>
             </a:r>
           </a:p>
-          <a:p xmlns:a="http://schemas.openxmlformats.org/drawingml/2006/main">
+          <a:p>
             <a:pPr marL="0" indent="0" algn="l">
               <a:lnSpc>
                 <a:spcPct val="150000"/>
               </a:lnSpc>
               <a:buNone/>
             </a:pPr>
-          </a:p>
-          <a:p xmlns:a="http://schemas.openxmlformats.org/drawingml/2006/main">
+            <a:endParaRPr>
+              <a:solidFill>
+                <a:srgbClr val="17212B"/>
+              </a:solidFill>
+              <a:latin typeface="Aptos"/>
+              <a:ea typeface="Aptos"/>
+              <a:cs typeface="Aptos"/>
+            </a:endParaRPr>
+          </a:p>
+          <a:p>
             <a:pPr marL="0" indent="0" algn="l">
               <a:lnSpc>
                 <a:spcPct val="150000"/>
@@ -1982,37 +1489,37 @@
       <p:sp>
         <p:nvSpPr>
           <p:cNvPr id="31" name="Shape 29">
-            <a:extLst xmlns:a="http://schemas.openxmlformats.org/drawingml/2006/main">
+            <a:extLst>
               <a:ext uri="{FF2B5EF4-FFF2-40B4-BE49-F238E27FC236}">
                 <a16:creationId xmlns:a16="http://schemas.microsoft.com/office/drawing/2014/main" id="{0F7BAEE8-2527-4EC9-9C70-A9BEB854D5A6}"/>
               </a:ext>
             </a:extLst>
           </p:cNvPr>
           <p:cNvSpPr>
-            <a:spLocks xmlns:a="http://schemas.openxmlformats.org/drawingml/2006/main" noGrp="1"/>
-          </p:cNvSpPr>
-          <p:nvPr/>
-        </p:nvSpPr>
-        <p:spPr>
-          <a:xfrm xmlns:a="http://schemas.openxmlformats.org/drawingml/2006/main">
+            <a:spLocks noGrp="1"/>
+          </p:cNvSpPr>
+          <p:nvPr/>
+        </p:nvSpPr>
+        <p:spPr>
+          <a:xfrm>
             <a:off x="777240" y="14538960"/>
             <a:ext cx="12862560" cy="8101584"/>
           </a:xfrm>
-          <a:prstGeom xmlns:a="http://schemas.openxmlformats.org/drawingml/2006/main" prst="roundRect">
+          <a:prstGeom prst="roundRect">
             <a:avLst>
               <a:gd name="adj" fmla="val 1639"/>
             </a:avLst>
           </a:prstGeom>
-          <a:solidFill xmlns:a="http://schemas.openxmlformats.org/drawingml/2006/main">
+          <a:solidFill>
             <a:srgbClr val="FFFFFF"/>
           </a:solidFill>
-          <a:ln xmlns:a="http://schemas.openxmlformats.org/drawingml/2006/main" w="12700">
+          <a:ln w="12700">
             <a:solidFill>
               <a:srgbClr val="CAD2D9"/>
             </a:solidFill>
             <a:prstDash val="solid"/>
           </a:ln>
-          <a:effectLst xmlns:a="http://schemas.openxmlformats.org/drawingml/2006/main">
+          <a:effectLst>
             <a:outerShdw blurRad="12700" dist="50800" dir="2700000" algn="bl" rotWithShape="0">
               <a:srgbClr val="B9C1CA">
                 <a:alpha val="12000"/>
@@ -2021,41 +1528,43 @@
           </a:effectLst>
         </p:spPr>
         <p:txBody>
-          <a:bodyPr xmlns:a="http://schemas.openxmlformats.org/drawingml/2006/main"/>
-          <a:lstStyle xmlns:a="http://schemas.openxmlformats.org/drawingml/2006/main"/>
-          <a:p xmlns:a="http://schemas.openxmlformats.org/drawingml/2006/main"/>
+          <a:bodyPr/>
+          <a:lstStyle/>
+          <a:p>
+            <a:endParaRPr/>
+          </a:p>
         </p:txBody>
       </p:sp>
       <p:sp>
         <p:nvSpPr>
           <p:cNvPr id="32" name="Text 30">
-            <a:extLst xmlns:a="http://schemas.openxmlformats.org/drawingml/2006/main">
+            <a:extLst>
               <a:ext uri="{FF2B5EF4-FFF2-40B4-BE49-F238E27FC236}">
                 <a16:creationId xmlns:a16="http://schemas.microsoft.com/office/drawing/2014/main" id="{EFDC47A6-F696-479E-B145-06B73BD4ADB6}"/>
               </a:ext>
             </a:extLst>
           </p:cNvPr>
           <p:cNvSpPr>
-            <a:spLocks xmlns:a="http://schemas.openxmlformats.org/drawingml/2006/main" noGrp="1"/>
-          </p:cNvSpPr>
-          <p:nvPr/>
-        </p:nvSpPr>
-        <p:spPr>
-          <a:xfrm xmlns:a="http://schemas.openxmlformats.org/drawingml/2006/main">
+            <a:spLocks noGrp="1"/>
+          </p:cNvSpPr>
+          <p:nvPr/>
+        </p:nvSpPr>
+        <p:spPr>
+          <a:xfrm>
             <a:off x="1033272" y="14716515"/>
             <a:ext cx="12350496" cy="320040"/>
           </a:xfrm>
-          <a:prstGeom xmlns:a="http://schemas.openxmlformats.org/drawingml/2006/main" prst="rect">
-            <a:avLst/>
-          </a:prstGeom>
-          <a:noFill xmlns:a="http://schemas.openxmlformats.org/drawingml/2006/main"/>
-        </p:spPr>
-        <p:txBody>
-          <a:bodyPr xmlns:a="http://schemas.openxmlformats.org/drawingml/2006/main" wrap="square" lIns="0" tIns="0" rIns="0" bIns="0" anchor="t">
+          <a:prstGeom prst="rect">
+            <a:avLst/>
+          </a:prstGeom>
+          <a:noFill/>
+        </p:spPr>
+        <p:txBody>
+          <a:bodyPr wrap="square" lIns="0" tIns="0" rIns="0" bIns="0" anchor="t">
             <a:normAutofit lnSpcReduction="10000"/>
           </a:bodyPr>
-          <a:lstStyle xmlns:a="http://schemas.openxmlformats.org/drawingml/2006/main"/>
-          <a:p xmlns:a="http://schemas.openxmlformats.org/drawingml/2006/main">
+          <a:lstStyle/>
+          <a:p>
             <a:pPr marL="0" indent="0" algn="l">
               <a:buNone/>
             </a:pPr>
@@ -2076,31 +1585,31 @@
       <p:sp>
         <p:nvSpPr>
           <p:cNvPr id="33" name="Shape 31">
-            <a:extLst xmlns:a="http://schemas.openxmlformats.org/drawingml/2006/main">
+            <a:extLst>
               <a:ext uri="{FF2B5EF4-FFF2-40B4-BE49-F238E27FC236}">
                 <a16:creationId xmlns:a16="http://schemas.microsoft.com/office/drawing/2014/main" id="{33480E40-EB3A-4362-B113-0E9D8DBEC527}"/>
               </a:ext>
             </a:extLst>
           </p:cNvPr>
           <p:cNvSpPr>
-            <a:spLocks xmlns:a="http://schemas.openxmlformats.org/drawingml/2006/main" noGrp="1"/>
-          </p:cNvSpPr>
-          <p:nvPr/>
-        </p:nvSpPr>
-        <p:spPr>
-          <a:xfrm xmlns:a="http://schemas.openxmlformats.org/drawingml/2006/main">
+            <a:spLocks noGrp="1"/>
+          </p:cNvSpPr>
+          <p:nvPr/>
+        </p:nvSpPr>
+        <p:spPr>
+          <a:xfrm>
             <a:off x="1143000" y="15356595"/>
             <a:ext cx="12131040" cy="6881613"/>
           </a:xfrm>
-          <a:prstGeom xmlns:a="http://schemas.openxmlformats.org/drawingml/2006/main" prst="roundRect">
+          <a:prstGeom prst="roundRect">
             <a:avLst>
               <a:gd name="adj" fmla="val 1569"/>
             </a:avLst>
           </a:prstGeom>
-          <a:solidFill xmlns:a="http://schemas.openxmlformats.org/drawingml/2006/main">
+          <a:solidFill>
             <a:srgbClr val="F2F5F8"/>
           </a:solidFill>
-          <a:ln xmlns:a="http://schemas.openxmlformats.org/drawingml/2006/main" w="19050">
+          <a:ln w="19050">
             <a:solidFill>
               <a:srgbClr val="7C8B99"/>
             </a:solidFill>
@@ -2108,45 +1617,47 @@
           </a:ln>
         </p:spPr>
         <p:txBody>
-          <a:bodyPr xmlns:a="http://schemas.openxmlformats.org/drawingml/2006/main"/>
-          <a:lstStyle xmlns:a="http://schemas.openxmlformats.org/drawingml/2006/main"/>
-          <a:p xmlns:a="http://schemas.openxmlformats.org/drawingml/2006/main"/>
+          <a:bodyPr/>
+          <a:lstStyle/>
+          <a:p>
+            <a:endParaRPr/>
+          </a:p>
         </p:txBody>
       </p:sp>
       <p:sp>
         <p:nvSpPr>
           <p:cNvPr id="36" name="Shape 34">
-            <a:extLst xmlns:a="http://schemas.openxmlformats.org/drawingml/2006/main">
+            <a:extLst>
               <a:ext uri="{FF2B5EF4-FFF2-40B4-BE49-F238E27FC236}">
                 <a16:creationId xmlns:a16="http://schemas.microsoft.com/office/drawing/2014/main" id="{D6D14624-EE4D-4461-A673-E0A1728DEBD9}"/>
               </a:ext>
             </a:extLst>
           </p:cNvPr>
           <p:cNvSpPr>
-            <a:spLocks xmlns:a="http://schemas.openxmlformats.org/drawingml/2006/main" noGrp="1"/>
-          </p:cNvSpPr>
-          <p:nvPr/>
-        </p:nvSpPr>
-        <p:spPr>
-          <a:xfrm xmlns:a="http://schemas.openxmlformats.org/drawingml/2006/main">
+            <a:spLocks noGrp="1"/>
+          </p:cNvSpPr>
+          <p:nvPr/>
+        </p:nvSpPr>
+        <p:spPr>
+          <a:xfrm>
             <a:off x="777240" y="23097743"/>
             <a:ext cx="12862560" cy="7320187"/>
           </a:xfrm>
-          <a:prstGeom xmlns:a="http://schemas.openxmlformats.org/drawingml/2006/main" prst="roundRect">
+          <a:prstGeom prst="roundRect">
             <a:avLst>
               <a:gd name="adj" fmla="val 3191"/>
             </a:avLst>
           </a:prstGeom>
-          <a:solidFill xmlns:a="http://schemas.openxmlformats.org/drawingml/2006/main">
+          <a:solidFill>
             <a:srgbClr val="FFFFFF"/>
           </a:solidFill>
-          <a:ln xmlns:a="http://schemas.openxmlformats.org/drawingml/2006/main" w="12700">
+          <a:ln w="12700">
             <a:solidFill>
               <a:srgbClr val="CAD2D9"/>
             </a:solidFill>
             <a:prstDash val="solid"/>
           </a:ln>
-          <a:effectLst xmlns:a="http://schemas.openxmlformats.org/drawingml/2006/main">
+          <a:effectLst>
             <a:outerShdw blurRad="12700" dist="50800" dir="2700000" algn="bl" rotWithShape="0">
               <a:srgbClr val="B9C1CA">
                 <a:alpha val="12000"/>
@@ -2155,41 +1666,43 @@
           </a:effectLst>
         </p:spPr>
         <p:txBody>
-          <a:bodyPr xmlns:a="http://schemas.openxmlformats.org/drawingml/2006/main"/>
-          <a:lstStyle xmlns:a="http://schemas.openxmlformats.org/drawingml/2006/main"/>
-          <a:p xmlns:a="http://schemas.openxmlformats.org/drawingml/2006/main"/>
+          <a:bodyPr/>
+          <a:lstStyle/>
+          <a:p>
+            <a:endParaRPr/>
+          </a:p>
         </p:txBody>
       </p:sp>
       <p:sp>
         <p:nvSpPr>
           <p:cNvPr id="37" name="Text 35">
-            <a:extLst xmlns:a="http://schemas.openxmlformats.org/drawingml/2006/main">
+            <a:extLst>
               <a:ext uri="{FF2B5EF4-FFF2-40B4-BE49-F238E27FC236}">
                 <a16:creationId xmlns:a16="http://schemas.microsoft.com/office/drawing/2014/main" id="{B417A13A-738C-4EDF-9014-44C2ADA56552}"/>
               </a:ext>
             </a:extLst>
           </p:cNvPr>
           <p:cNvSpPr>
-            <a:spLocks xmlns:a="http://schemas.openxmlformats.org/drawingml/2006/main" noGrp="1"/>
-          </p:cNvSpPr>
-          <p:nvPr/>
-        </p:nvSpPr>
-        <p:spPr>
-          <a:xfrm xmlns:a="http://schemas.openxmlformats.org/drawingml/2006/main">
+            <a:spLocks noGrp="1"/>
+          </p:cNvSpPr>
+          <p:nvPr/>
+        </p:nvSpPr>
+        <p:spPr>
+          <a:xfrm>
             <a:off x="1033272" y="23270670"/>
             <a:ext cx="12350496" cy="320040"/>
           </a:xfrm>
-          <a:prstGeom xmlns:a="http://schemas.openxmlformats.org/drawingml/2006/main" prst="rect">
-            <a:avLst/>
-          </a:prstGeom>
-          <a:noFill xmlns:a="http://schemas.openxmlformats.org/drawingml/2006/main"/>
-        </p:spPr>
-        <p:txBody>
-          <a:bodyPr xmlns:a="http://schemas.openxmlformats.org/drawingml/2006/main" wrap="square" lIns="0" tIns="0" rIns="0" bIns="0" anchor="t">
+          <a:prstGeom prst="rect">
+            <a:avLst/>
+          </a:prstGeom>
+          <a:noFill/>
+        </p:spPr>
+        <p:txBody>
+          <a:bodyPr wrap="square" lIns="0" tIns="0" rIns="0" bIns="0" anchor="t">
             <a:normAutofit lnSpcReduction="10000"/>
           </a:bodyPr>
-          <a:lstStyle xmlns:a="http://schemas.openxmlformats.org/drawingml/2006/main"/>
-          <a:p xmlns:a="http://schemas.openxmlformats.org/drawingml/2006/main">
+          <a:lstStyle/>
+          <a:p>
             <a:pPr marL="0" indent="0" algn="l">
               <a:buNone/>
             </a:pPr>
@@ -2210,29 +1723,29 @@
       <p:sp>
         <p:nvSpPr>
           <p:cNvPr id="42" name="Shape 40">
-            <a:extLst xmlns:a="http://schemas.openxmlformats.org/drawingml/2006/main">
+            <a:extLst>
               <a:ext uri="{FF2B5EF4-FFF2-40B4-BE49-F238E27FC236}">
                 <a16:creationId xmlns:a16="http://schemas.microsoft.com/office/drawing/2014/main" id="{2D176F4B-3E65-439D-AC8A-2232F40A9BAE}"/>
               </a:ext>
             </a:extLst>
           </p:cNvPr>
           <p:cNvSpPr>
-            <a:spLocks xmlns:a="http://schemas.openxmlformats.org/drawingml/2006/main" noGrp="1"/>
-          </p:cNvSpPr>
-          <p:nvPr/>
-        </p:nvSpPr>
-        <p:spPr>
-          <a:xfrm xmlns:a="http://schemas.openxmlformats.org/drawingml/2006/main">
+            <a:spLocks noGrp="1"/>
+          </p:cNvSpPr>
+          <p:nvPr/>
+        </p:nvSpPr>
+        <p:spPr>
+          <a:xfrm>
             <a:off x="14142720" y="4709160"/>
             <a:ext cx="12862560" cy="502920"/>
           </a:xfrm>
-          <a:prstGeom xmlns:a="http://schemas.openxmlformats.org/drawingml/2006/main" prst="rect">
-            <a:avLst/>
-          </a:prstGeom>
-          <a:solidFill xmlns:a="http://schemas.openxmlformats.org/drawingml/2006/main">
+          <a:prstGeom prst="rect">
+            <a:avLst/>
+          </a:prstGeom>
+          <a:solidFill>
             <a:srgbClr val="16324F"/>
           </a:solidFill>
-          <a:ln xmlns:a="http://schemas.openxmlformats.org/drawingml/2006/main" w="12700">
+          <a:ln w="12700">
             <a:solidFill>
               <a:srgbClr val="16324F">
                 <a:alpha val="0"/>
@@ -2242,41 +1755,43 @@
           </a:ln>
         </p:spPr>
         <p:txBody>
-          <a:bodyPr xmlns:a="http://schemas.openxmlformats.org/drawingml/2006/main"/>
-          <a:lstStyle xmlns:a="http://schemas.openxmlformats.org/drawingml/2006/main"/>
-          <a:p xmlns:a="http://schemas.openxmlformats.org/drawingml/2006/main"/>
+          <a:bodyPr/>
+          <a:lstStyle/>
+          <a:p>
+            <a:endParaRPr/>
+          </a:p>
         </p:txBody>
       </p:sp>
       <p:sp>
         <p:nvSpPr>
           <p:cNvPr id="43" name="Text 41">
-            <a:extLst xmlns:a="http://schemas.openxmlformats.org/drawingml/2006/main">
+            <a:extLst>
               <a:ext uri="{FF2B5EF4-FFF2-40B4-BE49-F238E27FC236}">
                 <a16:creationId xmlns:a16="http://schemas.microsoft.com/office/drawing/2014/main" id="{2D6FD00B-0D5F-4BBD-BCA6-76A2293A57B3}"/>
               </a:ext>
             </a:extLst>
           </p:cNvPr>
           <p:cNvSpPr>
-            <a:spLocks xmlns:a="http://schemas.openxmlformats.org/drawingml/2006/main" noGrp="1"/>
-          </p:cNvSpPr>
-          <p:nvPr/>
-        </p:nvSpPr>
-        <p:spPr>
-          <a:xfrm xmlns:a="http://schemas.openxmlformats.org/drawingml/2006/main">
+            <a:spLocks noGrp="1"/>
+          </p:cNvSpPr>
+          <p:nvPr/>
+        </p:nvSpPr>
+        <p:spPr>
+          <a:xfrm>
             <a:off x="14343888" y="4773168"/>
             <a:ext cx="12460224" cy="384048"/>
           </a:xfrm>
-          <a:prstGeom xmlns:a="http://schemas.openxmlformats.org/drawingml/2006/main" prst="rect">
-            <a:avLst/>
-          </a:prstGeom>
-          <a:noFill xmlns:a="http://schemas.openxmlformats.org/drawingml/2006/main"/>
-        </p:spPr>
-        <p:txBody>
-          <a:bodyPr xmlns:a="http://schemas.openxmlformats.org/drawingml/2006/main" wrap="square" lIns="0" tIns="0" rIns="0" bIns="0" anchor="t">
+          <a:prstGeom prst="rect">
+            <a:avLst/>
+          </a:prstGeom>
+          <a:noFill/>
+        </p:spPr>
+        <p:txBody>
+          <a:bodyPr wrap="square" lIns="0" tIns="0" rIns="0" bIns="0" anchor="t">
             <a:normAutofit/>
           </a:bodyPr>
-          <a:lstStyle xmlns:a="http://schemas.openxmlformats.org/drawingml/2006/main"/>
-          <a:p xmlns:a="http://schemas.openxmlformats.org/drawingml/2006/main">
+          <a:lstStyle/>
+          <a:p>
             <a:pPr marL="0" indent="0" algn="l">
               <a:buNone/>
             </a:pPr>
@@ -2289,18 +1804,7 @@
                 <a:ea typeface="Aptos"/>
                 <a:cs typeface="Aptos"/>
               </a:rPr>
-              <a:t>2. Cohort &amp; Covariate G</a:t>
-            </a:r>
-            <a:r>
-              <a:rPr sz="2400" b="1">
-                <a:solidFill>
-                  <a:srgbClr val="FFFFFF"/>
-                </a:solidFill>
-                <a:latin typeface="Aptos"/>
-                <a:ea typeface="Aptos"/>
-                <a:cs typeface="Aptos"/>
-              </a:rPr>
-              <a:t>roups</a:t>
+              <a:t>2. Cohort &amp; Covariate Groups</a:t>
             </a:r>
           </a:p>
         </p:txBody>
@@ -2308,37 +1812,37 @@
       <p:sp>
         <p:nvSpPr>
           <p:cNvPr id="44" name="Shape 42">
-            <a:extLst xmlns:a="http://schemas.openxmlformats.org/drawingml/2006/main">
+            <a:extLst>
               <a:ext uri="{FF2B5EF4-FFF2-40B4-BE49-F238E27FC236}">
                 <a16:creationId xmlns:a16="http://schemas.microsoft.com/office/drawing/2014/main" id="{F4FC8854-76B2-4AE3-AE32-649B0CF82C92}"/>
               </a:ext>
             </a:extLst>
           </p:cNvPr>
           <p:cNvSpPr>
-            <a:spLocks xmlns:a="http://schemas.openxmlformats.org/drawingml/2006/main" noGrp="1"/>
-          </p:cNvSpPr>
-          <p:nvPr/>
-        </p:nvSpPr>
-        <p:spPr>
-          <a:xfrm xmlns:a="http://schemas.openxmlformats.org/drawingml/2006/main">
+            <a:spLocks noGrp="1"/>
+          </p:cNvSpPr>
+          <p:nvPr/>
+        </p:nvSpPr>
+        <p:spPr>
+          <a:xfrm>
             <a:off x="14142720" y="5394960"/>
             <a:ext cx="12862560" cy="6812280"/>
           </a:xfrm>
-          <a:prstGeom xmlns:a="http://schemas.openxmlformats.org/drawingml/2006/main" prst="roundRect">
+          <a:prstGeom prst="roundRect">
             <a:avLst>
               <a:gd name="adj" fmla="val 2885"/>
             </a:avLst>
           </a:prstGeom>
-          <a:solidFill xmlns:a="http://schemas.openxmlformats.org/drawingml/2006/main">
+          <a:solidFill>
             <a:srgbClr val="FFFFFF"/>
           </a:solidFill>
-          <a:ln xmlns:a="http://schemas.openxmlformats.org/drawingml/2006/main" w="12700">
+          <a:ln w="12700">
             <a:solidFill>
               <a:srgbClr val="CAD2D9"/>
             </a:solidFill>
             <a:prstDash val="solid"/>
           </a:ln>
-          <a:effectLst xmlns:a="http://schemas.openxmlformats.org/drawingml/2006/main">
+          <a:effectLst>
             <a:outerShdw blurRad="12700" dist="50800" dir="2700000" algn="bl" rotWithShape="0">
               <a:srgbClr val="B9C1CA">
                 <a:alpha val="12000"/>
@@ -2347,37 +1851,39 @@
           </a:effectLst>
         </p:spPr>
         <p:txBody>
-          <a:bodyPr xmlns:a="http://schemas.openxmlformats.org/drawingml/2006/main"/>
-          <a:lstStyle xmlns:a="http://schemas.openxmlformats.org/drawingml/2006/main"/>
-          <a:p xmlns:a="http://schemas.openxmlformats.org/drawingml/2006/main"/>
+          <a:bodyPr/>
+          <a:lstStyle/>
+          <a:p>
+            <a:endParaRPr/>
+          </a:p>
         </p:txBody>
       </p:sp>
       <p:sp>
         <p:nvSpPr>
           <p:cNvPr id="77" name="Shape 75">
-            <a:extLst xmlns:a="http://schemas.openxmlformats.org/drawingml/2006/main">
+            <a:extLst>
               <a:ext uri="{FF2B5EF4-FFF2-40B4-BE49-F238E27FC236}">
                 <a16:creationId xmlns:a16="http://schemas.microsoft.com/office/drawing/2014/main" id="{BCF8DD11-A5C8-4545-AFB0-BE8A16D7FF77}"/>
               </a:ext>
             </a:extLst>
           </p:cNvPr>
           <p:cNvSpPr>
-            <a:spLocks xmlns:a="http://schemas.openxmlformats.org/drawingml/2006/main" noGrp="1"/>
-          </p:cNvSpPr>
-          <p:nvPr/>
-        </p:nvSpPr>
-        <p:spPr>
-          <a:xfrm xmlns:a="http://schemas.openxmlformats.org/drawingml/2006/main">
+            <a:spLocks noGrp="1"/>
+          </p:cNvSpPr>
+          <p:nvPr/>
+        </p:nvSpPr>
+        <p:spPr>
+          <a:xfrm>
             <a:off x="14142720" y="20651932"/>
             <a:ext cx="12862560" cy="502920"/>
           </a:xfrm>
-          <a:prstGeom xmlns:a="http://schemas.openxmlformats.org/drawingml/2006/main" prst="rect">
-            <a:avLst/>
-          </a:prstGeom>
-          <a:solidFill xmlns:a="http://schemas.openxmlformats.org/drawingml/2006/main">
+          <a:prstGeom prst="rect">
+            <a:avLst/>
+          </a:prstGeom>
+          <a:solidFill>
             <a:srgbClr val="D39C2D"/>
           </a:solidFill>
-          <a:ln xmlns:a="http://schemas.openxmlformats.org/drawingml/2006/main" w="12700">
+          <a:ln w="12700">
             <a:solidFill>
               <a:srgbClr val="D39C2D">
                 <a:alpha val="0"/>
@@ -2387,41 +1893,43 @@
           </a:ln>
         </p:spPr>
         <p:txBody>
-          <a:bodyPr xmlns:a="http://schemas.openxmlformats.org/drawingml/2006/main"/>
-          <a:lstStyle xmlns:a="http://schemas.openxmlformats.org/drawingml/2006/main"/>
-          <a:p xmlns:a="http://schemas.openxmlformats.org/drawingml/2006/main"/>
+          <a:bodyPr/>
+          <a:lstStyle/>
+          <a:p>
+            <a:endParaRPr/>
+          </a:p>
         </p:txBody>
       </p:sp>
       <p:sp>
         <p:nvSpPr>
           <p:cNvPr id="78" name="Text 76">
-            <a:extLst xmlns:a="http://schemas.openxmlformats.org/drawingml/2006/main">
+            <a:extLst>
               <a:ext uri="{FF2B5EF4-FFF2-40B4-BE49-F238E27FC236}">
                 <a16:creationId xmlns:a16="http://schemas.microsoft.com/office/drawing/2014/main" id="{AFD0493B-9C1B-4980-B09E-320BC4DF0BCA}"/>
               </a:ext>
             </a:extLst>
           </p:cNvPr>
           <p:cNvSpPr>
-            <a:spLocks xmlns:a="http://schemas.openxmlformats.org/drawingml/2006/main" noGrp="1"/>
-          </p:cNvSpPr>
-          <p:nvPr/>
-        </p:nvSpPr>
-        <p:spPr>
-          <a:xfrm xmlns:a="http://schemas.openxmlformats.org/drawingml/2006/main">
+            <a:spLocks noGrp="1"/>
+          </p:cNvSpPr>
+          <p:nvPr/>
+        </p:nvSpPr>
+        <p:spPr>
+          <a:xfrm>
             <a:off x="14343888" y="20715732"/>
             <a:ext cx="12460224" cy="384048"/>
           </a:xfrm>
-          <a:prstGeom xmlns:a="http://schemas.openxmlformats.org/drawingml/2006/main" prst="rect">
-            <a:avLst/>
-          </a:prstGeom>
-          <a:noFill xmlns:a="http://schemas.openxmlformats.org/drawingml/2006/main"/>
-        </p:spPr>
-        <p:txBody>
-          <a:bodyPr xmlns:a="http://schemas.openxmlformats.org/drawingml/2006/main" wrap="square" lIns="0" tIns="0" rIns="0" bIns="0" anchor="t">
+          <a:prstGeom prst="rect">
+            <a:avLst/>
+          </a:prstGeom>
+          <a:noFill/>
+        </p:spPr>
+        <p:txBody>
+          <a:bodyPr wrap="square" lIns="0" tIns="0" rIns="0" bIns="0" anchor="t">
             <a:normAutofit/>
           </a:bodyPr>
-          <a:lstStyle xmlns:a="http://schemas.openxmlformats.org/drawingml/2006/main"/>
-          <a:p xmlns:a="http://schemas.openxmlformats.org/drawingml/2006/main">
+          <a:lstStyle/>
+          <a:p>
             <a:pPr marL="0" indent="0" algn="l">
               <a:buNone/>
             </a:pPr>
@@ -2442,37 +1950,37 @@
       <p:sp>
         <p:nvSpPr>
           <p:cNvPr id="79" name="Shape 77">
-            <a:extLst xmlns:a="http://schemas.openxmlformats.org/drawingml/2006/main">
+            <a:extLst>
               <a:ext uri="{FF2B5EF4-FFF2-40B4-BE49-F238E27FC236}">
                 <a16:creationId xmlns:a16="http://schemas.microsoft.com/office/drawing/2014/main" id="{14ECA1CE-ED07-4B7B-B616-67C030999BC8}"/>
               </a:ext>
             </a:extLst>
           </p:cNvPr>
           <p:cNvSpPr>
-            <a:spLocks xmlns:a="http://schemas.openxmlformats.org/drawingml/2006/main" noGrp="1"/>
-          </p:cNvSpPr>
-          <p:nvPr/>
-        </p:nvSpPr>
-        <p:spPr>
-          <a:xfrm xmlns:a="http://schemas.openxmlformats.org/drawingml/2006/main">
+            <a:spLocks noGrp="1"/>
+          </p:cNvSpPr>
+          <p:nvPr/>
+        </p:nvSpPr>
+        <p:spPr>
+          <a:xfrm>
             <a:off x="27508200" y="5394960"/>
             <a:ext cx="12862560" cy="11338560"/>
           </a:xfrm>
-          <a:prstGeom xmlns:a="http://schemas.openxmlformats.org/drawingml/2006/main" prst="roundRect">
+          <a:prstGeom prst="roundRect">
             <a:avLst>
               <a:gd name="adj" fmla="val 1210"/>
             </a:avLst>
           </a:prstGeom>
-          <a:solidFill xmlns:a="http://schemas.openxmlformats.org/drawingml/2006/main">
+          <a:solidFill>
             <a:srgbClr val="FFFFFF"/>
           </a:solidFill>
-          <a:ln xmlns:a="http://schemas.openxmlformats.org/drawingml/2006/main" w="12700">
+          <a:ln w="12700">
             <a:solidFill>
               <a:srgbClr val="CAD2D9"/>
             </a:solidFill>
             <a:prstDash val="solid"/>
           </a:ln>
-          <a:effectLst xmlns:a="http://schemas.openxmlformats.org/drawingml/2006/main">
+          <a:effectLst>
             <a:outerShdw blurRad="12700" dist="50800" dir="2700000" algn="bl" rotWithShape="0">
               <a:srgbClr val="B9C1CA">
                 <a:alpha val="12000"/>
@@ -2481,46 +1989,48 @@
           </a:effectLst>
         </p:spPr>
         <p:txBody>
-          <a:bodyPr xmlns:a="http://schemas.openxmlformats.org/drawingml/2006/main"/>
-          <a:lstStyle xmlns:a="http://schemas.openxmlformats.org/drawingml/2006/main"/>
-          <a:p xmlns:a="http://schemas.openxmlformats.org/drawingml/2006/main"/>
+          <a:bodyPr/>
+          <a:lstStyle/>
+          <a:p>
+            <a:endParaRPr/>
+          </a:p>
         </p:txBody>
       </p:sp>
       <p:sp>
         <p:nvSpPr>
           <p:cNvPr id="80" name="Text 78">
-            <a:extLst xmlns:a="http://schemas.openxmlformats.org/drawingml/2006/main">
+            <a:extLst>
               <a:ext uri="{FF2B5EF4-FFF2-40B4-BE49-F238E27FC236}">
                 <a16:creationId xmlns:a16="http://schemas.microsoft.com/office/drawing/2014/main" id="{705D37B4-A68E-4D3A-9D78-9884D8857E1A}"/>
               </a:ext>
             </a:extLst>
           </p:cNvPr>
           <p:cNvSpPr>
-            <a:spLocks xmlns:a="http://schemas.openxmlformats.org/drawingml/2006/main" noGrp="1"/>
-          </p:cNvSpPr>
-          <p:nvPr/>
-        </p:nvSpPr>
-        <p:spPr>
-          <a:xfrm xmlns:a="http://schemas.openxmlformats.org/drawingml/2006/main">
+            <a:spLocks noGrp="1"/>
+          </p:cNvSpPr>
+          <p:nvPr/>
+        </p:nvSpPr>
+        <p:spPr>
+          <a:xfrm>
             <a:off x="27764232" y="5559552"/>
             <a:ext cx="12350496" cy="320040"/>
           </a:xfrm>
-          <a:prstGeom xmlns:a="http://schemas.openxmlformats.org/drawingml/2006/main" prst="rect">
-            <a:avLst/>
-          </a:prstGeom>
-          <a:noFill xmlns:a="http://schemas.openxmlformats.org/drawingml/2006/main"/>
-        </p:spPr>
-        <p:txBody>
-          <a:bodyPr xmlns:a="http://schemas.openxmlformats.org/drawingml/2006/main" wrap="square" lIns="0" tIns="0" rIns="0" bIns="0" anchor="t">
+          <a:prstGeom prst="rect">
+            <a:avLst/>
+          </a:prstGeom>
+          <a:noFill/>
+        </p:spPr>
+        <p:txBody>
+          <a:bodyPr wrap="square" lIns="0" tIns="0" rIns="0" bIns="0" anchor="t">
             <a:normAutofit lnSpcReduction="10000"/>
           </a:bodyPr>
-          <a:lstStyle xmlns:a="http://schemas.openxmlformats.org/drawingml/2006/main"/>
-          <a:p xmlns:a="http://schemas.openxmlformats.org/drawingml/2006/main">
+          <a:lstStyle/>
+          <a:p>
             <a:pPr marL="0" indent="0" algn="l">
               <a:buNone/>
             </a:pPr>
             <a:r>
-              <a:rPr sz="2200" b="1">
+              <a:rPr sz="2200" b="1" dirty="0">
                 <a:solidFill>
                   <a:srgbClr val="D39C2D"/>
                 </a:solidFill>
@@ -2536,31 +2046,31 @@
       <p:sp>
         <p:nvSpPr>
           <p:cNvPr id="81" name="Shape 79">
-            <a:extLst xmlns:a="http://schemas.openxmlformats.org/drawingml/2006/main">
+            <a:extLst>
               <a:ext uri="{FF2B5EF4-FFF2-40B4-BE49-F238E27FC236}">
                 <a16:creationId xmlns:a16="http://schemas.microsoft.com/office/drawing/2014/main" id="{9CFA1D9C-6846-41CD-87FC-6DE4EEF950FF}"/>
               </a:ext>
             </a:extLst>
           </p:cNvPr>
           <p:cNvSpPr>
-            <a:spLocks xmlns:a="http://schemas.openxmlformats.org/drawingml/2006/main" noGrp="1"/>
-          </p:cNvSpPr>
-          <p:nvPr/>
-        </p:nvSpPr>
-        <p:spPr>
-          <a:xfrm xmlns:a="http://schemas.openxmlformats.org/drawingml/2006/main">
+            <a:spLocks noGrp="1"/>
+          </p:cNvSpPr>
+          <p:nvPr/>
+        </p:nvSpPr>
+        <p:spPr>
+          <a:xfrm>
             <a:off x="27873960" y="6035040"/>
             <a:ext cx="12131040" cy="9006840"/>
           </a:xfrm>
-          <a:prstGeom xmlns:a="http://schemas.openxmlformats.org/drawingml/2006/main" prst="roundRect">
+          <a:prstGeom prst="roundRect">
             <a:avLst>
               <a:gd name="adj" fmla="val 1218"/>
             </a:avLst>
           </a:prstGeom>
-          <a:solidFill xmlns:a="http://schemas.openxmlformats.org/drawingml/2006/main">
+          <a:solidFill>
             <a:srgbClr val="F2F5F8"/>
           </a:solidFill>
-          <a:ln xmlns:a="http://schemas.openxmlformats.org/drawingml/2006/main" w="19050">
+          <a:ln w="19050">
             <a:solidFill>
               <a:srgbClr val="7C8B99"/>
             </a:solidFill>
@@ -2568,45 +2078,47 @@
           </a:ln>
         </p:spPr>
         <p:txBody>
-          <a:bodyPr xmlns:a="http://schemas.openxmlformats.org/drawingml/2006/main"/>
-          <a:lstStyle xmlns:a="http://schemas.openxmlformats.org/drawingml/2006/main"/>
-          <a:p xmlns:a="http://schemas.openxmlformats.org/drawingml/2006/main"/>
+          <a:bodyPr/>
+          <a:lstStyle/>
+          <a:p>
+            <a:endParaRPr/>
+          </a:p>
         </p:txBody>
       </p:sp>
       <p:sp>
         <p:nvSpPr>
           <p:cNvPr id="85" name="Shape 83">
-            <a:extLst xmlns:a="http://schemas.openxmlformats.org/drawingml/2006/main">
+            <a:extLst>
               <a:ext uri="{FF2B5EF4-FFF2-40B4-BE49-F238E27FC236}">
                 <a16:creationId xmlns:a16="http://schemas.microsoft.com/office/drawing/2014/main" id="{6EFCAAC7-51C7-48BD-8C8D-2B08EC900101}"/>
               </a:ext>
             </a:extLst>
           </p:cNvPr>
           <p:cNvSpPr>
-            <a:spLocks xmlns:a="http://schemas.openxmlformats.org/drawingml/2006/main" noGrp="1"/>
-          </p:cNvSpPr>
-          <p:nvPr/>
-        </p:nvSpPr>
-        <p:spPr>
-          <a:xfrm xmlns:a="http://schemas.openxmlformats.org/drawingml/2006/main">
+            <a:spLocks noGrp="1"/>
+          </p:cNvSpPr>
+          <p:nvPr/>
+        </p:nvSpPr>
+        <p:spPr>
+          <a:xfrm>
             <a:off x="27508200" y="17099280"/>
             <a:ext cx="12862560" cy="7635240"/>
           </a:xfrm>
-          <a:prstGeom xmlns:a="http://schemas.openxmlformats.org/drawingml/2006/main" prst="roundRect">
+          <a:prstGeom prst="roundRect">
             <a:avLst>
               <a:gd name="adj" fmla="val 1796"/>
             </a:avLst>
           </a:prstGeom>
-          <a:solidFill xmlns:a="http://schemas.openxmlformats.org/drawingml/2006/main">
+          <a:solidFill>
             <a:srgbClr val="FFFFFF"/>
           </a:solidFill>
-          <a:ln xmlns:a="http://schemas.openxmlformats.org/drawingml/2006/main" w="12700">
+          <a:ln w="12700">
             <a:solidFill>
               <a:srgbClr val="CAD2D9"/>
             </a:solidFill>
             <a:prstDash val="solid"/>
           </a:ln>
-          <a:effectLst xmlns:a="http://schemas.openxmlformats.org/drawingml/2006/main">
+          <a:effectLst>
             <a:outerShdw blurRad="12700" dist="50800" dir="2700000" algn="bl" rotWithShape="0">
               <a:srgbClr val="B9C1CA">
                 <a:alpha val="12000"/>
@@ -2615,46 +2127,45 @@
           </a:effectLst>
         </p:spPr>
         <p:txBody>
-          <a:bodyPr xmlns:a="http://schemas.openxmlformats.org/drawingml/2006/main"/>
-          <a:lstStyle xmlns:a="http://schemas.openxmlformats.org/drawingml/2006/main"/>
-          <a:p xmlns:a="http://schemas.openxmlformats.org/drawingml/2006/main"/>
+          <a:bodyPr/>
+          <a:lstStyle/>
+          <a:p>
+            <a:endParaRPr/>
+          </a:p>
         </p:txBody>
       </p:sp>
       <p:sp>
         <p:nvSpPr>
           <p:cNvPr id="86" name="Text 84">
-            <a:extLst xmlns:a="http://schemas.openxmlformats.org/drawingml/2006/main">
+            <a:extLst>
               <a:ext uri="{FF2B5EF4-FFF2-40B4-BE49-F238E27FC236}">
                 <a16:creationId xmlns:a16="http://schemas.microsoft.com/office/drawing/2014/main" id="{69E4ED5A-2470-4E7A-ABB1-C6D4C86727CA}"/>
               </a:ext>
             </a:extLst>
           </p:cNvPr>
           <p:cNvSpPr>
-            <a:spLocks xmlns:a="http://schemas.openxmlformats.org/drawingml/2006/main" noGrp="1"/>
-          </p:cNvSpPr>
-          <p:nvPr/>
-        </p:nvSpPr>
-        <p:spPr>
-          <a:xfrm xmlns:a="http://schemas.openxmlformats.org/drawingml/2006/main">
+            <a:spLocks noGrp="1"/>
+          </p:cNvSpPr>
+          <p:nvPr/>
+        </p:nvSpPr>
+        <p:spPr>
+          <a:xfrm>
             <a:off x="27764232" y="17263872"/>
             <a:ext cx="12350496" cy="320040"/>
           </a:xfrm>
-          <a:prstGeom xmlns:a="http://schemas.openxmlformats.org/drawingml/2006/main" prst="rect">
-            <a:avLst/>
-          </a:prstGeom>
-          <a:noFill xmlns:a="http://schemas.openxmlformats.org/drawingml/2006/main"/>
-        </p:spPr>
-        <p:txBody>
-          <a:bodyPr xmlns:a="http://schemas.openxmlformats.org/drawingml/2006/main" wrap="square" lIns="0" tIns="0" rIns="0" bIns="0" anchor="t">
+          <a:prstGeom prst="rect">
+            <a:avLst/>
+          </a:prstGeom>
+          <a:noFill/>
+        </p:spPr>
+        <p:txBody>
+          <a:bodyPr wrap="square" lIns="0" tIns="0" rIns="0" bIns="0" anchor="t">
             <a:normAutofit lnSpcReduction="10000"/>
           </a:bodyPr>
-          <a:lstStyle xmlns:a="http://schemas.openxmlformats.org/drawingml/2006/main"/>
-          <a:p xmlns:a="http://schemas.openxmlformats.org/drawingml/2006/main">
-            <a:pPr marL="0" indent="0" algn="l">
-              <a:buNone/>
-            </a:pPr>
-            <a:r>
-              <a:rPr sz="2200" b="1">
+          <a:lstStyle/>
+          <a:p>
+            <a:r>
+              <a:rPr lang="en-US" sz="2200" b="1" dirty="0">
                 <a:solidFill>
                   <a:srgbClr val="D39C2D"/>
                 </a:solidFill>
@@ -2662,7 +2173,39 @@
                 <a:ea typeface="Aptos"/>
                 <a:cs typeface="Aptos"/>
               </a:rPr>
-              <a:t>Survey–EHR comparison</a:t>
+              <a:t>Basic</a:t>
+            </a:r>
+            <a:r>
+              <a:rPr lang="en-US" altLang="zh-CN" sz="2200" b="1" dirty="0">
+                <a:solidFill>
+                  <a:srgbClr val="D39C2D"/>
+                </a:solidFill>
+                <a:ea typeface="Aptos"/>
+                <a:cs typeface="Aptos"/>
+              </a:rPr>
+              <a:t>–</a:t>
+            </a:r>
+            <a:r>
+              <a:rPr lang="en-US" sz="2200" b="1" dirty="0">
+                <a:solidFill>
+                  <a:srgbClr val="D39C2D"/>
+                </a:solidFill>
+                <a:latin typeface="Aptos"/>
+                <a:ea typeface="Aptos"/>
+                <a:cs typeface="Aptos"/>
+              </a:rPr>
+              <a:t>Expanded Adjustment Model </a:t>
+            </a:r>
+            <a:r>
+              <a:rPr sz="2200" b="1" dirty="0">
+                <a:solidFill>
+                  <a:srgbClr val="D39C2D"/>
+                </a:solidFill>
+                <a:latin typeface="Aptos"/>
+                <a:ea typeface="Aptos"/>
+                <a:cs typeface="Aptos"/>
+              </a:rPr>
+              <a:t>comparison</a:t>
             </a:r>
           </a:p>
         </p:txBody>
@@ -2670,37 +2213,37 @@
       <p:sp>
         <p:nvSpPr>
           <p:cNvPr id="90" name="Shape 88">
-            <a:extLst xmlns:a="http://schemas.openxmlformats.org/drawingml/2006/main">
+            <a:extLst>
               <a:ext uri="{FF2B5EF4-FFF2-40B4-BE49-F238E27FC236}">
                 <a16:creationId xmlns:a16="http://schemas.microsoft.com/office/drawing/2014/main" id="{31982090-7DEA-4768-B514-D5C533A25ED9}"/>
               </a:ext>
             </a:extLst>
           </p:cNvPr>
           <p:cNvSpPr>
-            <a:spLocks xmlns:a="http://schemas.openxmlformats.org/drawingml/2006/main" noGrp="1"/>
-          </p:cNvSpPr>
-          <p:nvPr/>
-        </p:nvSpPr>
-        <p:spPr>
-          <a:xfrm xmlns:a="http://schemas.openxmlformats.org/drawingml/2006/main">
+            <a:spLocks noGrp="1"/>
+          </p:cNvSpPr>
+          <p:nvPr/>
+        </p:nvSpPr>
+        <p:spPr>
+          <a:xfrm>
             <a:off x="27508200" y="25054560"/>
             <a:ext cx="12862560" cy="5363370"/>
           </a:xfrm>
-          <a:prstGeom xmlns:a="http://schemas.openxmlformats.org/drawingml/2006/main" prst="roundRect">
+          <a:prstGeom prst="roundRect">
             <a:avLst>
               <a:gd name="adj" fmla="val 3571"/>
             </a:avLst>
           </a:prstGeom>
-          <a:solidFill xmlns:a="http://schemas.openxmlformats.org/drawingml/2006/main">
+          <a:solidFill>
             <a:srgbClr val="FFFFFF"/>
           </a:solidFill>
-          <a:ln xmlns:a="http://schemas.openxmlformats.org/drawingml/2006/main" w="12700">
+          <a:ln w="12700">
             <a:solidFill>
               <a:srgbClr val="CAD2D9"/>
             </a:solidFill>
             <a:prstDash val="solid"/>
           </a:ln>
-          <a:effectLst xmlns:a="http://schemas.openxmlformats.org/drawingml/2006/main">
+          <a:effectLst>
             <a:outerShdw blurRad="12700" dist="50800" dir="2700000" algn="bl" rotWithShape="0">
               <a:srgbClr val="B9C1CA">
                 <a:alpha val="12000"/>
@@ -2709,41 +2252,43 @@
           </a:effectLst>
         </p:spPr>
         <p:txBody>
-          <a:bodyPr xmlns:a="http://schemas.openxmlformats.org/drawingml/2006/main"/>
-          <a:lstStyle xmlns:a="http://schemas.openxmlformats.org/drawingml/2006/main"/>
-          <a:p xmlns:a="http://schemas.openxmlformats.org/drawingml/2006/main"/>
+          <a:bodyPr/>
+          <a:lstStyle/>
+          <a:p>
+            <a:endParaRPr/>
+          </a:p>
         </p:txBody>
       </p:sp>
       <p:sp>
         <p:nvSpPr>
           <p:cNvPr id="91" name="Text 89">
-            <a:extLst xmlns:a="http://schemas.openxmlformats.org/drawingml/2006/main">
+            <a:extLst>
               <a:ext uri="{FF2B5EF4-FFF2-40B4-BE49-F238E27FC236}">
                 <a16:creationId xmlns:a16="http://schemas.microsoft.com/office/drawing/2014/main" id="{53EDD840-A5B5-432C-9797-E0C9EDEDDB43}"/>
               </a:ext>
             </a:extLst>
           </p:cNvPr>
           <p:cNvSpPr>
-            <a:spLocks xmlns:a="http://schemas.openxmlformats.org/drawingml/2006/main" noGrp="1"/>
-          </p:cNvSpPr>
-          <p:nvPr/>
-        </p:nvSpPr>
-        <p:spPr>
-          <a:xfrm xmlns:a="http://schemas.openxmlformats.org/drawingml/2006/main">
+            <a:spLocks noGrp="1"/>
+          </p:cNvSpPr>
+          <p:nvPr/>
+        </p:nvSpPr>
+        <p:spPr>
+          <a:xfrm>
             <a:off x="27764232" y="25219152"/>
             <a:ext cx="12350496" cy="320040"/>
           </a:xfrm>
-          <a:prstGeom xmlns:a="http://schemas.openxmlformats.org/drawingml/2006/main" prst="rect">
-            <a:avLst/>
-          </a:prstGeom>
-          <a:noFill xmlns:a="http://schemas.openxmlformats.org/drawingml/2006/main"/>
-        </p:spPr>
-        <p:txBody>
-          <a:bodyPr xmlns:a="http://schemas.openxmlformats.org/drawingml/2006/main" wrap="square" lIns="0" tIns="0" rIns="0" bIns="0" anchor="t">
+          <a:prstGeom prst="rect">
+            <a:avLst/>
+          </a:prstGeom>
+          <a:noFill/>
+        </p:spPr>
+        <p:txBody>
+          <a:bodyPr wrap="square" lIns="0" tIns="0" rIns="0" bIns="0" anchor="t">
             <a:normAutofit lnSpcReduction="10000"/>
           </a:bodyPr>
-          <a:lstStyle xmlns:a="http://schemas.openxmlformats.org/drawingml/2006/main"/>
-          <a:p xmlns:a="http://schemas.openxmlformats.org/drawingml/2006/main">
+          <a:lstStyle/>
+          <a:p>
             <a:pPr marL="0" indent="0" algn="l">
               <a:buNone/>
             </a:pPr>
@@ -2764,33 +2309,33 @@
       <p:sp>
         <p:nvSpPr>
           <p:cNvPr id="92" name="Text 90">
-            <a:extLst xmlns:a="http://schemas.openxmlformats.org/drawingml/2006/main">
+            <a:extLst>
               <a:ext uri="{FF2B5EF4-FFF2-40B4-BE49-F238E27FC236}">
                 <a16:creationId xmlns:a16="http://schemas.microsoft.com/office/drawing/2014/main" id="{A3F33324-1F5D-43C7-AFA7-C581BF002E08}"/>
               </a:ext>
             </a:extLst>
           </p:cNvPr>
           <p:cNvSpPr>
-            <a:spLocks xmlns:a="http://schemas.openxmlformats.org/drawingml/2006/main" noGrp="1"/>
-          </p:cNvSpPr>
-          <p:nvPr/>
-        </p:nvSpPr>
-        <p:spPr>
-          <a:xfrm xmlns:a="http://schemas.openxmlformats.org/drawingml/2006/main">
+            <a:spLocks noGrp="1"/>
+          </p:cNvSpPr>
+          <p:nvPr/>
+        </p:nvSpPr>
+        <p:spPr>
+          <a:xfrm>
             <a:off x="27919680" y="25648920"/>
             <a:ext cx="12039600" cy="4480560"/>
           </a:xfrm>
-          <a:prstGeom xmlns:a="http://schemas.openxmlformats.org/drawingml/2006/main" prst="rect">
-            <a:avLst/>
-          </a:prstGeom>
-          <a:noFill xmlns:a="http://schemas.openxmlformats.org/drawingml/2006/main"/>
-        </p:spPr>
-        <p:txBody>
-          <a:bodyPr xmlns:a="http://schemas.openxmlformats.org/drawingml/2006/main" wrap="square" lIns="762" tIns="762" rIns="762" bIns="762" anchor="t">
+          <a:prstGeom prst="rect">
+            <a:avLst/>
+          </a:prstGeom>
+          <a:noFill/>
+        </p:spPr>
+        <p:txBody>
+          <a:bodyPr wrap="square" lIns="762" tIns="762" rIns="762" bIns="762" anchor="t">
             <a:noAutofit/>
           </a:bodyPr>
-          <a:lstStyle xmlns:a="http://schemas.openxmlformats.org/drawingml/2006/main"/>
-          <a:p xmlns:a="http://schemas.openxmlformats.org/drawingml/2006/main">
+          <a:lstStyle/>
+          <a:p>
             <a:pPr marL="342900" indent="-342900">
               <a:lnSpc>
                 <a:spcPct val="160000"/>
@@ -2809,7 +2354,7 @@
               <a:t>AUD-associated conditions clustered around three major clinical domains: substance use, mental health, and liver/pancreatic disease.</a:t>
             </a:r>
           </a:p>
-          <a:p xmlns:a="http://schemas.openxmlformats.org/drawingml/2006/main">
+          <a:p>
             <a:pPr marL="342900" indent="-342900">
               <a:lnSpc>
                 <a:spcPct val="160000"/>
@@ -2828,7 +2373,7 @@
               <a:t>Similar clinical themes appeared in both survey-reported and EHR-derived analyses, supporting a consistent AUD-related comorbidity pattern across data sources.</a:t>
             </a:r>
           </a:p>
-          <a:p xmlns:a="http://schemas.openxmlformats.org/drawingml/2006/main">
+          <a:p>
             <a:pPr marL="342900" indent="-342900">
               <a:lnSpc>
                 <a:spcPct val="160000"/>
@@ -2847,7 +2392,7 @@
               <a:t>Survey and EHR data were not interchangeable: survey data captured participant-reported disease history, while EHR data reflected clinically documented diagnoses.</a:t>
             </a:r>
           </a:p>
-          <a:p xmlns:a="http://schemas.openxmlformats.org/drawingml/2006/main">
+          <a:p>
             <a:pPr marL="342900" indent="-342900">
               <a:lnSpc>
                 <a:spcPct val="160000"/>
@@ -2866,7 +2411,7 @@
               <a:t>Expanded covariate adjustment helped account for demographic, behavioral, socioeconomic, and family-history factors, making the observed associations more conservative and interpretable.</a:t>
             </a:r>
           </a:p>
-          <a:p xmlns:a="http://schemas.openxmlformats.org/drawingml/2006/main">
+          <a:p>
             <a:pPr marL="342900" indent="-342900">
               <a:lnSpc>
                 <a:spcPct val="160000"/>
@@ -2890,29 +2435,29 @@
       <p:sp>
         <p:nvSpPr>
           <p:cNvPr id="94" name="Shape 92">
-            <a:extLst xmlns:a="http://schemas.openxmlformats.org/drawingml/2006/main">
+            <a:extLst>
               <a:ext uri="{FF2B5EF4-FFF2-40B4-BE49-F238E27FC236}">
                 <a16:creationId xmlns:a16="http://schemas.microsoft.com/office/drawing/2014/main" id="{B5A467DD-77FC-4F3B-9695-7556568168F4}"/>
               </a:ext>
             </a:extLst>
           </p:cNvPr>
           <p:cNvSpPr>
-            <a:spLocks xmlns:a="http://schemas.openxmlformats.org/drawingml/2006/main" noGrp="1"/>
-          </p:cNvSpPr>
-          <p:nvPr/>
-        </p:nvSpPr>
-        <p:spPr>
-          <a:xfrm xmlns:a="http://schemas.openxmlformats.org/drawingml/2006/main">
+            <a:spLocks noGrp="1"/>
+          </p:cNvSpPr>
+          <p:nvPr/>
+        </p:nvSpPr>
+        <p:spPr>
+          <a:xfrm>
             <a:off x="-6135" y="30890052"/>
             <a:ext cx="41148000" cy="2055906"/>
           </a:xfrm>
-          <a:prstGeom xmlns:a="http://schemas.openxmlformats.org/drawingml/2006/main" prst="rect">
-            <a:avLst/>
-          </a:prstGeom>
-          <a:solidFill xmlns:a="http://schemas.openxmlformats.org/drawingml/2006/main">
+          <a:prstGeom prst="rect">
+            <a:avLst/>
+          </a:prstGeom>
+          <a:solidFill>
             <a:srgbClr val="E8EDF2"/>
           </a:solidFill>
-          <a:ln xmlns:a="http://schemas.openxmlformats.org/drawingml/2006/main" w="12700">
+          <a:ln w="12700">
             <a:solidFill>
               <a:srgbClr val="E8EDF2"/>
             </a:solidFill>
@@ -2920,41 +2465,43 @@
           </a:ln>
         </p:spPr>
         <p:txBody>
-          <a:bodyPr xmlns:a="http://schemas.openxmlformats.org/drawingml/2006/main"/>
-          <a:lstStyle xmlns:a="http://schemas.openxmlformats.org/drawingml/2006/main"/>
-          <a:p xmlns:a="http://schemas.openxmlformats.org/drawingml/2006/main"/>
+          <a:bodyPr/>
+          <a:lstStyle/>
+          <a:p>
+            <a:endParaRPr/>
+          </a:p>
         </p:txBody>
       </p:sp>
       <p:sp>
         <p:nvSpPr>
           <p:cNvPr id="95" name="Text 93">
-            <a:extLst xmlns:a="http://schemas.openxmlformats.org/drawingml/2006/main">
+            <a:extLst>
               <a:ext uri="{FF2B5EF4-FFF2-40B4-BE49-F238E27FC236}">
                 <a16:creationId xmlns:a16="http://schemas.microsoft.com/office/drawing/2014/main" id="{C415E943-8BB4-4DEA-B928-C463DF61D9C7}"/>
               </a:ext>
             </a:extLst>
           </p:cNvPr>
           <p:cNvSpPr>
-            <a:spLocks xmlns:a="http://schemas.openxmlformats.org/drawingml/2006/main" noGrp="1"/>
-          </p:cNvSpPr>
-          <p:nvPr/>
-        </p:nvSpPr>
-        <p:spPr>
-          <a:xfrm xmlns:a="http://schemas.openxmlformats.org/drawingml/2006/main">
+            <a:spLocks noGrp="1"/>
+          </p:cNvSpPr>
+          <p:nvPr/>
+        </p:nvSpPr>
+        <p:spPr>
+          <a:xfrm>
             <a:off x="868680" y="31222603"/>
             <a:ext cx="6400800" cy="320040"/>
           </a:xfrm>
-          <a:prstGeom xmlns:a="http://schemas.openxmlformats.org/drawingml/2006/main" prst="rect">
-            <a:avLst/>
-          </a:prstGeom>
-          <a:noFill xmlns:a="http://schemas.openxmlformats.org/drawingml/2006/main"/>
-        </p:spPr>
-        <p:txBody>
-          <a:bodyPr xmlns:a="http://schemas.openxmlformats.org/drawingml/2006/main" wrap="square" lIns="0" tIns="0" rIns="0" bIns="0" anchor="t">
+          <a:prstGeom prst="rect">
+            <a:avLst/>
+          </a:prstGeom>
+          <a:noFill/>
+        </p:spPr>
+        <p:txBody>
+          <a:bodyPr wrap="square" lIns="0" tIns="0" rIns="0" bIns="0" anchor="t">
             <a:normAutofit/>
           </a:bodyPr>
-          <a:lstStyle xmlns:a="http://schemas.openxmlformats.org/drawingml/2006/main"/>
-          <a:p xmlns:a="http://schemas.openxmlformats.org/drawingml/2006/main">
+          <a:lstStyle/>
+          <a:p>
             <a:pPr marL="0" indent="0" algn="l">
               <a:buNone/>
             </a:pPr>
@@ -2975,33 +2522,33 @@
       <p:sp>
         <p:nvSpPr>
           <p:cNvPr id="96" name="Text 94">
-            <a:extLst xmlns:a="http://schemas.openxmlformats.org/drawingml/2006/main">
+            <a:extLst>
               <a:ext uri="{FF2B5EF4-FFF2-40B4-BE49-F238E27FC236}">
                 <a16:creationId xmlns:a16="http://schemas.microsoft.com/office/drawing/2014/main" id="{F1230E12-12A6-45CF-A6DC-36993BAB8907}"/>
               </a:ext>
             </a:extLst>
           </p:cNvPr>
           <p:cNvSpPr>
-            <a:spLocks xmlns:a="http://schemas.openxmlformats.org/drawingml/2006/main" noGrp="1"/>
-          </p:cNvSpPr>
-          <p:nvPr/>
-        </p:nvSpPr>
-        <p:spPr>
-          <a:xfrm xmlns:a="http://schemas.openxmlformats.org/drawingml/2006/main">
+            <a:spLocks noGrp="1"/>
+          </p:cNvSpPr>
+          <p:nvPr/>
+        </p:nvSpPr>
+        <p:spPr>
+          <a:xfrm>
             <a:off x="868680" y="31679803"/>
             <a:ext cx="9646920" cy="640080"/>
           </a:xfrm>
-          <a:prstGeom xmlns:a="http://schemas.openxmlformats.org/drawingml/2006/main" prst="rect">
-            <a:avLst/>
-          </a:prstGeom>
-          <a:noFill xmlns:a="http://schemas.openxmlformats.org/drawingml/2006/main"/>
-        </p:spPr>
-        <p:txBody>
-          <a:bodyPr xmlns:a="http://schemas.openxmlformats.org/drawingml/2006/main" wrap="square" lIns="0" tIns="0" rIns="0" bIns="0" anchor="t">
+          <a:prstGeom prst="rect">
+            <a:avLst/>
+          </a:prstGeom>
+          <a:noFill/>
+        </p:spPr>
+        <p:txBody>
+          <a:bodyPr wrap="square" lIns="0" tIns="0" rIns="0" bIns="0" anchor="t">
             <a:normAutofit/>
           </a:bodyPr>
-          <a:lstStyle xmlns:a="http://schemas.openxmlformats.org/drawingml/2006/main"/>
-          <a:p xmlns:a="http://schemas.openxmlformats.org/drawingml/2006/main">
+          <a:lstStyle/>
+          <a:p>
             <a:r>
               <a:t>Funded by grants from National Institute on Alcoholism and Alcohol Abuse (NIAAA) T32 AA007456, and National Institute of Drug Abuse (NIDA) grants DP1 DA054373.</a:t>
             </a:r>
@@ -3010,88 +2557,38 @@
       </p:sp>
       <p:sp>
         <p:nvSpPr>
-          <p:cNvPr id="99" name="Shape 97">
-            <a:extLst xmlns:a="http://schemas.openxmlformats.org/drawingml/2006/main">
-              <a:ext uri="{FF2B5EF4-FFF2-40B4-BE49-F238E27FC236}">
-                <a16:creationId xmlns:a16="http://schemas.microsoft.com/office/drawing/2014/main" id="{62F1D747-F759-48EF-979D-8537212256A6}"/>
-              </a:ext>
-            </a:extLst>
-          </p:cNvPr>
-          <p:cNvSpPr>
-            <a:spLocks xmlns:a="http://schemas.openxmlformats.org/drawingml/2006/main" noGrp="1"/>
-          </p:cNvSpPr>
-          <p:nvPr/>
-        </p:nvSpPr>
-        <p:spPr>
-          <a:xfrm xmlns:a="http://schemas.openxmlformats.org/drawingml/2006/main">
-            <a:off x="33793895" y="31063788"/>
-            <a:ext cx="1920240" cy="1920240"/>
-          </a:xfrm>
-          <a:prstGeom xmlns:a="http://schemas.openxmlformats.org/drawingml/2006/main" prst="roundRect">
-            <a:avLst>
-              <a:gd name="adj" fmla="val 3810"/>
-            </a:avLst>
-          </a:prstGeom>
-          <a:solidFill xmlns:a="http://schemas.openxmlformats.org/drawingml/2006/main">
-            <a:srgbClr val="FFFFFF"/>
-          </a:solidFill>
-          <a:ln xmlns:a="http://schemas.openxmlformats.org/drawingml/2006/main" w="12700">
-            <a:solidFill>
-              <a:srgbClr val="CAD2D9"/>
-            </a:solidFill>
-            <a:prstDash val="solid"/>
-          </a:ln>
-        </p:spPr>
-        <p:txBody>
-          <a:bodyPr xmlns:a="http://schemas.openxmlformats.org/drawingml/2006/main"/>
-          <a:lstStyle xmlns:a="http://schemas.openxmlformats.org/drawingml/2006/main"/>
-          <a:p xmlns:a="http://schemas.openxmlformats.org/drawingml/2006/main"/>
-        </p:txBody>
-      </p:sp>
-      <p:sp>
-        <p:nvSpPr>
           <p:cNvPr id="100" name="Text 98">
-            <a:extLst xmlns:a="http://schemas.openxmlformats.org/drawingml/2006/main">
+            <a:extLst>
               <a:ext uri="{FF2B5EF4-FFF2-40B4-BE49-F238E27FC236}">
                 <a16:creationId xmlns:a16="http://schemas.microsoft.com/office/drawing/2014/main" id="{3A632BAF-3408-4111-8282-49379F2300A8}"/>
               </a:ext>
             </a:extLst>
           </p:cNvPr>
           <p:cNvSpPr>
-            <a:spLocks xmlns:a="http://schemas.openxmlformats.org/drawingml/2006/main" noGrp="1"/>
-          </p:cNvSpPr>
-          <p:nvPr/>
-        </p:nvSpPr>
-        <p:spPr>
-          <a:xfrm xmlns:a="http://schemas.openxmlformats.org/drawingml/2006/main">
+            <a:spLocks noGrp="1"/>
+          </p:cNvSpPr>
+          <p:nvPr/>
+        </p:nvSpPr>
+        <p:spPr>
+          <a:xfrm>
             <a:off x="33741360" y="31890115"/>
             <a:ext cx="1920240" cy="411480"/>
           </a:xfrm>
-          <a:prstGeom xmlns:a="http://schemas.openxmlformats.org/drawingml/2006/main" prst="rect">
-            <a:avLst/>
-          </a:prstGeom>
-          <a:noFill xmlns:a="http://schemas.openxmlformats.org/drawingml/2006/main"/>
-        </p:spPr>
-        <p:txBody>
-          <a:bodyPr xmlns:a="http://schemas.openxmlformats.org/drawingml/2006/main" wrap="square" lIns="0" tIns="0" rIns="0" bIns="0" anchor="t">
+          <a:prstGeom prst="rect">
+            <a:avLst/>
+          </a:prstGeom>
+          <a:noFill/>
+        </p:spPr>
+        <p:txBody>
+          <a:bodyPr wrap="square" lIns="0" tIns="0" rIns="0" bIns="0" anchor="t">
             <a:normAutofit/>
           </a:bodyPr>
-          <a:lstStyle xmlns:a="http://schemas.openxmlformats.org/drawingml/2006/main"/>
-          <a:p xmlns:a="http://schemas.openxmlformats.org/drawingml/2006/main">
+          <a:lstStyle/>
+          <a:p>
             <a:pPr marL="0" indent="0" algn="ctr">
               <a:buNone/>
             </a:pPr>
-            <a:r>
-              <a:rPr sz="2600" b="1">
-                <a:solidFill>
-                  <a:srgbClr val="5B6773"/>
-                </a:solidFill>
-                <a:latin typeface="Aptos"/>
-                <a:ea typeface="Aptos"/>
-                <a:cs typeface="Aptos"/>
-              </a:rPr>
-              <a:t/>
-            </a:r>
+            <a:endParaRPr/>
           </a:p>
         </p:txBody>
       </p:sp>
@@ -3099,28 +2596,28 @@
         <p:nvPicPr>
           <p:cNvPr id="177" name="图形 106"/>
           <p:cNvPicPr>
-            <a:picLocks xmlns:a="http://schemas.openxmlformats.org/drawingml/2006/main" noChangeAspect="1"/>
+            <a:picLocks noChangeAspect="1"/>
           </p:cNvPicPr>
           <p:nvPr/>
         </p:nvPicPr>
         <p:blipFill>
-          <a:blip xmlns:r="http://schemas.openxmlformats.org/officeDocument/2006/relationships" xmlns:a="http://schemas.openxmlformats.org/drawingml/2006/main" r:embed="R211cbdcabde24468">
+          <a:blip>
             <a:extLst>
               <a:ext uri="{96DAC541-7B7A-43D3-8B79-37D633B846F1}">
-                <asvg:svgBlip xmlns:asvg="http://schemas.microsoft.com/office/drawing/2016/SVG/main" r:embed="R09716ef2324340fc"/>
+                <asvg:svgBlip xmlns:asvg="http://schemas.microsoft.com/office/drawing/2016/SVG/main" r:embed="rId3"/>
               </a:ext>
             </a:extLst>
           </a:blip>
-          <a:stretch xmlns:a="http://schemas.openxmlformats.org/drawingml/2006/main">
-            <a:fillRect l="0" t="0" r="0" b="0"/>
+          <a:stretch>
+            <a:fillRect/>
           </a:stretch>
         </p:blipFill>
         <p:spPr>
-          <a:xfrm xmlns:a="http://schemas.openxmlformats.org/drawingml/2006/main">
+          <a:xfrm>
             <a:off x="32274163" y="929408"/>
             <a:ext cx="4657701" cy="886413"/>
           </a:xfrm>
-          <a:prstGeom xmlns:a="http://schemas.openxmlformats.org/drawingml/2006/main" prst="rect">
+          <a:prstGeom prst="rect">
             <a:avLst/>
           </a:prstGeom>
         </p:spPr>
@@ -3129,86 +2626,62 @@
         <p:nvPicPr>
           <p:cNvPr id="178" name="图形 110"/>
           <p:cNvPicPr>
-            <a:picLocks xmlns:a="http://schemas.openxmlformats.org/drawingml/2006/main" noChangeAspect="1"/>
+            <a:picLocks noChangeAspect="1"/>
           </p:cNvPicPr>
           <p:nvPr/>
         </p:nvPicPr>
         <p:blipFill>
-          <a:blip xmlns:r="http://schemas.openxmlformats.org/officeDocument/2006/relationships" xmlns:a="http://schemas.openxmlformats.org/drawingml/2006/main" r:embed="Rd03bcfe246fb433b">
+          <a:blip>
             <a:extLst>
               <a:ext uri="{96DAC541-7B7A-43D3-8B79-37D633B846F1}">
-                <asvg:svgBlip xmlns:asvg="http://schemas.microsoft.com/office/drawing/2016/SVG/main" r:embed="R0147d911ca474222"/>
+                <asvg:svgBlip xmlns:asvg="http://schemas.microsoft.com/office/drawing/2016/SVG/main" r:embed="rId4"/>
               </a:ext>
             </a:extLst>
           </a:blip>
-          <a:stretch xmlns:a="http://schemas.openxmlformats.org/drawingml/2006/main">
-            <a:fillRect l="0" t="0" r="0" b="0"/>
+          <a:stretch>
+            <a:fillRect/>
           </a:stretch>
         </p:blipFill>
         <p:spPr>
-          <a:xfrm xmlns:a="http://schemas.openxmlformats.org/drawingml/2006/main">
+          <a:xfrm>
             <a:off x="32274163" y="2392930"/>
             <a:ext cx="6098588" cy="744456"/>
           </a:xfrm>
-          <a:prstGeom xmlns:a="http://schemas.openxmlformats.org/drawingml/2006/main" prst="rect">
+          <a:prstGeom prst="rect">
             <a:avLst/>
           </a:prstGeom>
         </p:spPr>
       </p:pic>
-      <p:pic>
-        <p:nvPicPr>
-          <p:cNvPr id="179" name="图片 112"/>
-          <p:cNvPicPr>
-            <a:picLocks xmlns:a="http://schemas.openxmlformats.org/drawingml/2006/main" noChangeAspect="1"/>
-          </p:cNvPicPr>
-          <p:nvPr/>
-        </p:nvPicPr>
-        <p:blipFill>
-          <a:blip xmlns:r="http://schemas.openxmlformats.org/officeDocument/2006/relationships" xmlns:a="http://schemas.openxmlformats.org/drawingml/2006/main" r:embed="R7d3524e597d54110"/>
-          <a:stretch xmlns:a="http://schemas.openxmlformats.org/drawingml/2006/main">
-            <a:fillRect l="0" t="0" r="0" b="0"/>
-          </a:stretch>
-        </p:blipFill>
-        <p:spPr>
-          <a:xfrm xmlns:a="http://schemas.openxmlformats.org/drawingml/2006/main">
-            <a:off x="1242694" y="15899796"/>
-            <a:ext cx="12023091" cy="5710899"/>
-          </a:xfrm>
-          <a:prstGeom xmlns:a="http://schemas.openxmlformats.org/drawingml/2006/main" prst="rect">
-            <a:avLst/>
-          </a:prstGeom>
-        </p:spPr>
-      </p:pic>
       <p:sp>
         <p:nvSpPr>
           <p:cNvPr id="114" name="Text 27">
-            <a:extLst xmlns:a="http://schemas.openxmlformats.org/drawingml/2006/main">
+            <a:extLst>
               <a:ext uri="{FF2B5EF4-FFF2-40B4-BE49-F238E27FC236}">
                 <a16:creationId xmlns:a16="http://schemas.microsoft.com/office/drawing/2014/main" id="{AC2859A2-F6F9-A8B3-950E-BAC9C97C6E08}"/>
               </a:ext>
             </a:extLst>
           </p:cNvPr>
           <p:cNvSpPr>
-            <a:spLocks xmlns:a="http://schemas.openxmlformats.org/drawingml/2006/main" noGrp="1"/>
-          </p:cNvSpPr>
-          <p:nvPr/>
-        </p:nvSpPr>
-        <p:spPr>
-          <a:xfrm xmlns:a="http://schemas.openxmlformats.org/drawingml/2006/main">
+            <a:spLocks noGrp="1"/>
+          </p:cNvSpPr>
+          <p:nvPr/>
+        </p:nvSpPr>
+        <p:spPr>
+          <a:xfrm>
             <a:off x="1097280" y="23873132"/>
             <a:ext cx="11856720" cy="5879592"/>
           </a:xfrm>
-          <a:prstGeom xmlns:a="http://schemas.openxmlformats.org/drawingml/2006/main" prst="rect">
-            <a:avLst/>
-          </a:prstGeom>
-          <a:noFill xmlns:a="http://schemas.openxmlformats.org/drawingml/2006/main"/>
-        </p:spPr>
-        <p:txBody>
-          <a:bodyPr xmlns:a="http://schemas.openxmlformats.org/drawingml/2006/main" wrap="square" lIns="762" tIns="762" rIns="762" bIns="762" anchor="t">
+          <a:prstGeom prst="rect">
+            <a:avLst/>
+          </a:prstGeom>
+          <a:noFill/>
+        </p:spPr>
+        <p:txBody>
+          <a:bodyPr wrap="square" lIns="762" tIns="762" rIns="762" bIns="762" anchor="t">
             <a:normAutofit/>
           </a:bodyPr>
-          <a:lstStyle xmlns:a="http://schemas.openxmlformats.org/drawingml/2006/main"/>
-          <a:p xmlns:a="http://schemas.openxmlformats.org/drawingml/2006/main">
+          <a:lstStyle/>
+          <a:p>
             <a:pPr marL="285750" indent="-285750">
               <a:buChar char="•"/>
             </a:pPr>
@@ -3220,7 +2693,7 @@
               <a:t> All of Us Research Program survey and electronic health record (EHR) data</a:t>
             </a:r>
           </a:p>
-          <a:p xmlns:a="http://schemas.openxmlformats.org/drawingml/2006/main">
+          <a:p>
             <a:pPr marL="285750" indent="-285750">
               <a:buChar char="•"/>
             </a:pPr>
@@ -3229,7 +2702,7 @@
               <a:t>AUD outcome definitions:</a:t>
             </a:r>
           </a:p>
-          <a:p xmlns:a="http://schemas.openxmlformats.org/drawingml/2006/main">
+          <a:p>
             <a:pPr marL="742950" indent="-285750">
               <a:buChar char="•"/>
             </a:pPr>
@@ -3237,7 +2710,7 @@
               <a:t>Survey AUD: defined from the Personal and Family Health History survey</a:t>
             </a:r>
           </a:p>
-          <a:p xmlns:a="http://schemas.openxmlformats.org/drawingml/2006/main">
+          <a:p>
             <a:pPr marL="742950" indent="-285750">
               <a:buChar char="•"/>
             </a:pPr>
@@ -3245,7 +2718,7 @@
               <a:t>EHR AUD: defined from clinical diagnosis records</a:t>
             </a:r>
           </a:p>
-          <a:p xmlns:a="http://schemas.openxmlformats.org/drawingml/2006/main">
+          <a:p>
             <a:pPr marL="285750" indent="-285750">
               <a:buChar char="•"/>
             </a:pPr>
@@ -3254,7 +2727,7 @@
               <a:t>Candidate condition screens:</a:t>
             </a:r>
           </a:p>
-          <a:p xmlns:a="http://schemas.openxmlformats.org/drawingml/2006/main">
+          <a:p>
             <a:pPr marL="742950" indent="-285750">
               <a:buChar char="•"/>
             </a:pPr>
@@ -3262,7 +2735,7 @@
               <a:t>Survey screen: ~150 survey-reported diseases/conditions</a:t>
             </a:r>
           </a:p>
-          <a:p xmlns:a="http://schemas.openxmlformats.org/drawingml/2006/main">
+          <a:p>
             <a:pPr marL="742950" indent="-285750">
               <a:buChar char="•"/>
             </a:pPr>
@@ -3270,7 +2743,7 @@
               <a:t>EHR screen: top 1,000 most prevalent non-AUD EHR conditions</a:t>
             </a:r>
           </a:p>
-          <a:p xmlns:a="http://schemas.openxmlformats.org/drawingml/2006/main">
+          <a:p>
             <a:pPr marL="285750" indent="-285750">
               <a:buChar char="•"/>
             </a:pPr>
@@ -3279,7 +2752,7 @@
               <a:t>Modeling approach:</a:t>
             </a:r>
           </a:p>
-          <a:p xmlns:a="http://schemas.openxmlformats.org/drawingml/2006/main">
+          <a:p>
             <a:pPr marL="742950" indent="-285750">
               <a:buChar char="•"/>
             </a:pPr>
@@ -3287,7 +2760,7 @@
               <a:t>Tested each candidate condition one at a time</a:t>
             </a:r>
           </a:p>
-          <a:p xmlns:a="http://schemas.openxmlformats.org/drawingml/2006/main">
+          <a:p>
             <a:pPr marL="742950" indent="-285750">
               <a:buChar char="•"/>
             </a:pPr>
@@ -3295,7 +2768,7 @@
               <a:t>Used logistic regression to estimate each condition’s association with binary AUD status</a:t>
             </a:r>
           </a:p>
-          <a:p xmlns:a="http://schemas.openxmlformats.org/drawingml/2006/main">
+          <a:p>
             <a:pPr marL="742950" indent="-285750">
               <a:buChar char="•"/>
             </a:pPr>
@@ -3303,7 +2776,7 @@
               <a:t>Reported adjusted odds ratios and confidence intervals</a:t>
             </a:r>
           </a:p>
-          <a:p xmlns:a="http://schemas.openxmlformats.org/drawingml/2006/main">
+          <a:p>
             <a:pPr marL="285750" indent="-285750">
               <a:buChar char="•"/>
             </a:pPr>
@@ -3312,7 +2785,7 @@
               <a:t>Covariate adjustment:</a:t>
             </a:r>
           </a:p>
-          <a:p xmlns:a="http://schemas.openxmlformats.org/drawingml/2006/main">
+          <a:p>
             <a:pPr marL="742950" indent="-285750">
               <a:buChar char="•"/>
             </a:pPr>
@@ -3320,7 +2793,7 @@
               <a:t>Basic model: age, race/ethnicity, sex at birth, education</a:t>
             </a:r>
           </a:p>
-          <a:p xmlns:a="http://schemas.openxmlformats.org/drawingml/2006/main">
+          <a:p>
             <a:pPr marL="742950" indent="-285750">
               <a:buChar char="•"/>
             </a:pPr>
@@ -3328,7 +2801,7 @@
               <a:t>Expanded model: marital status, health insurance, employment, household income, smoking history, and AUD family history</a:t>
             </a:r>
           </a:p>
-          <a:p xmlns:a="http://schemas.openxmlformats.org/drawingml/2006/main">
+          <a:p>
             <a:pPr marL="742950" indent="-285750">
               <a:buChar char="•"/>
             </a:pPr>
@@ -3336,7 +2809,7 @@
               <a:t>Education was removed from the final expanded model after losing independent significance under richer adjustment</a:t>
             </a:r>
           </a:p>
-          <a:p xmlns:a="http://schemas.openxmlformats.org/drawingml/2006/main">
+          <a:p>
             <a:pPr marL="285750" indent="-285750">
               <a:buChar char="•"/>
             </a:pPr>
@@ -3345,7 +2818,7 @@
               <a:t>Survey–EHR comparison:</a:t>
             </a:r>
           </a:p>
-          <a:p xmlns:a="http://schemas.openxmlformats.org/drawingml/2006/main">
+          <a:p>
             <a:pPr marL="742950" indent="-285750">
               <a:buChar char="•"/>
             </a:pPr>
@@ -3353,7 +2826,7 @@
               <a:t>Matched similar condition names across survey and EHR sources using text similarity</a:t>
             </a:r>
           </a:p>
-          <a:p xmlns:a="http://schemas.openxmlformats.org/drawingml/2006/main">
+          <a:p>
             <a:pPr marL="742950" indent="-285750">
               <a:buChar char="•"/>
             </a:pPr>
@@ -3367,22 +2840,22 @@
         <p:nvPicPr>
           <p:cNvPr id="181" name="图片 117"/>
           <p:cNvPicPr>
-            <a:picLocks xmlns:a="http://schemas.openxmlformats.org/drawingml/2006/main" noChangeAspect="1"/>
+            <a:picLocks noChangeAspect="1"/>
           </p:cNvPicPr>
           <p:nvPr/>
         </p:nvPicPr>
         <p:blipFill>
-          <a:blip xmlns:r="http://schemas.openxmlformats.org/officeDocument/2006/relationships" xmlns:a="http://schemas.openxmlformats.org/drawingml/2006/main" r:embed="Ra1ed32e430274195"/>
-          <a:stretch xmlns:a="http://schemas.openxmlformats.org/drawingml/2006/main">
-            <a:fillRect l="0" t="0" r="0" b="0"/>
+          <a:blip r:embed="rId5"/>
+          <a:stretch>
+            <a:fillRect/>
           </a:stretch>
         </p:blipFill>
         <p:spPr>
-          <a:xfrm xmlns:a="http://schemas.openxmlformats.org/drawingml/2006/main">
+          <a:xfrm>
             <a:off x="15488575" y="6168458"/>
             <a:ext cx="10170850" cy="5724144"/>
           </a:xfrm>
-          <a:prstGeom xmlns:a="http://schemas.openxmlformats.org/drawingml/2006/main" prst="rect">
+          <a:prstGeom prst="rect">
             <a:avLst/>
           </a:prstGeom>
         </p:spPr>
@@ -3390,33 +2863,33 @@
       <p:sp>
         <p:nvSpPr>
           <p:cNvPr id="119" name="Text 63">
-            <a:extLst xmlns:a="http://schemas.openxmlformats.org/drawingml/2006/main">
+            <a:extLst>
               <a:ext uri="{FF2B5EF4-FFF2-40B4-BE49-F238E27FC236}">
                 <a16:creationId xmlns:a16="http://schemas.microsoft.com/office/drawing/2014/main" id="{B518396D-400A-4798-9F61-AF1D47B7F542}"/>
               </a:ext>
             </a:extLst>
           </p:cNvPr>
           <p:cNvSpPr>
-            <a:spLocks xmlns:a="http://schemas.openxmlformats.org/drawingml/2006/main" noGrp="1"/>
-          </p:cNvSpPr>
-          <p:nvPr/>
-        </p:nvSpPr>
-        <p:spPr>
-          <a:xfrm xmlns:a="http://schemas.openxmlformats.org/drawingml/2006/main">
+            <a:spLocks noGrp="1"/>
+          </p:cNvSpPr>
+          <p:nvPr/>
+        </p:nvSpPr>
+        <p:spPr>
+          <a:xfrm>
             <a:off x="14398752" y="5555810"/>
             <a:ext cx="12350496" cy="320040"/>
           </a:xfrm>
-          <a:prstGeom xmlns:a="http://schemas.openxmlformats.org/drawingml/2006/main" prst="rect">
-            <a:avLst/>
-          </a:prstGeom>
-          <a:noFill xmlns:a="http://schemas.openxmlformats.org/drawingml/2006/main"/>
-        </p:spPr>
-        <p:txBody>
-          <a:bodyPr xmlns:a="http://schemas.openxmlformats.org/drawingml/2006/main" wrap="square" lIns="0" tIns="0" rIns="0" bIns="0" anchor="t">
+          <a:prstGeom prst="rect">
+            <a:avLst/>
+          </a:prstGeom>
+          <a:noFill/>
+        </p:spPr>
+        <p:txBody>
+          <a:bodyPr wrap="square" lIns="0" tIns="0" rIns="0" bIns="0" anchor="t">
             <a:normAutofit lnSpcReduction="10000"/>
           </a:bodyPr>
-          <a:lstStyle xmlns:a="http://schemas.openxmlformats.org/drawingml/2006/main"/>
-          <a:p xmlns:a="http://schemas.openxmlformats.org/drawingml/2006/main">
+          <a:lstStyle/>
+          <a:p>
             <a:pPr marL="0" indent="0" algn="l">
               <a:buNone/>
             </a:pPr>
@@ -3438,22 +2911,22 @@
         <p:nvPicPr>
           <p:cNvPr id="183" name="图片 120"/>
           <p:cNvPicPr>
-            <a:picLocks xmlns:a="http://schemas.openxmlformats.org/drawingml/2006/main" noChangeAspect="1"/>
+            <a:picLocks noChangeAspect="1"/>
           </p:cNvPicPr>
           <p:nvPr/>
         </p:nvPicPr>
         <p:blipFill>
-          <a:blip xmlns:r="http://schemas.openxmlformats.org/officeDocument/2006/relationships" xmlns:a="http://schemas.openxmlformats.org/drawingml/2006/main" r:embed="Re6cd731a7e074837"/>
-          <a:stretch xmlns:a="http://schemas.openxmlformats.org/drawingml/2006/main">
-            <a:fillRect l="0" t="0" r="0" b="0"/>
+          <a:blip r:embed="rId6"/>
+          <a:stretch>
+            <a:fillRect/>
           </a:stretch>
         </p:blipFill>
         <p:spPr>
-          <a:xfrm xmlns:a="http://schemas.openxmlformats.org/drawingml/2006/main">
+          <a:xfrm>
             <a:off x="14900742" y="13352323"/>
             <a:ext cx="10980756" cy="6001219"/>
           </a:xfrm>
-          <a:prstGeom xmlns:a="http://schemas.openxmlformats.org/drawingml/2006/main" prst="rect">
+          <a:prstGeom prst="rect">
             <a:avLst/>
           </a:prstGeom>
         </p:spPr>
@@ -3461,29 +2934,29 @@
       <p:sp>
         <p:nvSpPr>
           <p:cNvPr id="122" name="Shape 75">
-            <a:extLst xmlns:a="http://schemas.openxmlformats.org/drawingml/2006/main">
+            <a:extLst>
               <a:ext uri="{FF2B5EF4-FFF2-40B4-BE49-F238E27FC236}">
                 <a16:creationId xmlns:a16="http://schemas.microsoft.com/office/drawing/2014/main" id="{902A062F-6F3C-0CE2-3EF6-29522645DB2E}"/>
               </a:ext>
             </a:extLst>
           </p:cNvPr>
           <p:cNvSpPr>
-            <a:spLocks xmlns:a="http://schemas.openxmlformats.org/drawingml/2006/main" noGrp="1"/>
-          </p:cNvSpPr>
-          <p:nvPr/>
-        </p:nvSpPr>
-        <p:spPr>
-          <a:xfrm xmlns:a="http://schemas.openxmlformats.org/drawingml/2006/main">
+            <a:spLocks noGrp="1"/>
+          </p:cNvSpPr>
+          <p:nvPr/>
+        </p:nvSpPr>
+        <p:spPr>
+          <a:xfrm>
             <a:off x="27508200" y="4714021"/>
             <a:ext cx="12862560" cy="502920"/>
           </a:xfrm>
-          <a:prstGeom xmlns:a="http://schemas.openxmlformats.org/drawingml/2006/main" prst="rect">
-            <a:avLst/>
-          </a:prstGeom>
-          <a:solidFill xmlns:a="http://schemas.openxmlformats.org/drawingml/2006/main">
+          <a:prstGeom prst="rect">
+            <a:avLst/>
+          </a:prstGeom>
+          <a:solidFill>
             <a:srgbClr val="D39C2D"/>
           </a:solidFill>
-          <a:ln xmlns:a="http://schemas.openxmlformats.org/drawingml/2006/main" w="12700">
+          <a:ln w="12700">
             <a:solidFill>
               <a:srgbClr val="D39C2D">
                 <a:alpha val="0"/>
@@ -3493,41 +2966,43 @@
           </a:ln>
         </p:spPr>
         <p:txBody>
-          <a:bodyPr xmlns:a="http://schemas.openxmlformats.org/drawingml/2006/main"/>
-          <a:lstStyle xmlns:a="http://schemas.openxmlformats.org/drawingml/2006/main"/>
-          <a:p xmlns:a="http://schemas.openxmlformats.org/drawingml/2006/main"/>
+          <a:bodyPr/>
+          <a:lstStyle/>
+          <a:p>
+            <a:endParaRPr/>
+          </a:p>
         </p:txBody>
       </p:sp>
       <p:sp>
         <p:nvSpPr>
           <p:cNvPr id="123" name="Text 76">
-            <a:extLst xmlns:a="http://schemas.openxmlformats.org/drawingml/2006/main">
+            <a:extLst>
               <a:ext uri="{FF2B5EF4-FFF2-40B4-BE49-F238E27FC236}">
                 <a16:creationId xmlns:a16="http://schemas.microsoft.com/office/drawing/2014/main" id="{BA464B5B-3B47-8DC9-1C33-1D1F81B157EE}"/>
               </a:ext>
             </a:extLst>
           </p:cNvPr>
           <p:cNvSpPr>
-            <a:spLocks xmlns:a="http://schemas.openxmlformats.org/drawingml/2006/main" noGrp="1"/>
-          </p:cNvSpPr>
-          <p:nvPr/>
-        </p:nvSpPr>
-        <p:spPr>
-          <a:xfrm xmlns:a="http://schemas.openxmlformats.org/drawingml/2006/main">
+            <a:spLocks noGrp="1"/>
+          </p:cNvSpPr>
+          <p:nvPr/>
+        </p:nvSpPr>
+        <p:spPr>
+          <a:xfrm>
             <a:off x="27709368" y="4778029"/>
             <a:ext cx="12460224" cy="384048"/>
           </a:xfrm>
-          <a:prstGeom xmlns:a="http://schemas.openxmlformats.org/drawingml/2006/main" prst="rect">
-            <a:avLst/>
-          </a:prstGeom>
-          <a:noFill xmlns:a="http://schemas.openxmlformats.org/drawingml/2006/main"/>
-        </p:spPr>
-        <p:txBody>
-          <a:bodyPr xmlns:a="http://schemas.openxmlformats.org/drawingml/2006/main" wrap="square" lIns="0" tIns="0" rIns="0" bIns="0" anchor="t">
+          <a:prstGeom prst="rect">
+            <a:avLst/>
+          </a:prstGeom>
+          <a:noFill/>
+        </p:spPr>
+        <p:txBody>
+          <a:bodyPr wrap="square" lIns="0" tIns="0" rIns="0" bIns="0" anchor="t">
             <a:normAutofit/>
           </a:bodyPr>
-          <a:lstStyle xmlns:a="http://schemas.openxmlformats.org/drawingml/2006/main"/>
-          <a:p xmlns:a="http://schemas.openxmlformats.org/drawingml/2006/main">
+          <a:lstStyle/>
+          <a:p>
             <a:pPr marL="0" indent="0" algn="l">
               <a:buNone/>
             </a:pPr>
@@ -3548,37 +3023,37 @@
       <p:sp>
         <p:nvSpPr>
           <p:cNvPr id="124" name="Shape 83">
-            <a:extLst xmlns:a="http://schemas.openxmlformats.org/drawingml/2006/main">
+            <a:extLst>
               <a:ext uri="{FF2B5EF4-FFF2-40B4-BE49-F238E27FC236}">
                 <a16:creationId xmlns:a16="http://schemas.microsoft.com/office/drawing/2014/main" id="{8B0D2B54-F6B7-5B50-ECF1-61F0B555625E}"/>
               </a:ext>
             </a:extLst>
           </p:cNvPr>
           <p:cNvSpPr>
-            <a:spLocks xmlns:a="http://schemas.openxmlformats.org/drawingml/2006/main" noGrp="1"/>
-          </p:cNvSpPr>
-          <p:nvPr/>
-        </p:nvSpPr>
-        <p:spPr>
-          <a:xfrm xmlns:a="http://schemas.openxmlformats.org/drawingml/2006/main">
+            <a:spLocks noGrp="1"/>
+          </p:cNvSpPr>
+          <p:nvPr/>
+        </p:nvSpPr>
+        <p:spPr>
+          <a:xfrm>
             <a:off x="14142720" y="21387816"/>
             <a:ext cx="12862560" cy="9030114"/>
           </a:xfrm>
-          <a:prstGeom xmlns:a="http://schemas.openxmlformats.org/drawingml/2006/main" prst="roundRect">
+          <a:prstGeom prst="roundRect">
             <a:avLst>
               <a:gd name="adj" fmla="val 1796"/>
             </a:avLst>
           </a:prstGeom>
-          <a:solidFill xmlns:a="http://schemas.openxmlformats.org/drawingml/2006/main">
+          <a:solidFill>
             <a:srgbClr val="FFFFFF"/>
           </a:solidFill>
-          <a:ln xmlns:a="http://schemas.openxmlformats.org/drawingml/2006/main" w="12700">
+          <a:ln w="12700">
             <a:solidFill>
               <a:srgbClr val="CAD2D9"/>
             </a:solidFill>
             <a:prstDash val="solid"/>
           </a:ln>
-          <a:effectLst xmlns:a="http://schemas.openxmlformats.org/drawingml/2006/main">
+          <a:effectLst>
             <a:outerShdw blurRad="12700" dist="50800" dir="2700000" algn="bl" rotWithShape="0">
               <a:srgbClr val="B9C1CA">
                 <a:alpha val="12000"/>
@@ -3587,46 +3062,48 @@
           </a:effectLst>
         </p:spPr>
         <p:txBody>
-          <a:bodyPr xmlns:a="http://schemas.openxmlformats.org/drawingml/2006/main"/>
-          <a:lstStyle xmlns:a="http://schemas.openxmlformats.org/drawingml/2006/main"/>
-          <a:p xmlns:a="http://schemas.openxmlformats.org/drawingml/2006/main"/>
+          <a:bodyPr/>
+          <a:lstStyle/>
+          <a:p>
+            <a:endParaRPr dirty="0"/>
+          </a:p>
         </p:txBody>
       </p:sp>
       <p:sp>
         <p:nvSpPr>
           <p:cNvPr id="125" name="Text 84">
-            <a:extLst xmlns:a="http://schemas.openxmlformats.org/drawingml/2006/main">
+            <a:extLst>
               <a:ext uri="{FF2B5EF4-FFF2-40B4-BE49-F238E27FC236}">
                 <a16:creationId xmlns:a16="http://schemas.microsoft.com/office/drawing/2014/main" id="{26D1F150-60EC-FB91-54FB-CDF56783AD75}"/>
               </a:ext>
             </a:extLst>
           </p:cNvPr>
           <p:cNvSpPr>
-            <a:spLocks xmlns:a="http://schemas.openxmlformats.org/drawingml/2006/main" noGrp="1"/>
-          </p:cNvSpPr>
-          <p:nvPr/>
-        </p:nvSpPr>
-        <p:spPr>
-          <a:xfrm xmlns:a="http://schemas.openxmlformats.org/drawingml/2006/main">
+            <a:spLocks noGrp="1"/>
+          </p:cNvSpPr>
+          <p:nvPr/>
+        </p:nvSpPr>
+        <p:spPr>
+          <a:xfrm>
             <a:off x="14398752" y="21749004"/>
             <a:ext cx="12350496" cy="320040"/>
           </a:xfrm>
-          <a:prstGeom xmlns:a="http://schemas.openxmlformats.org/drawingml/2006/main" prst="rect">
-            <a:avLst/>
-          </a:prstGeom>
-          <a:noFill xmlns:a="http://schemas.openxmlformats.org/drawingml/2006/main"/>
-        </p:spPr>
-        <p:txBody>
-          <a:bodyPr xmlns:a="http://schemas.openxmlformats.org/drawingml/2006/main" wrap="square" lIns="0" tIns="0" rIns="0" bIns="0" anchor="t">
+          <a:prstGeom prst="rect">
+            <a:avLst/>
+          </a:prstGeom>
+          <a:noFill/>
+        </p:spPr>
+        <p:txBody>
+          <a:bodyPr wrap="square" lIns="0" tIns="0" rIns="0" bIns="0" anchor="t">
             <a:normAutofit lnSpcReduction="10000"/>
           </a:bodyPr>
-          <a:lstStyle xmlns:a="http://schemas.openxmlformats.org/drawingml/2006/main"/>
-          <a:p xmlns:a="http://schemas.openxmlformats.org/drawingml/2006/main">
+          <a:lstStyle/>
+          <a:p>
             <a:pPr marL="0" indent="0" algn="l">
               <a:buNone/>
             </a:pPr>
             <a:r>
-              <a:rPr sz="2200" b="1">
+              <a:rPr sz="2200" b="1" dirty="0">
                 <a:solidFill>
                   <a:srgbClr val="D39C2D"/>
                 </a:solidFill>
@@ -3641,72 +3118,24 @@
       </p:sp>
       <p:pic>
         <p:nvPicPr>
-          <p:cNvPr id="188" name="图片 129"/>
+          <p:cNvPr id="190" name="图片 130"/>
           <p:cNvPicPr>
-            <a:picLocks xmlns:a="http://schemas.openxmlformats.org/drawingml/2006/main" noChangeAspect="1"/>
+            <a:picLocks noChangeAspect="1"/>
           </p:cNvPicPr>
           <p:nvPr/>
         </p:nvPicPr>
         <p:blipFill>
-          <a:blip xmlns:r="http://schemas.openxmlformats.org/officeDocument/2006/relationships" xmlns:a="http://schemas.openxmlformats.org/drawingml/2006/main" r:embed="Rba6874f7ab8441d1"/>
-          <a:stretch xmlns:a="http://schemas.openxmlformats.org/drawingml/2006/main">
-            <a:fillRect l="0" t="0" r="0" b="0"/>
+          <a:blip r:embed="rId7"/>
+          <a:stretch>
+            <a:fillRect/>
           </a:stretch>
         </p:blipFill>
         <p:spPr>
-          <a:xfrm xmlns:a="http://schemas.openxmlformats.org/drawingml/2006/main">
-            <a:off x="21152149" y="23590710"/>
-            <a:ext cx="5487371" cy="4601751"/>
-          </a:xfrm>
-          <a:prstGeom xmlns:a="http://schemas.openxmlformats.org/drawingml/2006/main" prst="rect">
-            <a:avLst/>
-          </a:prstGeom>
-        </p:spPr>
-      </p:pic>
-      <p:pic>
-        <p:nvPicPr>
-          <p:cNvPr id="189" name="图片 128"/>
-          <p:cNvPicPr>
-            <a:picLocks xmlns:a="http://schemas.openxmlformats.org/drawingml/2006/main" noChangeAspect="1"/>
-          </p:cNvPicPr>
-          <p:nvPr/>
-        </p:nvPicPr>
-        <p:blipFill>
-          <a:blip xmlns:r="http://schemas.openxmlformats.org/officeDocument/2006/relationships" xmlns:a="http://schemas.openxmlformats.org/drawingml/2006/main" r:embed="R2cd1e8b1befb4859"/>
-          <a:stretch xmlns:a="http://schemas.openxmlformats.org/drawingml/2006/main">
-            <a:fillRect l="0" t="0" r="0" b="0"/>
-          </a:stretch>
-        </p:blipFill>
-        <p:spPr>
-          <a:xfrm xmlns:a="http://schemas.openxmlformats.org/drawingml/2006/main">
-            <a:off x="14398752" y="23574501"/>
-            <a:ext cx="6847592" cy="4634739"/>
-          </a:xfrm>
-          <a:prstGeom xmlns:a="http://schemas.openxmlformats.org/drawingml/2006/main" prst="rect">
-            <a:avLst/>
-          </a:prstGeom>
-        </p:spPr>
-      </p:pic>
-      <p:pic>
-        <p:nvPicPr>
-          <p:cNvPr id="190" name="图片 130"/>
-          <p:cNvPicPr>
-            <a:picLocks xmlns:a="http://schemas.openxmlformats.org/drawingml/2006/main" noChangeAspect="1"/>
-          </p:cNvPicPr>
-          <p:nvPr/>
-        </p:nvPicPr>
-        <p:blipFill>
-          <a:blip xmlns:r="http://schemas.openxmlformats.org/officeDocument/2006/relationships" xmlns:a="http://schemas.openxmlformats.org/drawingml/2006/main" r:embed="R4d42d8eec6934098"/>
-          <a:stretch xmlns:a="http://schemas.openxmlformats.org/drawingml/2006/main">
-            <a:fillRect l="0" t="0" r="0" b="0"/>
-          </a:stretch>
-        </p:blipFill>
-        <p:spPr>
-          <a:xfrm xmlns:a="http://schemas.openxmlformats.org/drawingml/2006/main">
+          <a:xfrm>
             <a:off x="28695014" y="6449610"/>
             <a:ext cx="10488932" cy="8105620"/>
           </a:xfrm>
-          <a:prstGeom xmlns:a="http://schemas.openxmlformats.org/drawingml/2006/main" prst="rect">
+          <a:prstGeom prst="rect">
             <a:avLst/>
           </a:prstGeom>
         </p:spPr>
@@ -3715,22 +3144,22 @@
         <p:nvPicPr>
           <p:cNvPr id="191" name="图片 131"/>
           <p:cNvPicPr>
-            <a:picLocks xmlns:a="http://schemas.openxmlformats.org/drawingml/2006/main" noChangeAspect="1"/>
+            <a:picLocks noChangeAspect="1"/>
           </p:cNvPicPr>
           <p:nvPr/>
         </p:nvPicPr>
         <p:blipFill>
-          <a:blip xmlns:r="http://schemas.openxmlformats.org/officeDocument/2006/relationships" xmlns:a="http://schemas.openxmlformats.org/drawingml/2006/main" r:embed="Rbe1accbd68ae4fa2"/>
-          <a:stretch xmlns:a="http://schemas.openxmlformats.org/drawingml/2006/main">
-            <a:fillRect l="0" t="0" r="0" b="0"/>
+          <a:blip r:embed="rId8"/>
+          <a:stretch>
+            <a:fillRect/>
           </a:stretch>
         </p:blipFill>
         <p:spPr>
-          <a:xfrm xmlns:a="http://schemas.openxmlformats.org/drawingml/2006/main">
+          <a:xfrm>
             <a:off x="27690488" y="18490825"/>
             <a:ext cx="6103407" cy="4825133"/>
           </a:xfrm>
-          <a:prstGeom xmlns:a="http://schemas.openxmlformats.org/drawingml/2006/main" prst="rect">
+          <a:prstGeom prst="rect">
             <a:avLst/>
           </a:prstGeom>
         </p:spPr>
@@ -3739,22 +3168,22 @@
         <p:nvPicPr>
           <p:cNvPr id="192" name="图片 132"/>
           <p:cNvPicPr>
-            <a:picLocks xmlns:a="http://schemas.openxmlformats.org/drawingml/2006/main" noChangeAspect="1"/>
+            <a:picLocks noChangeAspect="1"/>
           </p:cNvPicPr>
           <p:nvPr/>
         </p:nvPicPr>
         <p:blipFill>
-          <a:blip xmlns:r="http://schemas.openxmlformats.org/officeDocument/2006/relationships" xmlns:a="http://schemas.openxmlformats.org/drawingml/2006/main" r:embed="R063d30dc04e04299"/>
-          <a:stretch xmlns:a="http://schemas.openxmlformats.org/drawingml/2006/main">
-            <a:fillRect l="0" t="0" r="0" b="0"/>
+          <a:blip r:embed="rId9"/>
+          <a:stretch>
+            <a:fillRect/>
           </a:stretch>
         </p:blipFill>
         <p:spPr>
-          <a:xfrm xmlns:a="http://schemas.openxmlformats.org/drawingml/2006/main">
+          <a:xfrm>
             <a:off x="34220615" y="18473854"/>
             <a:ext cx="6061268" cy="4825133"/>
           </a:xfrm>
-          <a:prstGeom xmlns:a="http://schemas.openxmlformats.org/drawingml/2006/main" prst="rect">
+          <a:prstGeom prst="rect">
             <a:avLst/>
           </a:prstGeom>
         </p:spPr>
@@ -3763,22 +3192,22 @@
         <p:nvPicPr>
           <p:cNvPr id="193" name="Picture 3"/>
           <p:cNvPicPr>
-            <a:picLocks xmlns:a="http://schemas.openxmlformats.org/drawingml/2006/main" noChangeAspect="1"/>
+            <a:picLocks noChangeAspect="1"/>
           </p:cNvPicPr>
           <p:nvPr/>
         </p:nvPicPr>
         <p:blipFill>
-          <a:blip xmlns:r="http://schemas.openxmlformats.org/officeDocument/2006/relationships" xmlns:a="http://schemas.openxmlformats.org/drawingml/2006/main" r:embed="Rd1120bf3997f4842"/>
-          <a:stretch xmlns:a="http://schemas.openxmlformats.org/drawingml/2006/main">
-            <a:fillRect l="0" t="0" r="0" b="0"/>
+          <a:blip r:embed="rId10"/>
+          <a:stretch>
+            <a:fillRect/>
           </a:stretch>
         </p:blipFill>
         <p:spPr>
-          <a:xfrm xmlns:a="http://schemas.openxmlformats.org/drawingml/2006/main">
+          <a:xfrm>
             <a:off x="11136596" y="31208738"/>
             <a:ext cx="2589230" cy="667810"/>
           </a:xfrm>
-          <a:prstGeom xmlns:a="http://schemas.openxmlformats.org/drawingml/2006/main" prst="rect">
+          <a:prstGeom prst="rect">
             <a:avLst/>
           </a:prstGeom>
         </p:spPr>
@@ -3787,44 +3216,140 @@
         <p:nvPicPr>
           <p:cNvPr id="194" name="Picture 4"/>
           <p:cNvPicPr>
-            <a:picLocks xmlns:a="http://schemas.openxmlformats.org/drawingml/2006/main" noChangeAspect="1"/>
+            <a:picLocks noChangeAspect="1"/>
           </p:cNvPicPr>
           <p:nvPr/>
         </p:nvPicPr>
         <p:blipFill>
-          <a:blip xmlns:r="http://schemas.openxmlformats.org/officeDocument/2006/relationships" xmlns:a="http://schemas.openxmlformats.org/drawingml/2006/main" r:embed="R2ce495c0f91d4218"/>
-          <a:stretch xmlns:a="http://schemas.openxmlformats.org/drawingml/2006/main">
-            <a:fillRect l="0" t="0" r="0" b="0"/>
+          <a:blip r:embed="rId11"/>
+          <a:stretch>
+            <a:fillRect/>
           </a:stretch>
         </p:blipFill>
         <p:spPr>
-          <a:xfrm xmlns:a="http://schemas.openxmlformats.org/drawingml/2006/main">
+          <a:xfrm>
             <a:off x="11136596" y="32142046"/>
             <a:ext cx="2559939" cy="673668"/>
           </a:xfrm>
-          <a:prstGeom xmlns:a="http://schemas.openxmlformats.org/drawingml/2006/main" prst="rect">
+          <a:prstGeom prst="rect">
             <a:avLst/>
           </a:prstGeom>
         </p:spPr>
       </p:pic>
       <p:pic>
         <p:nvPicPr>
-          <p:cNvPr id="195" name=""/>
+          <p:cNvPr id="195" name="图片 194"/>
           <p:cNvPicPr>
-            <a:picLocks xmlns:a="http://schemas.openxmlformats.org/drawingml/2006/main" noChangeAspect="1"/>
+            <a:picLocks noChangeAspect="1"/>
           </p:cNvPicPr>
           <p:nvPr/>
         </p:nvPicPr>
         <p:blipFill>
-          <a:blip xmlns:r="http://schemas.openxmlformats.org/officeDocument/2006/relationships" xmlns:a="http://schemas.openxmlformats.org/drawingml/2006/main" r:embed="R22df397c92104842"/>
-          <a:stretch xmlns:a="http://schemas.openxmlformats.org/drawingml/2006/main"/>
+          <a:blip r:embed="rId12"/>
+          <a:stretch/>
         </p:blipFill>
         <p:spPr>
-          <a:xfrm xmlns:a="http://schemas.openxmlformats.org/drawingml/2006/main">
-            <a:off x="33737550" y="30918150"/>
+          <a:xfrm>
+            <a:off x="34080450" y="30984555"/>
             <a:ext cx="1866900" cy="1866900"/>
           </a:xfrm>
-          <a:prstGeom xmlns:a="http://schemas.openxmlformats.org/drawingml/2006/main" prst="rect">
+          <a:prstGeom prst="rect">
+            <a:avLst/>
+          </a:prstGeom>
+        </p:spPr>
+      </p:pic>
+      <p:pic>
+        <p:nvPicPr>
+          <p:cNvPr id="8" name="图片 7">
+            <a:extLst>
+              <a:ext uri="{FF2B5EF4-FFF2-40B4-BE49-F238E27FC236}">
+                <a16:creationId xmlns:a16="http://schemas.microsoft.com/office/drawing/2014/main" id="{DA0B33E7-F59A-DB21-92B9-A7FD6E5B82CA}"/>
+              </a:ext>
+            </a:extLst>
+          </p:cNvPr>
+          <p:cNvPicPr>
+            <a:picLocks noChangeAspect="1"/>
+          </p:cNvPicPr>
+          <p:nvPr/>
+        </p:nvPicPr>
+        <p:blipFill>
+          <a:blip r:embed="rId13">
+            <a:extLst>
+              <a:ext uri="{28A0092B-C50C-407E-A947-70E740481C1C}">
+                <a14:useLocalDpi xmlns:a14="http://schemas.microsoft.com/office/drawing/2010/main" val="0"/>
+              </a:ext>
+            </a:extLst>
+          </a:blip>
+          <a:stretch>
+            <a:fillRect/>
+          </a:stretch>
+        </p:blipFill>
+        <p:spPr>
+          <a:xfrm>
+            <a:off x="1406324" y="16036627"/>
+            <a:ext cx="11604392" cy="5512019"/>
+          </a:xfrm>
+          <a:prstGeom prst="rect">
+            <a:avLst/>
+          </a:prstGeom>
+        </p:spPr>
+      </p:pic>
+      <p:pic>
+        <p:nvPicPr>
+          <p:cNvPr id="9" name="图片 8">
+            <a:extLst>
+              <a:ext uri="{FF2B5EF4-FFF2-40B4-BE49-F238E27FC236}">
+                <a16:creationId xmlns:a16="http://schemas.microsoft.com/office/drawing/2014/main" id="{298CCAE6-C9BC-9102-A110-A4D1702B3B7E}"/>
+              </a:ext>
+            </a:extLst>
+          </p:cNvPr>
+          <p:cNvPicPr>
+            <a:picLocks noChangeAspect="1"/>
+          </p:cNvPicPr>
+          <p:nvPr/>
+        </p:nvPicPr>
+        <p:blipFill>
+          <a:blip r:embed="rId14"/>
+          <a:stretch>
+            <a:fillRect/>
+          </a:stretch>
+        </p:blipFill>
+        <p:spPr>
+          <a:xfrm>
+            <a:off x="14142720" y="24353545"/>
+            <a:ext cx="6654800" cy="4504250"/>
+          </a:xfrm>
+          <a:prstGeom prst="rect">
+            <a:avLst/>
+          </a:prstGeom>
+        </p:spPr>
+      </p:pic>
+      <p:pic>
+        <p:nvPicPr>
+          <p:cNvPr id="10" name="图片 9">
+            <a:extLst>
+              <a:ext uri="{FF2B5EF4-FFF2-40B4-BE49-F238E27FC236}">
+                <a16:creationId xmlns:a16="http://schemas.microsoft.com/office/drawing/2014/main" id="{20CB003D-7156-18D3-F323-130FB98BF5A1}"/>
+              </a:ext>
+            </a:extLst>
+          </p:cNvPr>
+          <p:cNvPicPr>
+            <a:picLocks noChangeAspect="1"/>
+          </p:cNvPicPr>
+          <p:nvPr/>
+        </p:nvPicPr>
+        <p:blipFill>
+          <a:blip r:embed="rId15"/>
+          <a:stretch>
+            <a:fillRect/>
+          </a:stretch>
+        </p:blipFill>
+        <p:spPr>
+          <a:xfrm>
+            <a:off x="21053552" y="24144616"/>
+            <a:ext cx="5869382" cy="4922108"/>
+          </a:xfrm>
+          <a:prstGeom prst="rect">
             <a:avLst/>
           </a:prstGeom>
         </p:spPr>
@@ -3836,6 +3361,9 @@
       </p:ext>
     </p:extLst>
   </p:cSld>
+  <p:clrMapOvr>
+    <a:masterClrMapping/>
+  </p:clrMapOvr>
 </p:sld>
 </file>
 
@@ -4121,5 +3649,294 @@
       </a:bgFillStyleLst>
     </a:fmtScheme>
   </a:themeElements>
+  <a:objectDefaults/>
+  <a:extraClrSchemeLst/>
+</a:theme>
+</file>
+
+<file path=ppt/theme/theme2.xml><?xml version="1.0" encoding="utf-8"?>
+<a:theme xmlns:a="http://schemas.openxmlformats.org/drawingml/2006/main" name="Office Theme">
+  <a:themeElements>
+    <a:clrScheme name="Office">
+      <a:dk1>
+        <a:sysClr val="windowText" lastClr="000000"/>
+      </a:dk1>
+      <a:lt1>
+        <a:sysClr val="window" lastClr="FFFFFF"/>
+      </a:lt1>
+      <a:dk2>
+        <a:srgbClr val="44546A"/>
+      </a:dk2>
+      <a:lt2>
+        <a:srgbClr val="E7E6E6"/>
+      </a:lt2>
+      <a:accent1>
+        <a:srgbClr val="4472C4"/>
+      </a:accent1>
+      <a:accent2>
+        <a:srgbClr val="ED7D31"/>
+      </a:accent2>
+      <a:accent3>
+        <a:srgbClr val="A5A5A5"/>
+      </a:accent3>
+      <a:accent4>
+        <a:srgbClr val="FFC000"/>
+      </a:accent4>
+      <a:accent5>
+        <a:srgbClr val="5B9BD5"/>
+      </a:accent5>
+      <a:accent6>
+        <a:srgbClr val="70AD47"/>
+      </a:accent6>
+      <a:hlink>
+        <a:srgbClr val="0563C1"/>
+      </a:hlink>
+      <a:folHlink>
+        <a:srgbClr val="954F72"/>
+      </a:folHlink>
+    </a:clrScheme>
+    <a:fontScheme name="Office">
+      <a:majorFont>
+        <a:latin typeface="Aptos Display"/>
+        <a:ea typeface=""/>
+        <a:cs typeface=""/>
+        <a:font script="Jpan" typeface="游ゴシック Light"/>
+        <a:font script="Hang" typeface="맑은 고딕"/>
+        <a:font script="Hans" typeface="等线 Light"/>
+        <a:font script="Hant" typeface="新細明體"/>
+        <a:font script="Arab" typeface="Times New Roman"/>
+        <a:font script="Hebr" typeface="Times New Roman"/>
+        <a:font script="Thai" typeface="Angsana New"/>
+        <a:font script="Ethi" typeface="Nyala"/>
+        <a:font script="Beng" typeface="Vrinda"/>
+        <a:font script="Gujr" typeface="Shruti"/>
+        <a:font script="Khmr" typeface="MoolBoran"/>
+        <a:font script="Knda" typeface="Tunga"/>
+        <a:font script="Guru" typeface="Raavi"/>
+        <a:font script="Cans" typeface="Euphemia"/>
+        <a:font script="Cher" typeface="Plantagenet Cherokee"/>
+        <a:font script="Yiii" typeface="Microsoft Yi Baiti"/>
+        <a:font script="Tibt" typeface="Microsoft Himalaya"/>
+        <a:font script="Thaa" typeface="MV Boli"/>
+        <a:font script="Deva" typeface="Mangal"/>
+        <a:font script="Telu" typeface="Gautami"/>
+        <a:font script="Taml" typeface="Latha"/>
+        <a:font script="Syrc" typeface="Estrangelo Edessa"/>
+        <a:font script="Orya" typeface="Kalinga"/>
+        <a:font script="Mlym" typeface="Kartika"/>
+        <a:font script="Laoo" typeface="DokChampa"/>
+        <a:font script="Sinh" typeface="Iskoola Pota"/>
+        <a:font script="Mong" typeface="Mongolian Baiti"/>
+        <a:font script="Viet" typeface="Times New Roman"/>
+        <a:font script="Uigh" typeface="Microsoft Uighur"/>
+        <a:font script="Geor" typeface="Sylfaen"/>
+        <a:font script="Armn" typeface="Arial"/>
+        <a:font script="Bugi" typeface="Leelawadee UI"/>
+        <a:font script="Bopo" typeface="Microsoft JhengHei"/>
+        <a:font script="Java" typeface="Javanese Text"/>
+        <a:font script="Lisu" typeface="Segoe UI"/>
+        <a:font script="Mymr" typeface="Myanmar Text"/>
+        <a:font script="Nkoo" typeface="Ebrima"/>
+        <a:font script="Olck" typeface="Nirmala UI"/>
+        <a:font script="Osma" typeface="Ebrima"/>
+        <a:font script="Phag" typeface="Phagspa"/>
+        <a:font script="Syrn" typeface="Estrangelo Edessa"/>
+        <a:font script="Syrj" typeface="Estrangelo Edessa"/>
+        <a:font script="Syre" typeface="Estrangelo Edessa"/>
+        <a:font script="Sora" typeface="Nirmala UI"/>
+        <a:font script="Tale" typeface="Microsoft Tai Le"/>
+        <a:font script="Talu" typeface="Microsoft New Tai Lue"/>
+        <a:font script="Tfng" typeface="Ebrima"/>
+      </a:majorFont>
+      <a:minorFont>
+        <a:latin typeface="Aptos"/>
+        <a:ea typeface=""/>
+        <a:cs typeface=""/>
+        <a:font script="Jpan" typeface="游ゴシック"/>
+        <a:font script="Hang" typeface="맑은 고딕"/>
+        <a:font script="Hans" typeface="等线"/>
+        <a:font script="Hant" typeface="新細明體"/>
+        <a:font script="Arab" typeface="Arial"/>
+        <a:font script="Hebr" typeface="Arial"/>
+        <a:font script="Thai" typeface="Cordia New"/>
+        <a:font script="Ethi" typeface="Nyala"/>
+        <a:font script="Beng" typeface="Vrinda"/>
+        <a:font script="Gujr" typeface="Shruti"/>
+        <a:font script="Khmr" typeface="DaunPenh"/>
+        <a:font script="Knda" typeface="Tunga"/>
+        <a:font script="Guru" typeface="Raavi"/>
+        <a:font script="Cans" typeface="Euphemia"/>
+        <a:font script="Cher" typeface="Plantagenet Cherokee"/>
+        <a:font script="Yiii" typeface="Microsoft Yi Baiti"/>
+        <a:font script="Tibt" typeface="Microsoft Himalaya"/>
+        <a:font script="Thaa" typeface="MV Boli"/>
+        <a:font script="Deva" typeface="Mangal"/>
+        <a:font script="Telu" typeface="Gautami"/>
+        <a:font script="Taml" typeface="Latha"/>
+        <a:font script="Syrc" typeface="Estrangelo Edessa"/>
+        <a:font script="Orya" typeface="Kalinga"/>
+        <a:font script="Mlym" typeface="Kartika"/>
+        <a:font script="Laoo" typeface="DokChampa"/>
+        <a:font script="Sinh" typeface="Iskoola Pota"/>
+        <a:font script="Mong" typeface="Mongolian Baiti"/>
+        <a:font script="Viet" typeface="Arial"/>
+        <a:font script="Uigh" typeface="Microsoft Uighur"/>
+        <a:font script="Geor" typeface="Sylfaen"/>
+        <a:font script="Armn" typeface="Arial"/>
+        <a:font script="Bugi" typeface="Leelawadee UI"/>
+        <a:font script="Bopo" typeface="Microsoft JhengHei"/>
+        <a:font script="Java" typeface="Javanese Text"/>
+        <a:font script="Lisu" typeface="Segoe UI"/>
+        <a:font script="Mymr" typeface="Myanmar Text"/>
+        <a:font script="Nkoo" typeface="Ebrima"/>
+        <a:font script="Olck" typeface="Nirmala UI"/>
+        <a:font script="Osma" typeface="Ebrima"/>
+        <a:font script="Phag" typeface="Phagspa"/>
+        <a:font script="Syrn" typeface="Estrangelo Edessa"/>
+        <a:font script="Syrj" typeface="Estrangelo Edessa"/>
+        <a:font script="Syre" typeface="Estrangelo Edessa"/>
+        <a:font script="Sora" typeface="Nirmala UI"/>
+        <a:font script="Tale" typeface="Microsoft Tai Le"/>
+        <a:font script="Talu" typeface="Microsoft New Tai Lue"/>
+        <a:font script="Tfng" typeface="Ebrima"/>
+      </a:minorFont>
+    </a:fontScheme>
+    <a:fmtScheme name="Office">
+      <a:fillStyleLst>
+        <a:solidFill>
+          <a:schemeClr val="phClr"/>
+        </a:solidFill>
+        <a:gradFill rotWithShape="1">
+          <a:gsLst>
+            <a:gs pos="0">
+              <a:schemeClr val="phClr">
+                <a:tint val="67000"/>
+                <a:lumMod val="110000"/>
+                <a:satMod val="105000"/>
+              </a:schemeClr>
+            </a:gs>
+            <a:gs pos="50000">
+              <a:schemeClr val="phClr">
+                <a:tint val="73000"/>
+                <a:lumMod val="105000"/>
+                <a:satMod val="103000"/>
+              </a:schemeClr>
+            </a:gs>
+            <a:gs pos="100000">
+              <a:schemeClr val="phClr">
+                <a:tint val="81000"/>
+                <a:lumMod val="105000"/>
+                <a:satMod val="109000"/>
+              </a:schemeClr>
+            </a:gs>
+          </a:gsLst>
+          <a:lin ang="5400000" scaled="0"/>
+        </a:gradFill>
+        <a:gradFill rotWithShape="1">
+          <a:gsLst>
+            <a:gs pos="0">
+              <a:schemeClr val="phClr">
+                <a:tint val="94000"/>
+                <a:lumMod val="102000"/>
+                <a:satMod val="103000"/>
+              </a:schemeClr>
+            </a:gs>
+            <a:gs pos="50000">
+              <a:schemeClr val="phClr">
+                <a:shade val="100000"/>
+                <a:lumMod val="100000"/>
+                <a:satMod val="110000"/>
+              </a:schemeClr>
+            </a:gs>
+            <a:gs pos="100000">
+              <a:schemeClr val="phClr">
+                <a:shade val="78000"/>
+                <a:lumMod val="99000"/>
+                <a:satMod val="120000"/>
+              </a:schemeClr>
+            </a:gs>
+          </a:gsLst>
+          <a:lin ang="5400000" scaled="0"/>
+        </a:gradFill>
+      </a:fillStyleLst>
+      <a:lnStyleLst>
+        <a:ln w="6350">
+          <a:solidFill>
+            <a:schemeClr val="phClr"/>
+          </a:solidFill>
+          <a:prstDash val="solid"/>
+        </a:ln>
+        <a:ln w="12700">
+          <a:solidFill>
+            <a:schemeClr val="phClr"/>
+          </a:solidFill>
+          <a:prstDash val="solid"/>
+        </a:ln>
+        <a:ln w="19050">
+          <a:solidFill>
+            <a:schemeClr val="phClr"/>
+          </a:solidFill>
+          <a:prstDash val="solid"/>
+        </a:ln>
+      </a:lnStyleLst>
+      <a:effectStyleLst>
+        <a:effectStyle>
+          <a:effectLst/>
+        </a:effectStyle>
+        <a:effectStyle>
+          <a:effectLst/>
+        </a:effectStyle>
+        <a:effectStyle>
+          <a:effectLst>
+            <a:outerShdw blurRad="57150" dist="19050" dir="5400000" algn="ctr" rotWithShape="0">
+              <a:srgbClr val="000000">
+                <a:alpha val="63000"/>
+              </a:srgbClr>
+            </a:outerShdw>
+          </a:effectLst>
+        </a:effectStyle>
+      </a:effectStyleLst>
+      <a:bgFillStyleLst>
+        <a:solidFill>
+          <a:schemeClr val="phClr"/>
+        </a:solidFill>
+        <a:solidFill>
+          <a:schemeClr val="phClr">
+            <a:tint val="95000"/>
+            <a:satMod val="170000"/>
+          </a:schemeClr>
+        </a:solidFill>
+        <a:gradFill rotWithShape="1">
+          <a:gsLst>
+            <a:gs pos="0">
+              <a:schemeClr val="phClr">
+                <a:tint val="93000"/>
+                <a:shade val="98000"/>
+                <a:lumMod val="102000"/>
+                <a:satMod val="150000"/>
+              </a:schemeClr>
+            </a:gs>
+            <a:gs pos="50000">
+              <a:schemeClr val="phClr">
+                <a:tint val="98000"/>
+                <a:shade val="90000"/>
+                <a:lumMod val="103000"/>
+                <a:satMod val="130000"/>
+              </a:schemeClr>
+            </a:gs>
+            <a:gs pos="100000">
+              <a:schemeClr val="phClr">
+                <a:shade val="63000"/>
+                <a:satMod val="120000"/>
+              </a:schemeClr>
+            </a:gs>
+          </a:gsLst>
+          <a:lin ang="5400000" scaled="0"/>
+        </a:gradFill>
+      </a:bgFillStyleLst>
+    </a:fmtScheme>
+  </a:themeElements>
+  <a:objectDefaults/>
+  <a:extraClrSchemeLst/>
 </a:theme>
 </file>
--- a/RSA_26_Jiarun_Liu_poster.pptx
+++ b/RSA_26_Jiarun_Liu_poster.pptx
@@ -331,8 +331,41 @@
           <a:lstStyle/>
           <a:p>
             <a:r>
+              <a:rPr dirty="0"/>
               <a:t>Method， cohort build </a:t>
             </a:r>
+            <a:endParaRPr lang="en-US" dirty="0"/>
+          </a:p>
+          <a:p>
+            <a:r>
+              <a:rPr lang="en-US" dirty="0"/>
+              <a:t>Title to 80</a:t>
+            </a:r>
+          </a:p>
+          <a:p>
+            <a:r>
+              <a:rPr lang="en-US" dirty="0"/>
+              <a:t>Abstract to bullet point </a:t>
+            </a:r>
+          </a:p>
+          <a:p>
+            <a:r>
+              <a:rPr lang="en-US" dirty="0"/>
+              <a:t>Text size to 28</a:t>
+            </a:r>
+          </a:p>
+          <a:p>
+            <a:r>
+              <a:rPr lang="en-US" dirty="0"/>
+              <a:t>Check </a:t>
+            </a:r>
+            <a:r>
+              <a:rPr lang="en-US"/>
+              <a:t>figure size</a:t>
+            </a:r>
+          </a:p>
+          <a:p>
+            <a:endParaRPr dirty="0"/>
           </a:p>
         </p:txBody>
       </p:sp>
@@ -707,7 +740,7 @@
             </a:extLst>
           </p:cNvPr>
           <p:cNvSpPr>
-            <a:spLocks noGrp="1"/>
+            <a:spLocks noGrp="1" noRot="1" noMove="1" noResize="1" noEditPoints="1" noAdjustHandles="1" noChangeArrowheads="1" noChangeShapeType="1"/>
           </p:cNvSpPr>
           <p:nvPr/>
         </p:nvSpPr>
@@ -733,7 +766,7 @@
           <a:bodyPr/>
           <a:lstStyle/>
           <a:p>
-            <a:endParaRPr/>
+            <a:endParaRPr dirty="0"/>
           </a:p>
         </p:txBody>
       </p:sp>
@@ -747,7 +780,7 @@
             </a:extLst>
           </p:cNvPr>
           <p:cNvSpPr>
-            <a:spLocks noGrp="1"/>
+            <a:spLocks noGrp="1" noRot="1" noMove="1" noResize="1" noEditPoints="1" noAdjustHandles="1" noChangeArrowheads="1" noChangeShapeType="1"/>
           </p:cNvSpPr>
           <p:nvPr/>
         </p:nvSpPr>
@@ -793,8 +826,8 @@
         </p:nvSpPr>
         <p:spPr>
           <a:xfrm>
-            <a:off x="914400" y="530352"/>
-            <a:ext cx="25181169" cy="1234440"/>
+            <a:off x="868680" y="259888"/>
+            <a:ext cx="37458351" cy="2322614"/>
           </a:xfrm>
           <a:prstGeom prst="rect">
             <a:avLst/>
@@ -811,7 +844,7 @@
               <a:buNone/>
             </a:pPr>
             <a:r>
-              <a:rPr sz="6000" b="1">
+              <a:rPr sz="8000" b="1" dirty="0">
                 <a:solidFill>
                   <a:srgbClr val="FFFFFF"/>
                 </a:solidFill>
@@ -822,11 +855,11 @@
               <a:t>Clinical and Behavioral Factors Associated with Alcohol Use Disorder</a:t>
             </a:r>
             <a:r>
-              <a:rPr sz="6000"/>
+              <a:rPr sz="8000" dirty="0"/>
               <a:t> </a:t>
             </a:r>
             <a:r>
-              <a:rPr sz="6000" b="1">
+              <a:rPr sz="8000" b="1" dirty="0">
                 <a:solidFill>
                   <a:srgbClr val="FFFFFF"/>
                 </a:solidFill>
@@ -855,7 +888,7 @@
         </p:nvSpPr>
         <p:spPr>
           <a:xfrm>
-            <a:off x="914400" y="2500470"/>
+            <a:off x="868680" y="2987911"/>
             <a:ext cx="32004000" cy="438912"/>
           </a:xfrm>
           <a:prstGeom prst="rect">
@@ -873,7 +906,7 @@
               <a:buNone/>
             </a:pPr>
             <a:r>
-              <a:rPr sz="2200" b="1" u="sng">
+              <a:rPr sz="2800" b="1" u="sng" dirty="0">
                 <a:solidFill>
                   <a:srgbClr val="E6EDF3"/>
                 </a:solidFill>
@@ -884,7 +917,7 @@
               <a:t>Jiarun Liu</a:t>
             </a:r>
             <a:r>
-              <a:rPr sz="2200">
+              <a:rPr sz="2800" dirty="0">
                 <a:solidFill>
                   <a:srgbClr val="E6EDF3"/>
                 </a:solidFill>
@@ -913,7 +946,7 @@
         </p:nvSpPr>
         <p:spPr>
           <a:xfrm>
-            <a:off x="914400" y="3094647"/>
+            <a:off x="868680" y="3552733"/>
             <a:ext cx="32735520" cy="676656"/>
           </a:xfrm>
           <a:prstGeom prst="rect">
@@ -931,7 +964,7 @@
               <a:buNone/>
             </a:pPr>
             <a:r>
-              <a:rPr sz="2100" b="1">
+              <a:rPr sz="2800" b="1" dirty="0">
                 <a:solidFill>
                   <a:srgbClr val="FFF3D5"/>
                 </a:solidFill>
@@ -960,8 +993,8 @@
         </p:nvSpPr>
         <p:spPr>
           <a:xfrm>
-            <a:off x="777240" y="4709160"/>
-            <a:ext cx="12862560" cy="502920"/>
+            <a:off x="777240" y="4411301"/>
+            <a:ext cx="12862560" cy="800778"/>
           </a:xfrm>
           <a:prstGeom prst="rect">
             <a:avLst/>
@@ -982,7 +1015,7 @@
           <a:bodyPr/>
           <a:lstStyle/>
           <a:p>
-            <a:endParaRPr/>
+            <a:endParaRPr dirty="0"/>
           </a:p>
         </p:txBody>
       </p:sp>
@@ -1002,8 +1035,8 @@
         </p:nvSpPr>
         <p:spPr>
           <a:xfrm>
-            <a:off x="978408" y="4773168"/>
-            <a:ext cx="12460224" cy="384048"/>
+            <a:off x="923544" y="4501828"/>
+            <a:ext cx="12460224" cy="800777"/>
           </a:xfrm>
           <a:prstGeom prst="rect">
             <a:avLst/>
@@ -1012,7 +1045,7 @@
         </p:spPr>
         <p:txBody>
           <a:bodyPr wrap="square" lIns="0" tIns="0" rIns="0" bIns="0" anchor="t">
-            <a:normAutofit/>
+            <a:noAutofit/>
           </a:bodyPr>
           <a:lstStyle/>
           <a:p>
@@ -1020,7 +1053,7 @@
               <a:buNone/>
             </a:pPr>
             <a:r>
-              <a:rPr sz="2400" b="1">
+              <a:rPr sz="4000" b="1" dirty="0">
                 <a:solidFill>
                   <a:srgbClr val="FFFFFF"/>
                 </a:solidFill>
@@ -1028,7 +1061,29 @@
                 <a:ea typeface="Aptos"/>
                 <a:cs typeface="Aptos"/>
               </a:rPr>
-              <a:t>1. Abstract, Workflow &amp; Study Design</a:t>
+              <a:t>1. </a:t>
+            </a:r>
+            <a:r>
+              <a:rPr lang="en-US" sz="4000" b="1" dirty="0">
+                <a:solidFill>
+                  <a:srgbClr val="FFFFFF"/>
+                </a:solidFill>
+                <a:latin typeface="Aptos"/>
+                <a:ea typeface="Aptos"/>
+                <a:cs typeface="Aptos"/>
+              </a:rPr>
+              <a:t>Introduction</a:t>
+            </a:r>
+            <a:r>
+              <a:rPr sz="4000" b="1" dirty="0">
+                <a:solidFill>
+                  <a:srgbClr val="FFFFFF"/>
+                </a:solidFill>
+                <a:latin typeface="Aptos"/>
+                <a:ea typeface="Aptos"/>
+                <a:cs typeface="Aptos"/>
+              </a:rPr>
+              <a:t>, Workflow &amp; Study Design</a:t>
             </a:r>
           </a:p>
         </p:txBody>
@@ -1098,7 +1153,7 @@
         </p:nvSpPr>
         <p:spPr>
           <a:xfrm>
-            <a:off x="1033272" y="5559552"/>
+            <a:off x="1033272" y="5467302"/>
             <a:ext cx="12350496" cy="320040"/>
           </a:xfrm>
           <a:prstGeom prst="rect">
@@ -1108,7 +1163,7 @@
         </p:spPr>
         <p:txBody>
           <a:bodyPr wrap="square" lIns="0" tIns="0" rIns="0" bIns="0" anchor="t">
-            <a:normAutofit lnSpcReduction="10000"/>
+            <a:noAutofit/>
           </a:bodyPr>
           <a:lstStyle/>
           <a:p>
@@ -1116,7 +1171,7 @@
               <a:buNone/>
             </a:pPr>
             <a:r>
-              <a:rPr sz="2200" b="1">
+              <a:rPr sz="2800" b="1" dirty="0">
                 <a:solidFill>
                   <a:srgbClr val="0F766E"/>
                 </a:solidFill>
@@ -1163,7 +1218,7 @@
               <a:buNone/>
             </a:pPr>
             <a:r>
-              <a:rPr sz="2100" b="1">
+              <a:rPr sz="2800" b="1" dirty="0">
                 <a:solidFill>
                   <a:srgbClr val="17212B"/>
                 </a:solidFill>
@@ -1192,8 +1247,8 @@
         </p:nvSpPr>
         <p:spPr>
           <a:xfrm>
-            <a:off x="777240" y="7315200"/>
-            <a:ext cx="12862560" cy="6766560"/>
+            <a:off x="777240" y="7315199"/>
+            <a:ext cx="12862560" cy="7027627"/>
           </a:xfrm>
           <a:prstGeom prst="roundRect">
             <a:avLst>
@@ -1241,8 +1296,8 @@
         </p:nvSpPr>
         <p:spPr>
           <a:xfrm>
-            <a:off x="1033272" y="7483901"/>
-            <a:ext cx="12350496" cy="320040"/>
+            <a:off x="1033272" y="7483900"/>
+            <a:ext cx="12350496" cy="503383"/>
           </a:xfrm>
           <a:prstGeom prst="rect">
             <a:avLst/>
@@ -1251,7 +1306,7 @@
         </p:spPr>
         <p:txBody>
           <a:bodyPr wrap="square" lIns="0" tIns="0" rIns="0" bIns="0" anchor="t">
-            <a:normAutofit lnSpcReduction="10000"/>
+            <a:noAutofit/>
           </a:bodyPr>
           <a:lstStyle/>
           <a:p>
@@ -1259,7 +1314,7 @@
               <a:buNone/>
             </a:pPr>
             <a:r>
-              <a:rPr sz="2200" b="1">
+              <a:rPr lang="en-US" sz="2800" b="1" dirty="0">
                 <a:solidFill>
                   <a:srgbClr val="0F766E"/>
                 </a:solidFill>
@@ -1267,8 +1322,16 @@
                 <a:ea typeface="Aptos"/>
                 <a:cs typeface="Aptos"/>
               </a:rPr>
-              <a:t>Abstract</a:t>
-            </a:r>
+              <a:t>Introduction</a:t>
+            </a:r>
+            <a:endParaRPr sz="2800" b="1" dirty="0">
+              <a:solidFill>
+                <a:srgbClr val="0F766E"/>
+              </a:solidFill>
+              <a:latin typeface="Aptos"/>
+              <a:ea typeface="Aptos"/>
+              <a:cs typeface="Aptos"/>
+            </a:endParaRPr>
           </a:p>
         </p:txBody>
       </p:sp>
@@ -1392,18 +1455,19 @@
         </p:spPr>
         <p:txBody>
           <a:bodyPr wrap="square" lIns="762" tIns="762" rIns="762" bIns="762" anchor="t">
-            <a:normAutofit/>
+            <a:noAutofit/>
           </a:bodyPr>
           <a:lstStyle/>
           <a:p>
-            <a:pPr marL="0" indent="0" algn="l">
+            <a:pPr marL="285750" indent="-285750" algn="l">
               <a:lnSpc>
                 <a:spcPct val="150000"/>
               </a:lnSpc>
-              <a:buNone/>
-            </a:pPr>
-            <a:r>
-              <a:rPr>
+              <a:buFont typeface="Arial" panose="020B0604020202020204" pitchFamily="34" charset="0"/>
+              <a:buChar char="•"/>
+            </a:pPr>
+            <a:r>
+              <a:rPr lang="en-US" sz="2400" dirty="0">
                 <a:solidFill>
                   <a:srgbClr val="17212B"/>
                 </a:solidFill>
@@ -1411,34 +1475,19 @@
                 <a:ea typeface="Aptos"/>
                 <a:cs typeface="Aptos"/>
               </a:rPr>
-              <a:t>Alcohol use disorder (AUD) is clinically complex and often co-occurs with psychiatric, substance-use, liver-related, behavioral, socioeconomic, and family-history factors. This study used the All of Us Research Program to characterize conditions associated with AUD across two complementary data sources: participant-reported survey data and electronic health record (EHR) diagnosis data.</a:t>
-            </a:r>
-          </a:p>
-          <a:p>
-            <a:pPr marL="0" indent="0" algn="l">
+              <a:t>Alcohol use disorder (AUD) is clinically complex and may be associated with mental health, substance use, liver disease, family history, socioeconomic background, and other life-context factors.</a:t>
+            </a:r>
+          </a:p>
+          <a:p>
+            <a:pPr marL="285750" indent="-285750" algn="l">
               <a:lnSpc>
                 <a:spcPct val="150000"/>
               </a:lnSpc>
-              <a:buNone/>
-            </a:pPr>
-            <a:endParaRPr>
-              <a:solidFill>
-                <a:srgbClr val="17212B"/>
-              </a:solidFill>
-              <a:latin typeface="Aptos"/>
-              <a:ea typeface="Aptos"/>
-              <a:cs typeface="Aptos"/>
-            </a:endParaRPr>
-          </a:p>
-          <a:p>
-            <a:pPr marL="0" indent="0" algn="l">
-              <a:lnSpc>
-                <a:spcPct val="150000"/>
-              </a:lnSpc>
-              <a:buNone/>
-            </a:pPr>
-            <a:r>
-              <a:rPr>
+              <a:buFont typeface="Arial" panose="020B0604020202020204" pitchFamily="34" charset="0"/>
+              <a:buChar char="•"/>
+            </a:pPr>
+            <a:r>
+              <a:rPr lang="en-US" sz="2400" dirty="0">
                 <a:solidFill>
                   <a:srgbClr val="17212B"/>
                 </a:solidFill>
@@ -1446,34 +1495,19 @@
                 <a:ea typeface="Aptos"/>
                 <a:cs typeface="Aptos"/>
               </a:rPr>
-              <a:t>Survey-based AUD was defined from the Personal and Family Health History survey, while EHR-based AUD was defined from clinical diagnosis records. Candidate predictors included approximately 150 survey-reported conditions and the top 1,000 most prevalent non-AUD EHR conditions. Each condition was tested one at a time using logistic regression with covariate adjustment. Models included a basic demographic adjustment set and an expanded set incorporating behavioral, socioeconomic, and family-history variables.</a:t>
-            </a:r>
-          </a:p>
-          <a:p>
-            <a:pPr marL="0" indent="0" algn="l">
+              <a:t>The All of Us Research Program links participant survey responses with electronic health record (EHR) data, enabling large-scale analysis of AUD-associated clinical patterns.</a:t>
+            </a:r>
+          </a:p>
+          <a:p>
+            <a:pPr marL="285750" indent="-285750" algn="l">
               <a:lnSpc>
                 <a:spcPct val="150000"/>
               </a:lnSpc>
-              <a:buNone/>
-            </a:pPr>
-            <a:endParaRPr>
-              <a:solidFill>
-                <a:srgbClr val="17212B"/>
-              </a:solidFill>
-              <a:latin typeface="Aptos"/>
-              <a:ea typeface="Aptos"/>
-              <a:cs typeface="Aptos"/>
-            </a:endParaRPr>
-          </a:p>
-          <a:p>
-            <a:pPr marL="0" indent="0" algn="l">
-              <a:lnSpc>
-                <a:spcPct val="150000"/>
-              </a:lnSpc>
-              <a:buNone/>
-            </a:pPr>
-            <a:r>
-              <a:rPr>
+              <a:buFont typeface="Arial" panose="020B0604020202020204" pitchFamily="34" charset="0"/>
+              <a:buChar char="•"/>
+            </a:pPr>
+            <a:r>
+              <a:rPr lang="en-US" sz="2400" dirty="0">
                 <a:solidFill>
                   <a:srgbClr val="17212B"/>
                 </a:solidFill>
@@ -1481,7 +1515,47 @@
                 <a:ea typeface="Aptos"/>
                 <a:cs typeface="Aptos"/>
               </a:rPr>
-              <a:t>Across both survey and EHR analyses, the strongest AUD-associated conditions clustered around substance-use-related conditions, psychiatric conditions, and liver or pancreatic disease. Survey and EHR data were not interchangeable, but they provided complementary evidence for consistent AUD-associated comorbidity patterns.</a:t>
+              <a:t>Survey data provide participant-reported disease history and background covariates, while EHR data provide clinically documented diagnoses.</a:t>
+            </a:r>
+          </a:p>
+          <a:p>
+            <a:pPr marL="285750" indent="-285750" algn="l">
+              <a:lnSpc>
+                <a:spcPct val="150000"/>
+              </a:lnSpc>
+              <a:buFont typeface="Arial" panose="020B0604020202020204" pitchFamily="34" charset="0"/>
+              <a:buChar char="•"/>
+            </a:pPr>
+            <a:r>
+              <a:rPr lang="en-US" sz="2400" dirty="0">
+                <a:solidFill>
+                  <a:srgbClr val="17212B"/>
+                </a:solidFill>
+                <a:latin typeface="Aptos"/>
+                <a:ea typeface="Aptos"/>
+                <a:cs typeface="Aptos"/>
+              </a:rPr>
+              <a:t>This study used both survey-derived and EHR-derived AUD definitions to identify clinical conditions associated with AUD after covariate adjustment.</a:t>
+            </a:r>
+          </a:p>
+          <a:p>
+            <a:pPr marL="285750" indent="-285750" algn="l">
+              <a:lnSpc>
+                <a:spcPct val="150000"/>
+              </a:lnSpc>
+              <a:buFont typeface="Arial" panose="020B0604020202020204" pitchFamily="34" charset="0"/>
+              <a:buChar char="•"/>
+            </a:pPr>
+            <a:r>
+              <a:rPr lang="en-US" sz="2400" dirty="0">
+                <a:solidFill>
+                  <a:srgbClr val="17212B"/>
+                </a:solidFill>
+                <a:latin typeface="Aptos"/>
+                <a:ea typeface="Aptos"/>
+                <a:cs typeface="Aptos"/>
+              </a:rPr>
+              <a:t>The main goal was to compare whether similar AUD-associated clinical themes appear across survey and EHR data.</a:t>
             </a:r>
           </a:p>
         </p:txBody>
@@ -1502,8 +1576,8 @@
         </p:nvSpPr>
         <p:spPr>
           <a:xfrm>
-            <a:off x="777240" y="14538960"/>
-            <a:ext cx="12862560" cy="8101584"/>
+            <a:off x="777240" y="14625248"/>
+            <a:ext cx="12862560" cy="7360919"/>
           </a:xfrm>
           <a:prstGeom prst="roundRect">
             <a:avLst>
@@ -1551,7 +1625,7 @@
         </p:nvSpPr>
         <p:spPr>
           <a:xfrm>
-            <a:off x="1033272" y="14716515"/>
+            <a:off x="1033272" y="14827356"/>
             <a:ext cx="12350496" cy="320040"/>
           </a:xfrm>
           <a:prstGeom prst="rect">
@@ -1561,7 +1635,7 @@
         </p:spPr>
         <p:txBody>
           <a:bodyPr wrap="square" lIns="0" tIns="0" rIns="0" bIns="0" anchor="t">
-            <a:normAutofit lnSpcReduction="10000"/>
+            <a:noAutofit/>
           </a:bodyPr>
           <a:lstStyle/>
           <a:p>
@@ -1569,7 +1643,7 @@
               <a:buNone/>
             </a:pPr>
             <a:r>
-              <a:rPr sz="2200" b="1">
+              <a:rPr sz="2800" b="1" dirty="0">
                 <a:solidFill>
                   <a:srgbClr val="0F766E"/>
                 </a:solidFill>
@@ -1584,48 +1658,6 @@
       </p:sp>
       <p:sp>
         <p:nvSpPr>
-          <p:cNvPr id="33" name="Shape 31">
-            <a:extLst>
-              <a:ext uri="{FF2B5EF4-FFF2-40B4-BE49-F238E27FC236}">
-                <a16:creationId xmlns:a16="http://schemas.microsoft.com/office/drawing/2014/main" id="{33480E40-EB3A-4362-B113-0E9D8DBEC527}"/>
-              </a:ext>
-            </a:extLst>
-          </p:cNvPr>
-          <p:cNvSpPr>
-            <a:spLocks noGrp="1"/>
-          </p:cNvSpPr>
-          <p:nvPr/>
-        </p:nvSpPr>
-        <p:spPr>
-          <a:xfrm>
-            <a:off x="1143000" y="15356595"/>
-            <a:ext cx="12131040" cy="6881613"/>
-          </a:xfrm>
-          <a:prstGeom prst="roundRect">
-            <a:avLst>
-              <a:gd name="adj" fmla="val 1569"/>
-            </a:avLst>
-          </a:prstGeom>
-          <a:solidFill>
-            <a:srgbClr val="F2F5F8"/>
-          </a:solidFill>
-          <a:ln w="19050">
-            <a:solidFill>
-              <a:srgbClr val="7C8B99"/>
-            </a:solidFill>
-            <a:prstDash val="solid"/>
-          </a:ln>
-        </p:spPr>
-        <p:txBody>
-          <a:bodyPr/>
-          <a:lstStyle/>
-          <a:p>
-            <a:endParaRPr/>
-          </a:p>
-        </p:txBody>
-      </p:sp>
-      <p:sp>
-        <p:nvSpPr>
           <p:cNvPr id="36" name="Shape 34">
             <a:extLst>
               <a:ext uri="{FF2B5EF4-FFF2-40B4-BE49-F238E27FC236}">
@@ -1640,8 +1672,8 @@
         </p:nvSpPr>
         <p:spPr>
           <a:xfrm>
-            <a:off x="777240" y="23097743"/>
-            <a:ext cx="12862560" cy="7320187"/>
+            <a:off x="777240" y="22318718"/>
+            <a:ext cx="12862560" cy="8815015"/>
           </a:xfrm>
           <a:prstGeom prst="roundRect">
             <a:avLst>
@@ -1689,7 +1721,7 @@
         </p:nvSpPr>
         <p:spPr>
           <a:xfrm>
-            <a:off x="1033272" y="23270670"/>
+            <a:off x="1033272" y="22511891"/>
             <a:ext cx="12350496" cy="320040"/>
           </a:xfrm>
           <a:prstGeom prst="rect">
@@ -1699,7 +1731,7 @@
         </p:spPr>
         <p:txBody>
           <a:bodyPr wrap="square" lIns="0" tIns="0" rIns="0" bIns="0" anchor="t">
-            <a:normAutofit lnSpcReduction="10000"/>
+            <a:noAutofit/>
           </a:bodyPr>
           <a:lstStyle/>
           <a:p>
@@ -1707,7 +1739,7 @@
               <a:buNone/>
             </a:pPr>
             <a:r>
-              <a:rPr sz="2200" b="1">
+              <a:rPr sz="2800" b="1" dirty="0">
                 <a:solidFill>
                   <a:srgbClr val="0F766E"/>
                 </a:solidFill>
@@ -1736,8 +1768,8 @@
         </p:nvSpPr>
         <p:spPr>
           <a:xfrm>
-            <a:off x="14142720" y="4709160"/>
-            <a:ext cx="12862560" cy="502920"/>
+            <a:off x="14142720" y="4411301"/>
+            <a:ext cx="12862560" cy="800779"/>
           </a:xfrm>
           <a:prstGeom prst="rect">
             <a:avLst/>
@@ -1778,7 +1810,7 @@
         </p:nvSpPr>
         <p:spPr>
           <a:xfrm>
-            <a:off x="14343888" y="4773168"/>
+            <a:off x="14398752" y="4515237"/>
             <a:ext cx="12460224" cy="384048"/>
           </a:xfrm>
           <a:prstGeom prst="rect">
@@ -1788,7 +1820,7 @@
         </p:spPr>
         <p:txBody>
           <a:bodyPr wrap="square" lIns="0" tIns="0" rIns="0" bIns="0" anchor="t">
-            <a:normAutofit/>
+            <a:noAutofit/>
           </a:bodyPr>
           <a:lstStyle/>
           <a:p>
@@ -1796,7 +1828,7 @@
               <a:buNone/>
             </a:pPr>
             <a:r>
-              <a:rPr sz="2400" b="1">
+              <a:rPr sz="4000" b="1" dirty="0">
                 <a:solidFill>
                   <a:srgbClr val="FFFFFF"/>
                 </a:solidFill>
@@ -1874,8 +1906,8 @@
         </p:nvSpPr>
         <p:spPr>
           <a:xfrm>
-            <a:off x="14142720" y="20651932"/>
-            <a:ext cx="12862560" cy="502920"/>
+            <a:off x="14142720" y="20715731"/>
+            <a:ext cx="12862560" cy="765815"/>
           </a:xfrm>
           <a:prstGeom prst="rect">
             <a:avLst/>
@@ -1916,7 +1948,7 @@
         </p:nvSpPr>
         <p:spPr>
           <a:xfrm>
-            <a:off x="14343888" y="20715732"/>
+            <a:off x="14398752" y="20867887"/>
             <a:ext cx="12460224" cy="384048"/>
           </a:xfrm>
           <a:prstGeom prst="rect">
@@ -1926,7 +1958,7 @@
         </p:spPr>
         <p:txBody>
           <a:bodyPr wrap="square" lIns="0" tIns="0" rIns="0" bIns="0" anchor="t">
-            <a:normAutofit/>
+            <a:noAutofit/>
           </a:bodyPr>
           <a:lstStyle/>
           <a:p>
@@ -1934,7 +1966,7 @@
               <a:buNone/>
             </a:pPr>
             <a:r>
-              <a:rPr sz="2400" b="1">
+              <a:rPr sz="4000" b="1" dirty="0">
                 <a:solidFill>
                   <a:srgbClr val="FFFFFF"/>
                 </a:solidFill>
@@ -2022,7 +2054,7 @@
         </p:spPr>
         <p:txBody>
           <a:bodyPr wrap="square" lIns="0" tIns="0" rIns="0" bIns="0" anchor="t">
-            <a:normAutofit lnSpcReduction="10000"/>
+            <a:noAutofit/>
           </a:bodyPr>
           <a:lstStyle/>
           <a:p>
@@ -2030,7 +2062,7 @@
               <a:buNone/>
             </a:pPr>
             <a:r>
-              <a:rPr sz="2200" b="1" dirty="0">
+              <a:rPr sz="2800" b="1" dirty="0">
                 <a:solidFill>
                   <a:srgbClr val="D39C2D"/>
                 </a:solidFill>
@@ -2040,48 +2072,6 @@
               </a:rPr>
               <a:t>Survey–EHR Comparison: Convergent AUD Signals</a:t>
             </a:r>
-          </a:p>
-        </p:txBody>
-      </p:sp>
-      <p:sp>
-        <p:nvSpPr>
-          <p:cNvPr id="81" name="Shape 79">
-            <a:extLst>
-              <a:ext uri="{FF2B5EF4-FFF2-40B4-BE49-F238E27FC236}">
-                <a16:creationId xmlns:a16="http://schemas.microsoft.com/office/drawing/2014/main" id="{9CFA1D9C-6846-41CD-87FC-6DE4EEF950FF}"/>
-              </a:ext>
-            </a:extLst>
-          </p:cNvPr>
-          <p:cNvSpPr>
-            <a:spLocks noGrp="1"/>
-          </p:cNvSpPr>
-          <p:nvPr/>
-        </p:nvSpPr>
-        <p:spPr>
-          <a:xfrm>
-            <a:off x="27873960" y="6035040"/>
-            <a:ext cx="12131040" cy="9006840"/>
-          </a:xfrm>
-          <a:prstGeom prst="roundRect">
-            <a:avLst>
-              <a:gd name="adj" fmla="val 1218"/>
-            </a:avLst>
-          </a:prstGeom>
-          <a:solidFill>
-            <a:srgbClr val="F2F5F8"/>
-          </a:solidFill>
-          <a:ln w="19050">
-            <a:solidFill>
-              <a:srgbClr val="7C8B99"/>
-            </a:solidFill>
-            <a:prstDash val="solid"/>
-          </a:ln>
-        </p:spPr>
-        <p:txBody>
-          <a:bodyPr/>
-          <a:lstStyle/>
-          <a:p>
-            <a:endParaRPr/>
           </a:p>
         </p:txBody>
       </p:sp>
@@ -2160,12 +2150,12 @@
         </p:spPr>
         <p:txBody>
           <a:bodyPr wrap="square" lIns="0" tIns="0" rIns="0" bIns="0" anchor="t">
-            <a:normAutofit lnSpcReduction="10000"/>
+            <a:noAutofit/>
           </a:bodyPr>
           <a:lstStyle/>
           <a:p>
             <a:r>
-              <a:rPr lang="en-US" sz="2200" b="1" dirty="0">
+              <a:rPr lang="en-US" sz="2800" b="1" dirty="0">
                 <a:solidFill>
                   <a:srgbClr val="D39C2D"/>
                 </a:solidFill>
@@ -2176,7 +2166,7 @@
               <a:t>Basic</a:t>
             </a:r>
             <a:r>
-              <a:rPr lang="en-US" altLang="zh-CN" sz="2200" b="1" dirty="0">
+              <a:rPr lang="en-US" altLang="zh-CN" sz="2800" b="1" dirty="0">
                 <a:solidFill>
                   <a:srgbClr val="D39C2D"/>
                 </a:solidFill>
@@ -2186,7 +2176,7 @@
               <a:t>–</a:t>
             </a:r>
             <a:r>
-              <a:rPr lang="en-US" sz="2200" b="1" dirty="0">
+              <a:rPr lang="en-US" sz="2800" b="1" dirty="0">
                 <a:solidFill>
                   <a:srgbClr val="D39C2D"/>
                 </a:solidFill>
@@ -2197,7 +2187,7 @@
               <a:t>Expanded Adjustment Model </a:t>
             </a:r>
             <a:r>
-              <a:rPr sz="2200" b="1" dirty="0">
+              <a:rPr sz="2800" b="1" dirty="0">
                 <a:solidFill>
                   <a:srgbClr val="D39C2D"/>
                 </a:solidFill>
@@ -2227,7 +2217,7 @@
         <p:spPr>
           <a:xfrm>
             <a:off x="27508200" y="25054560"/>
-            <a:ext cx="12862560" cy="5363370"/>
+            <a:ext cx="12862560" cy="6041902"/>
           </a:xfrm>
           <a:prstGeom prst="roundRect">
             <a:avLst>
@@ -2285,7 +2275,7 @@
         </p:spPr>
         <p:txBody>
           <a:bodyPr wrap="square" lIns="0" tIns="0" rIns="0" bIns="0" anchor="t">
-            <a:normAutofit lnSpcReduction="10000"/>
+            <a:noAutofit/>
           </a:bodyPr>
           <a:lstStyle/>
           <a:p>
@@ -2293,7 +2283,7 @@
               <a:buNone/>
             </a:pPr>
             <a:r>
-              <a:rPr sz="2200" b="1">
+              <a:rPr sz="2800" b="1" dirty="0">
                 <a:solidFill>
                   <a:srgbClr val="D39C2D"/>
                 </a:solidFill>
@@ -2343,7 +2333,7 @@
               <a:buChar char="•"/>
             </a:pPr>
             <a:r>
-              <a:rPr>
+              <a:rPr sz="2400" dirty="0">
                 <a:solidFill>
                   <a:srgbClr val="17212B"/>
                 </a:solidFill>
@@ -2362,7 +2352,7 @@
               <a:buChar char="•"/>
             </a:pPr>
             <a:r>
-              <a:rPr>
+              <a:rPr sz="2400" dirty="0">
                 <a:solidFill>
                   <a:srgbClr val="17212B"/>
                 </a:solidFill>
@@ -2381,7 +2371,7 @@
               <a:buChar char="•"/>
             </a:pPr>
             <a:r>
-              <a:rPr>
+              <a:rPr sz="2400" dirty="0">
                 <a:solidFill>
                   <a:srgbClr val="17212B"/>
                 </a:solidFill>
@@ -2400,7 +2390,7 @@
               <a:buChar char="•"/>
             </a:pPr>
             <a:r>
-              <a:rPr>
+              <a:rPr sz="2400" dirty="0">
                 <a:solidFill>
                   <a:srgbClr val="17212B"/>
                 </a:solidFill>
@@ -2411,25 +2401,6 @@
               <a:t>Expanded covariate adjustment helped account for demographic, behavioral, socioeconomic, and family-history factors, making the observed associations more conservative and interpretable.</a:t>
             </a:r>
           </a:p>
-          <a:p>
-            <a:pPr marL="342900" indent="-342900">
-              <a:lnSpc>
-                <a:spcPct val="160000"/>
-              </a:lnSpc>
-              <a:buChar char="•"/>
-            </a:pPr>
-            <a:r>
-              <a:rPr>
-                <a:solidFill>
-                  <a:srgbClr val="17212B"/>
-                </a:solidFill>
-                <a:latin typeface="Aptos"/>
-                <a:ea typeface="Aptos"/>
-                <a:cs typeface="Aptos"/>
-              </a:rPr>
-              <a:t>These findings suggest that linked survey and EHR data from All of Us can help characterize the broader clinical and social context of AUD.</a:t>
-            </a:r>
-          </a:p>
         </p:txBody>
       </p:sp>
       <p:sp>
@@ -2442,14 +2413,14 @@
             </a:extLst>
           </p:cNvPr>
           <p:cNvSpPr>
-            <a:spLocks noGrp="1"/>
-          </p:cNvSpPr>
-          <p:nvPr/>
-        </p:nvSpPr>
-        <p:spPr>
-          <a:xfrm>
-            <a:off x="-6135" y="30890052"/>
-            <a:ext cx="41148000" cy="2055906"/>
+            <a:spLocks noGrp="1" noRot="1" noMove="1" noResize="1" noEditPoints="1" noAdjustHandles="1" noChangeArrowheads="1" noChangeShapeType="1"/>
+          </p:cNvSpPr>
+          <p:nvPr/>
+        </p:nvSpPr>
+        <p:spPr>
+          <a:xfrm>
+            <a:off x="-6135" y="31351224"/>
+            <a:ext cx="41148000" cy="1594733"/>
           </a:xfrm>
           <a:prstGeom prst="rect">
             <a:avLst/>
@@ -2488,7 +2459,7 @@
         </p:nvSpPr>
         <p:spPr>
           <a:xfrm>
-            <a:off x="868680" y="31222603"/>
+            <a:off x="868680" y="31620657"/>
             <a:ext cx="6400800" cy="320040"/>
           </a:xfrm>
           <a:prstGeom prst="rect">
@@ -2506,7 +2477,7 @@
               <a:buNone/>
             </a:pPr>
             <a:r>
-              <a:rPr sz="2000" b="1">
+              <a:rPr sz="2000" b="1" dirty="0">
                 <a:solidFill>
                   <a:srgbClr val="16324F"/>
                 </a:solidFill>
@@ -2535,7 +2506,7 @@
         </p:nvSpPr>
         <p:spPr>
           <a:xfrm>
-            <a:off x="868680" y="31679803"/>
+            <a:off x="868680" y="32061529"/>
             <a:ext cx="9646920" cy="640080"/>
           </a:xfrm>
           <a:prstGeom prst="rect">
@@ -2550,6 +2521,7 @@
           <a:lstStyle/>
           <a:p>
             <a:r>
+              <a:rPr dirty="0"/>
               <a:t>Funded by grants from National Institute on Alcoholism and Alcohol Abuse (NIAAA) T32 AA007456, and National Institute of Drug Abuse (NIDA) grants DP1 DA054373.</a:t>
             </a:r>
           </a:p>
@@ -2614,7 +2586,7 @@
         </p:blipFill>
         <p:spPr>
           <a:xfrm>
-            <a:off x="32274163" y="929408"/>
+            <a:off x="28869005" y="2707457"/>
             <a:ext cx="4657701" cy="886413"/>
           </a:xfrm>
           <a:prstGeom prst="rect">
@@ -2644,7 +2616,7 @@
         </p:blipFill>
         <p:spPr>
           <a:xfrm>
-            <a:off x="32274163" y="2392930"/>
+            <a:off x="34180732" y="2723713"/>
             <a:ext cx="6098588" cy="744456"/>
           </a:xfrm>
           <a:prstGeom prst="rect">
@@ -2668,8 +2640,8 @@
         </p:nvSpPr>
         <p:spPr>
           <a:xfrm>
-            <a:off x="1097280" y="23873132"/>
-            <a:ext cx="11856720" cy="5879592"/>
+            <a:off x="1097280" y="23004093"/>
+            <a:ext cx="11856720" cy="7329205"/>
           </a:xfrm>
           <a:prstGeom prst="rect">
             <a:avLst/>
@@ -2678,7 +2650,7 @@
         </p:spPr>
         <p:txBody>
           <a:bodyPr wrap="square" lIns="762" tIns="762" rIns="762" bIns="762" anchor="t">
-            <a:normAutofit/>
+            <a:noAutofit/>
           </a:bodyPr>
           <a:lstStyle/>
           <a:p>
@@ -2686,10 +2658,11 @@
               <a:buChar char="•"/>
             </a:pPr>
             <a:r>
-              <a:rPr b="1"/>
+              <a:rPr sz="2400" b="1" dirty="0"/>
               <a:t>Data source:</a:t>
             </a:r>
             <a:r>
+              <a:rPr sz="2400" dirty="0"/>
               <a:t> All of Us Research Program survey and electronic health record (EHR) data</a:t>
             </a:r>
           </a:p>
@@ -2698,7 +2671,7 @@
               <a:buChar char="•"/>
             </a:pPr>
             <a:r>
-              <a:rPr b="1"/>
+              <a:rPr sz="2400" b="1" dirty="0"/>
               <a:t>AUD outcome definitions:</a:t>
             </a:r>
           </a:p>
@@ -2707,6 +2680,7 @@
               <a:buChar char="•"/>
             </a:pPr>
             <a:r>
+              <a:rPr sz="2400" dirty="0"/>
               <a:t>Survey AUD: defined from the Personal and Family Health History survey</a:t>
             </a:r>
           </a:p>
@@ -2715,6 +2689,7 @@
               <a:buChar char="•"/>
             </a:pPr>
             <a:r>
+              <a:rPr sz="2400" dirty="0"/>
               <a:t>EHR AUD: defined from clinical diagnosis records</a:t>
             </a:r>
           </a:p>
@@ -2723,7 +2698,7 @@
               <a:buChar char="•"/>
             </a:pPr>
             <a:r>
-              <a:rPr b="1"/>
+              <a:rPr sz="2400" b="1" dirty="0"/>
               <a:t>Candidate condition screens:</a:t>
             </a:r>
           </a:p>
@@ -2732,6 +2707,7 @@
               <a:buChar char="•"/>
             </a:pPr>
             <a:r>
+              <a:rPr sz="2400" dirty="0"/>
               <a:t>Survey screen: ~150 survey-reported diseases/conditions</a:t>
             </a:r>
           </a:p>
@@ -2740,6 +2716,7 @@
               <a:buChar char="•"/>
             </a:pPr>
             <a:r>
+              <a:rPr sz="2400" dirty="0"/>
               <a:t>EHR screen: top 1,000 most prevalent non-AUD EHR conditions</a:t>
             </a:r>
           </a:p>
@@ -2748,7 +2725,7 @@
               <a:buChar char="•"/>
             </a:pPr>
             <a:r>
-              <a:rPr b="1"/>
+              <a:rPr sz="2400" b="1" dirty="0"/>
               <a:t>Modeling approach:</a:t>
             </a:r>
           </a:p>
@@ -2757,7 +2734,8 @@
               <a:buChar char="•"/>
             </a:pPr>
             <a:r>
-              <a:t>Tested each candidate condition one at a time</a:t>
+              <a:rPr sz="2400" dirty="0"/>
+              <a:t>Used logistic regression to estimate each condition’s association with binary AUD status</a:t>
             </a:r>
           </a:p>
           <a:p>
@@ -2765,7 +2743,17 @@
               <a:buChar char="•"/>
             </a:pPr>
             <a:r>
-              <a:t>Used logistic regression to estimate each condition’s association with binary AUD status</a:t>
+              <a:rPr lang="en-US" sz="2400" dirty="0"/>
+              <a:t>Reported adjusted odds ratios and confidence intervals</a:t>
+            </a:r>
+          </a:p>
+          <a:p>
+            <a:pPr marL="285750" indent="-285750">
+              <a:buChar char="•"/>
+            </a:pPr>
+            <a:r>
+              <a:rPr sz="2400" b="1" dirty="0"/>
+              <a:t>Covariate adjustment:</a:t>
             </a:r>
           </a:p>
           <a:p>
@@ -2773,7 +2761,26 @@
               <a:buChar char="•"/>
             </a:pPr>
             <a:r>
-              <a:t>Reported adjusted odds ratios and confidence intervals</a:t>
+              <a:rPr sz="2400" dirty="0"/>
+              <a:t>Basic model: age, race/ethnicity, sex at birth, education</a:t>
+            </a:r>
+          </a:p>
+          <a:p>
+            <a:pPr marL="742950" indent="-285750">
+              <a:buChar char="•"/>
+            </a:pPr>
+            <a:r>
+              <a:rPr sz="2400" dirty="0"/>
+              <a:t>Expanded model: marital status, health insurance, employment, household income, smoking history, and AUD family history</a:t>
+            </a:r>
+          </a:p>
+          <a:p>
+            <a:pPr marL="742950" indent="-285750">
+              <a:buChar char="•"/>
+            </a:pPr>
+            <a:r>
+              <a:rPr sz="2400" dirty="0"/>
+              <a:t>Education was removed from the final expanded model after losing independent significance under richer adjustment</a:t>
             </a:r>
           </a:p>
           <a:p>
@@ -2781,8 +2788,8 @@
               <a:buChar char="•"/>
             </a:pPr>
             <a:r>
-              <a:rPr b="1"/>
-              <a:t>Covariate adjustment:</a:t>
+              <a:rPr sz="2400" b="1" dirty="0"/>
+              <a:t>Survey–EHR comparison:</a:t>
             </a:r>
           </a:p>
           <a:p>
@@ -2790,7 +2797,8 @@
               <a:buChar char="•"/>
             </a:pPr>
             <a:r>
-              <a:t>Basic model: age, race/ethnicity, sex at birth, education</a:t>
+              <a:rPr sz="2400" dirty="0"/>
+              <a:t>Matched condition names across survey and EHR sources using text similarity</a:t>
             </a:r>
           </a:p>
           <a:p>
@@ -2798,39 +2806,7 @@
               <a:buChar char="•"/>
             </a:pPr>
             <a:r>
-              <a:t>Expanded model: marital status, health insurance, employment, household income, smoking history, and AUD family history</a:t>
-            </a:r>
-          </a:p>
-          <a:p>
-            <a:pPr marL="742950" indent="-285750">
-              <a:buChar char="•"/>
-            </a:pPr>
-            <a:r>
-              <a:t>Education was removed from the final expanded model after losing independent significance under richer adjustment</a:t>
-            </a:r>
-          </a:p>
-          <a:p>
-            <a:pPr marL="285750" indent="-285750">
-              <a:buChar char="•"/>
-            </a:pPr>
-            <a:r>
-              <a:rPr b="1"/>
-              <a:t>Survey–EHR comparison:</a:t>
-            </a:r>
-          </a:p>
-          <a:p>
-            <a:pPr marL="742950" indent="-285750">
-              <a:buChar char="•"/>
-            </a:pPr>
-            <a:r>
-              <a:t>Matched similar condition names across survey and EHR sources using text similarity</a:t>
-            </a:r>
-          </a:p>
-          <a:p>
-            <a:pPr marL="742950" indent="-285750">
-              <a:buChar char="•"/>
-            </a:pPr>
-            <a:r>
+              <a:rPr sz="2400" dirty="0"/>
               <a:t>Compared adjusted odds ratios to identify convergent AUD-associated clinical signals</a:t>
             </a:r>
           </a:p>
@@ -2852,8 +2828,8 @@
         </p:blipFill>
         <p:spPr>
           <a:xfrm>
-            <a:off x="15488575" y="6168458"/>
-            <a:ext cx="10170850" cy="5724144"/>
+            <a:off x="15180028" y="6058730"/>
+            <a:ext cx="10540357" cy="5932102"/>
           </a:xfrm>
           <a:prstGeom prst="rect">
             <a:avLst/>
@@ -2886,7 +2862,7 @@
         </p:spPr>
         <p:txBody>
           <a:bodyPr wrap="square" lIns="0" tIns="0" rIns="0" bIns="0" anchor="t">
-            <a:normAutofit lnSpcReduction="10000"/>
+            <a:noAutofit/>
           </a:bodyPr>
           <a:lstStyle/>
           <a:p>
@@ -2894,7 +2870,7 @@
               <a:buNone/>
             </a:pPr>
             <a:r>
-              <a:rPr sz="2200" b="1">
+              <a:rPr sz="2800" b="1" dirty="0">
                 <a:solidFill>
                   <a:srgbClr val="16324F"/>
                 </a:solidFill>
@@ -2907,30 +2883,6 @@
           </a:p>
         </p:txBody>
       </p:sp>
-      <p:pic>
-        <p:nvPicPr>
-          <p:cNvPr id="183" name="图片 120"/>
-          <p:cNvPicPr>
-            <a:picLocks noChangeAspect="1"/>
-          </p:cNvPicPr>
-          <p:nvPr/>
-        </p:nvPicPr>
-        <p:blipFill>
-          <a:blip r:embed="rId6"/>
-          <a:stretch>
-            <a:fillRect/>
-          </a:stretch>
-        </p:blipFill>
-        <p:spPr>
-          <a:xfrm>
-            <a:off x="14900742" y="13352323"/>
-            <a:ext cx="10980756" cy="6001219"/>
-          </a:xfrm>
-          <a:prstGeom prst="rect">
-            <a:avLst/>
-          </a:prstGeom>
-        </p:spPr>
-      </p:pic>
       <p:sp>
         <p:nvSpPr>
           <p:cNvPr id="122" name="Shape 75">
@@ -2947,8 +2899,8 @@
         </p:nvSpPr>
         <p:spPr>
           <a:xfrm>
-            <a:off x="27508200" y="4714021"/>
-            <a:ext cx="12862560" cy="502920"/>
+            <a:off x="27508200" y="4411299"/>
+            <a:ext cx="12862560" cy="800780"/>
           </a:xfrm>
           <a:prstGeom prst="rect">
             <a:avLst/>
@@ -2989,7 +2941,7 @@
         </p:nvSpPr>
         <p:spPr>
           <a:xfrm>
-            <a:off x="27709368" y="4778029"/>
+            <a:off x="27764232" y="4517038"/>
             <a:ext cx="12460224" cy="384048"/>
           </a:xfrm>
           <a:prstGeom prst="rect">
@@ -2999,7 +2951,7 @@
         </p:spPr>
         <p:txBody>
           <a:bodyPr wrap="square" lIns="0" tIns="0" rIns="0" bIns="0" anchor="t">
-            <a:normAutofit/>
+            <a:noAutofit/>
           </a:bodyPr>
           <a:lstStyle/>
           <a:p>
@@ -3007,7 +2959,7 @@
               <a:buNone/>
             </a:pPr>
             <a:r>
-              <a:rPr sz="2400" b="1">
+              <a:rPr sz="4000" b="1" dirty="0">
                 <a:solidFill>
                   <a:srgbClr val="FFFFFF"/>
                 </a:solidFill>
@@ -3036,8 +2988,8 @@
         </p:nvSpPr>
         <p:spPr>
           <a:xfrm>
-            <a:off x="14142720" y="21387816"/>
-            <a:ext cx="12862560" cy="9030114"/>
+            <a:off x="14136585" y="21687173"/>
+            <a:ext cx="12862560" cy="9431087"/>
           </a:xfrm>
           <a:prstGeom prst="roundRect">
             <a:avLst>
@@ -3085,7 +3037,7 @@
         </p:nvSpPr>
         <p:spPr>
           <a:xfrm>
-            <a:off x="14398752" y="21749004"/>
+            <a:off x="14336650" y="21907683"/>
             <a:ext cx="12350496" cy="320040"/>
           </a:xfrm>
           <a:prstGeom prst="rect">
@@ -3095,7 +3047,7 @@
         </p:spPr>
         <p:txBody>
           <a:bodyPr wrap="square" lIns="0" tIns="0" rIns="0" bIns="0" anchor="t">
-            <a:normAutofit lnSpcReduction="10000"/>
+            <a:noAutofit/>
           </a:bodyPr>
           <a:lstStyle/>
           <a:p>
@@ -3103,7 +3055,7 @@
               <a:buNone/>
             </a:pPr>
             <a:r>
-              <a:rPr sz="2200" b="1" dirty="0">
+              <a:rPr sz="2800" b="1" dirty="0">
                 <a:solidFill>
                   <a:srgbClr val="D39C2D"/>
                 </a:solidFill>
@@ -3125,15 +3077,15 @@
           <p:nvPr/>
         </p:nvPicPr>
         <p:blipFill>
-          <a:blip r:embed="rId7"/>
+          <a:blip r:embed="rId6"/>
           <a:stretch>
             <a:fillRect/>
           </a:stretch>
         </p:blipFill>
         <p:spPr>
           <a:xfrm>
-            <a:off x="28695014" y="6449610"/>
-            <a:ext cx="10488932" cy="8105620"/>
+            <a:off x="28154585" y="6530422"/>
+            <a:ext cx="11569789" cy="8940883"/>
           </a:xfrm>
           <a:prstGeom prst="rect">
             <a:avLst/>
@@ -3149,7 +3101,7 @@
           <p:nvPr/>
         </p:nvPicPr>
         <p:blipFill>
-          <a:blip r:embed="rId8"/>
+          <a:blip r:embed="rId7"/>
           <a:stretch>
             <a:fillRect/>
           </a:stretch>
@@ -3173,7 +3125,7 @@
           <p:nvPr/>
         </p:nvPicPr>
         <p:blipFill>
-          <a:blip r:embed="rId9"/>
+          <a:blip r:embed="rId8"/>
           <a:stretch>
             <a:fillRect/>
           </a:stretch>
@@ -3197,14 +3149,14 @@
           <p:nvPr/>
         </p:nvPicPr>
         <p:blipFill>
-          <a:blip r:embed="rId10"/>
+          <a:blip r:embed="rId9"/>
           <a:stretch>
             <a:fillRect/>
           </a:stretch>
         </p:blipFill>
         <p:spPr>
           <a:xfrm>
-            <a:off x="11136596" y="31208738"/>
+            <a:off x="11050570" y="31940697"/>
             <a:ext cx="2589230" cy="667810"/>
           </a:xfrm>
           <a:prstGeom prst="rect">
@@ -3221,14 +3173,14 @@
           <p:nvPr/>
         </p:nvPicPr>
         <p:blipFill>
-          <a:blip r:embed="rId11"/>
+          <a:blip r:embed="rId10"/>
           <a:stretch>
             <a:fillRect/>
           </a:stretch>
         </p:blipFill>
         <p:spPr>
           <a:xfrm>
-            <a:off x="11136596" y="32142046"/>
+            <a:off x="14232491" y="31937768"/>
             <a:ext cx="2559939" cy="673668"/>
           </a:xfrm>
           <a:prstGeom prst="rect">
@@ -3245,13 +3197,13 @@
           <p:nvPr/>
         </p:nvPicPr>
         <p:blipFill>
-          <a:blip r:embed="rId12"/>
+          <a:blip r:embed="rId11"/>
           <a:stretch/>
         </p:blipFill>
         <p:spPr>
           <a:xfrm>
-            <a:off x="34080450" y="30984555"/>
-            <a:ext cx="1866900" cy="1866900"/>
+            <a:off x="37936170" y="30674667"/>
+            <a:ext cx="2175510" cy="2175510"/>
           </a:xfrm>
           <a:prstGeom prst="rect">
             <a:avLst/>
@@ -3273,7 +3225,7 @@
           <p:nvPr/>
         </p:nvPicPr>
         <p:blipFill>
-          <a:blip r:embed="rId13">
+          <a:blip r:embed="rId12">
             <a:extLst>
               <a:ext uri="{28A0092B-C50C-407E-A947-70E740481C1C}">
                 <a14:useLocalDpi xmlns:a14="http://schemas.microsoft.com/office/drawing/2010/main" val="0"/>
@@ -3286,8 +3238,153 @@
         </p:blipFill>
         <p:spPr>
           <a:xfrm>
-            <a:off x="1406324" y="16036627"/>
-            <a:ext cx="11604392" cy="5512019"/>
+            <a:off x="1156436" y="15615133"/>
+            <a:ext cx="12350496" cy="5866414"/>
+          </a:xfrm>
+          <a:prstGeom prst="rect">
+            <a:avLst/>
+          </a:prstGeom>
+        </p:spPr>
+      </p:pic>
+      <p:grpSp>
+        <p:nvGrpSpPr>
+          <p:cNvPr id="7" name="组合 6">
+            <a:extLst>
+              <a:ext uri="{FF2B5EF4-FFF2-40B4-BE49-F238E27FC236}">
+                <a16:creationId xmlns:a16="http://schemas.microsoft.com/office/drawing/2014/main" id="{7002998B-32A3-51A8-473B-1DC9D80EDE03}"/>
+              </a:ext>
+            </a:extLst>
+          </p:cNvPr>
+          <p:cNvGrpSpPr/>
+          <p:nvPr/>
+        </p:nvGrpSpPr>
+        <p:grpSpPr>
+          <a:xfrm>
+            <a:off x="14142720" y="12582144"/>
+            <a:ext cx="12862560" cy="7772400"/>
+            <a:chOff x="14142720" y="21305520"/>
+            <a:chExt cx="12862560" cy="7772400"/>
+          </a:xfrm>
+        </p:grpSpPr>
+        <p:sp>
+          <p:nvSpPr>
+            <p:cNvPr id="11" name="Shape 70">
+              <a:extLst>
+                <a:ext uri="{FF2B5EF4-FFF2-40B4-BE49-F238E27FC236}">
+                  <a16:creationId xmlns:a16="http://schemas.microsoft.com/office/drawing/2014/main" id="{F6F34624-94F7-7454-03BA-4ACFD4AAF163}"/>
+                </a:ext>
+              </a:extLst>
+            </p:cNvPr>
+            <p:cNvSpPr/>
+            <p:nvPr/>
+          </p:nvSpPr>
+          <p:spPr>
+            <a:xfrm>
+              <a:off x="14142720" y="21305520"/>
+              <a:ext cx="12862560" cy="7772400"/>
+            </a:xfrm>
+            <a:prstGeom prst="roundRect">
+              <a:avLst>
+                <a:gd name="adj" fmla="val 1765"/>
+              </a:avLst>
+            </a:prstGeom>
+            <a:solidFill>
+              <a:srgbClr val="FFFFFF"/>
+            </a:solidFill>
+            <a:ln w="12700">
+              <a:solidFill>
+                <a:srgbClr val="CAD2D9"/>
+              </a:solidFill>
+              <a:prstDash val="solid"/>
+            </a:ln>
+            <a:effectLst>
+              <a:outerShdw blurRad="12700" dist="50800" dir="2700000" algn="bl" rotWithShape="0">
+                <a:srgbClr val="B9C1CA">
+                  <a:alpha val="12000"/>
+                </a:srgbClr>
+              </a:outerShdw>
+            </a:effectLst>
+          </p:spPr>
+          <p:txBody>
+            <a:bodyPr/>
+            <a:lstStyle/>
+            <a:p>
+              <a:endParaRPr lang="zh-CN" altLang="en-US"/>
+            </a:p>
+          </p:txBody>
+        </p:sp>
+        <p:sp>
+          <p:nvSpPr>
+            <p:cNvPr id="12" name="Text 71">
+              <a:extLst>
+                <a:ext uri="{FF2B5EF4-FFF2-40B4-BE49-F238E27FC236}">
+                  <a16:creationId xmlns:a16="http://schemas.microsoft.com/office/drawing/2014/main" id="{CD5BFD21-A9FD-381B-A61C-3E19C22BFB67}"/>
+                </a:ext>
+              </a:extLst>
+            </p:cNvPr>
+            <p:cNvSpPr/>
+            <p:nvPr/>
+          </p:nvSpPr>
+          <p:spPr>
+            <a:xfrm>
+              <a:off x="14398752" y="21470112"/>
+              <a:ext cx="12350496" cy="320040"/>
+            </a:xfrm>
+            <a:prstGeom prst="rect">
+              <a:avLst/>
+            </a:prstGeom>
+            <a:noFill/>
+            <a:ln/>
+          </p:spPr>
+          <p:txBody>
+            <a:bodyPr wrap="square" lIns="0" tIns="0" rIns="0" bIns="0" rtlCol="0" anchor="t">
+              <a:noAutofit/>
+            </a:bodyPr>
+            <a:lstStyle/>
+            <a:p>
+              <a:pPr marL="0" indent="0" algn="l">
+                <a:buNone/>
+              </a:pPr>
+              <a:r>
+                <a:rPr lang="en-US" sz="2800" b="1" dirty="0">
+                  <a:solidFill>
+                    <a:srgbClr val="16324F"/>
+                  </a:solidFill>
+                  <a:latin typeface="Aptos" pitchFamily="34" charset="0"/>
+                  <a:ea typeface="Aptos" pitchFamily="34" charset="-122"/>
+                  <a:cs typeface="Aptos" pitchFamily="34" charset="-120"/>
+                </a:rPr>
+                <a:t>Covariate Importance and Adjustment</a:t>
+              </a:r>
+              <a:endParaRPr lang="en-US" sz="2800" dirty="0"/>
+            </a:p>
+          </p:txBody>
+        </p:sp>
+      </p:grpSp>
+      <p:pic>
+        <p:nvPicPr>
+          <p:cNvPr id="14" name="图片 13">
+            <a:extLst>
+              <a:ext uri="{FF2B5EF4-FFF2-40B4-BE49-F238E27FC236}">
+                <a16:creationId xmlns:a16="http://schemas.microsoft.com/office/drawing/2014/main" id="{B96E2766-9AE3-BEC3-BE74-E0E54BAE2B53}"/>
+              </a:ext>
+            </a:extLst>
+          </p:cNvPr>
+          <p:cNvPicPr>
+            <a:picLocks noChangeAspect="1"/>
+          </p:cNvPicPr>
+          <p:nvPr/>
+        </p:nvPicPr>
+        <p:blipFill>
+          <a:blip r:embed="rId13"/>
+          <a:stretch>
+            <a:fillRect/>
+          </a:stretch>
+        </p:blipFill>
+        <p:spPr>
+          <a:xfrm>
+            <a:off x="14460854" y="13299740"/>
+            <a:ext cx="12226292" cy="6681931"/>
           </a:xfrm>
           <a:prstGeom prst="rect">
             <a:avLst/>
@@ -3296,10 +3393,10 @@
       </p:pic>
       <p:pic>
         <p:nvPicPr>
-          <p:cNvPr id="9" name="图片 8">
-            <a:extLst>
-              <a:ext uri="{FF2B5EF4-FFF2-40B4-BE49-F238E27FC236}">
-                <a16:creationId xmlns:a16="http://schemas.microsoft.com/office/drawing/2014/main" id="{298CCAE6-C9BC-9102-A110-A4D1702B3B7E}"/>
+          <p:cNvPr id="27" name="图片 26">
+            <a:extLst>
+              <a:ext uri="{FF2B5EF4-FFF2-40B4-BE49-F238E27FC236}">
+                <a16:creationId xmlns:a16="http://schemas.microsoft.com/office/drawing/2014/main" id="{E1E6E044-F900-87E2-18B4-4C048D5E418A}"/>
               </a:ext>
             </a:extLst>
           </p:cNvPr>
@@ -3316,8 +3413,8 @@
         </p:blipFill>
         <p:spPr>
           <a:xfrm>
-            <a:off x="14142720" y="24353545"/>
-            <a:ext cx="6654800" cy="4504250"/>
+            <a:off x="14148855" y="23048976"/>
+            <a:ext cx="6442379" cy="6989428"/>
           </a:xfrm>
           <a:prstGeom prst="rect">
             <a:avLst/>
@@ -3326,10 +3423,10 @@
       </p:pic>
       <p:pic>
         <p:nvPicPr>
-          <p:cNvPr id="10" name="图片 9">
-            <a:extLst>
-              <a:ext uri="{FF2B5EF4-FFF2-40B4-BE49-F238E27FC236}">
-                <a16:creationId xmlns:a16="http://schemas.microsoft.com/office/drawing/2014/main" id="{20CB003D-7156-18D3-F323-130FB98BF5A1}"/>
+          <p:cNvPr id="30" name="图片 29">
+            <a:extLst>
+              <a:ext uri="{FF2B5EF4-FFF2-40B4-BE49-F238E27FC236}">
+                <a16:creationId xmlns:a16="http://schemas.microsoft.com/office/drawing/2014/main" id="{6F53776D-F6F5-CCF5-B05F-65412B3D4970}"/>
               </a:ext>
             </a:extLst>
           </p:cNvPr>
@@ -3346,8 +3443,76 @@
         </p:blipFill>
         <p:spPr>
           <a:xfrm>
-            <a:off x="21053552" y="24144616"/>
-            <a:ext cx="5869382" cy="4922108"/>
+            <a:off x="20567865" y="22991831"/>
+            <a:ext cx="6398243" cy="6842646"/>
+          </a:xfrm>
+          <a:prstGeom prst="rect">
+            <a:avLst/>
+          </a:prstGeom>
+        </p:spPr>
+      </p:pic>
+      <p:sp>
+        <p:nvSpPr>
+          <p:cNvPr id="34" name="Text 94">
+            <a:extLst>
+              <a:ext uri="{FF2B5EF4-FFF2-40B4-BE49-F238E27FC236}">
+                <a16:creationId xmlns:a16="http://schemas.microsoft.com/office/drawing/2014/main" id="{00AB8687-0308-EA75-165A-8719E230410B}"/>
+              </a:ext>
+            </a:extLst>
+          </p:cNvPr>
+          <p:cNvSpPr>
+            <a:spLocks noGrp="1"/>
+          </p:cNvSpPr>
+          <p:nvPr/>
+        </p:nvSpPr>
+        <p:spPr>
+          <a:xfrm>
+            <a:off x="17352224" y="31937768"/>
+            <a:ext cx="9646920" cy="640080"/>
+          </a:xfrm>
+          <a:prstGeom prst="rect">
+            <a:avLst/>
+          </a:prstGeom>
+          <a:noFill/>
+        </p:spPr>
+        <p:txBody>
+          <a:bodyPr wrap="square" lIns="0" tIns="0" rIns="0" bIns="0" anchor="t">
+            <a:normAutofit fontScale="92500" lnSpcReduction="20000"/>
+          </a:bodyPr>
+          <a:lstStyle/>
+          <a:p>
+            <a:r>
+              <a:rPr lang="en-US" dirty="0"/>
+              <a:t>We gratefully acknowledge All of Us participants for their contributions, without whom this research would not have been possible. We also thank the National Institutes of Health’s All of Us Research Program for making available the participant data examined in this study.</a:t>
+            </a:r>
+            <a:endParaRPr dirty="0"/>
+          </a:p>
+        </p:txBody>
+      </p:sp>
+      <p:pic>
+        <p:nvPicPr>
+          <p:cNvPr id="35" name="图片 34" descr="User Support Help Center home page">
+            <a:extLst>
+              <a:ext uri="{FF2B5EF4-FFF2-40B4-BE49-F238E27FC236}">
+                <a16:creationId xmlns:a16="http://schemas.microsoft.com/office/drawing/2014/main" id="{3FA46FC3-98CF-BCCF-AC02-D2FC9DF6BBFC}"/>
+              </a:ext>
+            </a:extLst>
+          </p:cNvPr>
+          <p:cNvPicPr>
+            <a:picLocks noChangeAspect="1"/>
+          </p:cNvPicPr>
+          <p:nvPr/>
+        </p:nvPicPr>
+        <p:blipFill>
+          <a:blip r:embed="rId16"/>
+          <a:stretch>
+            <a:fillRect/>
+          </a:stretch>
+        </p:blipFill>
+        <p:spPr>
+          <a:xfrm>
+            <a:off x="26921564" y="31847887"/>
+            <a:ext cx="2299125" cy="814450"/>
           </a:xfrm>
           <a:prstGeom prst="rect">
             <a:avLst/>
